--- a/outputs/commercial-quality/kestrel-industrial-supply-pty-ltd-executive-presentation.pptx
+++ b/outputs/commercial-quality/kestrel-industrial-supply-pty-ltd-executive-presentation.pptx
@@ -2,22 +2,22 @@
 <file path=ppt/presentation.xml><?xml version="1.0" encoding="utf-8"?>
 <p:presentation xmlns:p="http://schemas.openxmlformats.org/presentationml/2006/main">
   <p:sldMasterIdLst>
-    <p:sldMasterId xmlns:r="http://schemas.openxmlformats.org/officeDocument/2006/relationships" id="2147483648" r:id="Rba90985409fd40d1"/>
+    <p:sldMasterId xmlns:r="http://schemas.openxmlformats.org/officeDocument/2006/relationships" id="2147483648" r:id="R91b7cb21ade14ed6"/>
   </p:sldMasterIdLst>
   <p:notesMasterIdLst>
-    <p:notesMasterId xmlns:r="http://schemas.openxmlformats.org/officeDocument/2006/relationships" r:id="R373def8abd1a43b6"/>
+    <p:notesMasterId xmlns:r="http://schemas.openxmlformats.org/officeDocument/2006/relationships" r:id="R5692cb9ab4284b22"/>
   </p:notesMasterIdLst>
   <p:sldIdLst>
-    <p:sldId xmlns:r="http://schemas.openxmlformats.org/officeDocument/2006/relationships" id="256" r:id="R22ff5accfc364381"/>
-    <p:sldId xmlns:r="http://schemas.openxmlformats.org/officeDocument/2006/relationships" id="257" r:id="R85afeca740264a20"/>
-    <p:sldId xmlns:r="http://schemas.openxmlformats.org/officeDocument/2006/relationships" id="258" r:id="Re0eb7aac568140c8"/>
-    <p:sldId xmlns:r="http://schemas.openxmlformats.org/officeDocument/2006/relationships" id="259" r:id="R01947e7880b24e18"/>
-    <p:sldId xmlns:r="http://schemas.openxmlformats.org/officeDocument/2006/relationships" id="260" r:id="R067217ad35f345ce"/>
-    <p:sldId xmlns:r="http://schemas.openxmlformats.org/officeDocument/2006/relationships" id="261" r:id="Rf428882c43de4ff9"/>
-    <p:sldId xmlns:r="http://schemas.openxmlformats.org/officeDocument/2006/relationships" id="262" r:id="R625d0630143647e4"/>
-    <p:sldId xmlns:r="http://schemas.openxmlformats.org/officeDocument/2006/relationships" id="263" r:id="Rbeb1a6bd0e184894"/>
-    <p:sldId xmlns:r="http://schemas.openxmlformats.org/officeDocument/2006/relationships" id="264" r:id="R5fe1f650f2c748ad"/>
-    <p:sldId xmlns:r="http://schemas.openxmlformats.org/officeDocument/2006/relationships" id="265" r:id="R2c333bbcbcde4b30"/>
+    <p:sldId xmlns:r="http://schemas.openxmlformats.org/officeDocument/2006/relationships" id="256" r:id="R4f4511f05a8943b8"/>
+    <p:sldId xmlns:r="http://schemas.openxmlformats.org/officeDocument/2006/relationships" id="257" r:id="R361ea5a187f24518"/>
+    <p:sldId xmlns:r="http://schemas.openxmlformats.org/officeDocument/2006/relationships" id="258" r:id="R580912c7239f410f"/>
+    <p:sldId xmlns:r="http://schemas.openxmlformats.org/officeDocument/2006/relationships" id="259" r:id="R7b66369502234262"/>
+    <p:sldId xmlns:r="http://schemas.openxmlformats.org/officeDocument/2006/relationships" id="260" r:id="Rd3307c46b96d4b6a"/>
+    <p:sldId xmlns:r="http://schemas.openxmlformats.org/officeDocument/2006/relationships" id="261" r:id="Rda3d0085bd324e4b"/>
+    <p:sldId xmlns:r="http://schemas.openxmlformats.org/officeDocument/2006/relationships" id="262" r:id="R5d2b58f612854ec4"/>
+    <p:sldId xmlns:r="http://schemas.openxmlformats.org/officeDocument/2006/relationships" id="263" r:id="R5b8bcf3156ab4ff6"/>
+    <p:sldId xmlns:r="http://schemas.openxmlformats.org/officeDocument/2006/relationships" id="264" r:id="R46fae3a4c01440b7"/>
+    <p:sldId xmlns:r="http://schemas.openxmlformats.org/officeDocument/2006/relationships" id="265" r:id="R353da95aaad7499c"/>
   </p:sldIdLst>
   <p:sldSz cx="12192000" cy="6858000"/>
   <p:notesSz cx="6858000" cy="9144000"/>
@@ -456,32 +456,47 @@
           </a:p>
           <a:p xmlns:a="http://schemas.openxmlformats.org/drawingml/2006/main">
             <a:r>
-              <a:t>- Assessment and reviewer source: persisted Kestrel engagement MKORD-2026-7FBBEE23.</a:t>
-            </a:r>
-          </a:p>
-          <a:p xmlns:a="http://schemas.openxmlformats.org/drawingml/2006/main">
-            <a:r>
-              <a:t>- McKinsey, A board perspective on enterprise risk management: https://www.mckinsey.com/~/media/mckinsey/dotcom/client_service/risk/working%20papers/18_a_board_perspective_on_enterprise_risk_management.pdf</a:t>
-            </a:r>
-          </a:p>
-          <a:p xmlns:a="http://schemas.openxmlformats.org/drawingml/2006/main">
-            <a:r>
-              <a:t>- Deloitte, Fraud Risk Management: https://www.deloitte.com/ch/en/services/financial-advisory/perspectives/fraud-risk-management-strategic-imperative.html</a:t>
-            </a:r>
-          </a:p>
-          <a:p xmlns:a="http://schemas.openxmlformats.org/drawingml/2006/main">
-            <a:r>
-              <a:t>- BCG, The Expanding Agenda for Boards of Directors: https://www.bcg.com/publications/2024/expanding-agenda-for-boards-of-directors</a:t>
-            </a:r>
-          </a:p>
-          <a:p xmlns:a="http://schemas.openxmlformats.org/drawingml/2006/main">
-            <a:r>
-              <a:t>- Bain, TCFD recommendations: https://www.bain.com/contentassets/6b37083d53dc4e9aa676993fa0c4c7dc/2022-tcfd-recommendations.pdf</a:t>
-            </a:r>
-          </a:p>
-          <a:p xmlns:a="http://schemas.openxmlformats.org/drawingml/2006/main">
-            <a:r>
-              <a:t>Cover claim is a narrative description of this deck, not a sourced external statistic.</a:t>
+              <a:t>- Source: persisted Kestrel engagement MKORD-2026-7FBBEE23.</a:t>
+            </a:r>
+          </a:p>
+          <a:p xmlns:a="http://schemas.openxmlformats.org/drawingml/2006/main">
+            <a:r>
+              <a:t>- McKinsey board risk perspective: https://www.mckinsey.com/~/media/mckinsey/dotcom/client_service/risk/working%20papers/18_a_board_perspective_on_enterprise_risk_management.pdf</a:t>
+            </a:r>
+          </a:p>
+          <a:p xmlns:a="http://schemas.openxmlformats.org/drawingml/2006/main">
+            <a:r>
+              <a:t>- Deloitte fraud risk management: https://www.deloitte.com/ch/en/services/financial-advisory/perspectives/fraud-risk-management-strategic-imperative.html</a:t>
+            </a:r>
+          </a:p>
+          <a:p xmlns:a="http://schemas.openxmlformats.org/drawingml/2006/main">
+            <a:r>
+              <a:t>- Preserve scope, position, information boundary, owner, date and proof in the annotated register.</a:t>
+            </a:r>
+          </a:p>
+          <a:p xmlns:a="http://schemas.openxmlformats.org/drawingml/2006/main">
+            <a:r>
+              <a:t>- Scenarios: actor, opportunity, entry point, mechanism, bypassed control, concealment, consequence, warning, containment, long-term response.</a:t>
+            </a:r>
+          </a:p>
+          <a:p xmlns:a="http://schemas.openxmlformats.org/drawingml/2006/main">
+            <a:r>
+              <a:t>- Controls: What (control objective), Who, Population, Frequency, Evidence retained, Independent check, Escalation, SLA, Effectiveness measure, Failure response.</a:t>
+            </a:r>
+          </a:p>
+          <a:p xmlns:a="http://schemas.openxmlformats.org/drawingml/2006/main">
+            <a:r>
+              <a:t>- Decisions: three options with cost, benefit, trade-off; recommendation, rationale, rejection reason, owner, deadline.</a:t>
+            </a:r>
+          </a:p>
+          <a:p xmlns:a="http://schemas.openxmlformats.org/drawingml/2006/main">
+            <a:r>
+              <a:t>- Traceability: annotated register preserves the source chain.</a:t>
+            </a:r>
+          </a:p>
+          <a:p xmlns:a="http://schemas.openxmlformats.org/drawingml/2006/main">
+            <a:r>
+              <a:t/>
             </a:r>
           </a:p>
         </p:txBody>
@@ -556,27 +571,42 @@
           </a:p>
           <a:p xmlns:a="http://schemas.openxmlformats.org/drawingml/2006/main">
             <a:r>
-              <a:t>- Assessment and reviewer source: persisted Kestrel engagement MKORD-2026-7FBBEE23.</a:t>
-            </a:r>
-          </a:p>
-          <a:p xmlns:a="http://schemas.openxmlformats.org/drawingml/2006/main">
-            <a:r>
-              <a:t>- McKinsey, A board perspective on enterprise risk management: https://www.mckinsey.com/~/media/mckinsey/dotcom/client_service/risk/working%20papers/18_a_board_perspective_on_enterprise_risk_management.pdf</a:t>
-            </a:r>
-          </a:p>
-          <a:p xmlns:a="http://schemas.openxmlformats.org/drawingml/2006/main">
-            <a:r>
-              <a:t>- Deloitte, Fraud Risk Management: https://www.deloitte.com/ch/en/services/financial-advisory/perspectives/fraud-risk-management-strategic-imperative.html</a:t>
-            </a:r>
-          </a:p>
-          <a:p xmlns:a="http://schemas.openxmlformats.org/drawingml/2006/main">
-            <a:r>
-              <a:t>- BCG, The Expanding Agenda for Boards of Directors: https://www.bcg.com/publications/2024/expanding-agenda-for-boards-of-directors</a:t>
-            </a:r>
-          </a:p>
-          <a:p xmlns:a="http://schemas.openxmlformats.org/drawingml/2006/main">
-            <a:r>
-              <a:t>- Bain, TCFD recommendations: https://www.bain.com/contentassets/6b37083d53dc4e9aa676993fa0c4c7dc/2022-tcfd-recommendations.pdf</a:t>
+              <a:t>- Source: persisted Kestrel engagement MKORD-2026-7FBBEE23.</a:t>
+            </a:r>
+          </a:p>
+          <a:p xmlns:a="http://schemas.openxmlformats.org/drawingml/2006/main">
+            <a:r>
+              <a:t>- McKinsey board risk perspective: https://www.mckinsey.com/~/media/mckinsey/dotcom/client_service/risk/working%20papers/18_a_board_perspective_on_enterprise_risk_management.pdf</a:t>
+            </a:r>
+          </a:p>
+          <a:p xmlns:a="http://schemas.openxmlformats.org/drawingml/2006/main">
+            <a:r>
+              <a:t>- Deloitte fraud risk management: https://www.deloitte.com/ch/en/services/financial-advisory/perspectives/fraud-risk-management-strategic-imperative.html</a:t>
+            </a:r>
+          </a:p>
+          <a:p xmlns:a="http://schemas.openxmlformats.org/drawingml/2006/main">
+            <a:r>
+              <a:t>- Preserve scope, position, information boundary, owner, date and proof in the annotated register.</a:t>
+            </a:r>
+          </a:p>
+          <a:p xmlns:a="http://schemas.openxmlformats.org/drawingml/2006/main">
+            <a:r>
+              <a:t>- Scenarios: actor, opportunity, entry point, mechanism, bypassed control, concealment, consequence, warning, containment, long-term response.</a:t>
+            </a:r>
+          </a:p>
+          <a:p xmlns:a="http://schemas.openxmlformats.org/drawingml/2006/main">
+            <a:r>
+              <a:t>- Controls: What (control objective), Who, Population, Frequency, Evidence retained, Independent check, Escalation, SLA, Effectiveness measure, Failure response.</a:t>
+            </a:r>
+          </a:p>
+          <a:p xmlns:a="http://schemas.openxmlformats.org/drawingml/2006/main">
+            <a:r>
+              <a:t>- Decisions: three options with cost, benefit, trade-off; recommendation, rationale, rejection reason, owner, deadline.</a:t>
+            </a:r>
+          </a:p>
+          <a:p xmlns:a="http://schemas.openxmlformats.org/drawingml/2006/main">
+            <a:r>
+              <a:t>- Traceability: annotated register preserves the source chain.</a:t>
             </a:r>
           </a:p>
           <a:p xmlns:a="http://schemas.openxmlformats.org/drawingml/2006/main">
@@ -656,27 +686,42 @@
           </a:p>
           <a:p xmlns:a="http://schemas.openxmlformats.org/drawingml/2006/main">
             <a:r>
-              <a:t>- Assessment and reviewer source: persisted Kestrel engagement MKORD-2026-7FBBEE23.</a:t>
-            </a:r>
-          </a:p>
-          <a:p xmlns:a="http://schemas.openxmlformats.org/drawingml/2006/main">
-            <a:r>
-              <a:t>- McKinsey, A board perspective on enterprise risk management: https://www.mckinsey.com/~/media/mckinsey/dotcom/client_service/risk/working%20papers/18_a_board_perspective_on_enterprise_risk_management.pdf</a:t>
-            </a:r>
-          </a:p>
-          <a:p xmlns:a="http://schemas.openxmlformats.org/drawingml/2006/main">
-            <a:r>
-              <a:t>- Deloitte, Fraud Risk Management: https://www.deloitte.com/ch/en/services/financial-advisory/perspectives/fraud-risk-management-strategic-imperative.html</a:t>
-            </a:r>
-          </a:p>
-          <a:p xmlns:a="http://schemas.openxmlformats.org/drawingml/2006/main">
-            <a:r>
-              <a:t>- BCG, The Expanding Agenda for Boards of Directors: https://www.bcg.com/publications/2024/expanding-agenda-for-boards-of-directors</a:t>
-            </a:r>
-          </a:p>
-          <a:p xmlns:a="http://schemas.openxmlformats.org/drawingml/2006/main">
-            <a:r>
-              <a:t>- Bain, TCFD recommendations: https://www.bain.com/contentassets/6b37083d53dc4e9aa676993fa0c4c7dc/2022-tcfd-recommendations.pdf</a:t>
+              <a:t>- Source: persisted Kestrel engagement MKORD-2026-7FBBEE23.</a:t>
+            </a:r>
+          </a:p>
+          <a:p xmlns:a="http://schemas.openxmlformats.org/drawingml/2006/main">
+            <a:r>
+              <a:t>- McKinsey board risk perspective: https://www.mckinsey.com/~/media/mckinsey/dotcom/client_service/risk/working%20papers/18_a_board_perspective_on_enterprise_risk_management.pdf</a:t>
+            </a:r>
+          </a:p>
+          <a:p xmlns:a="http://schemas.openxmlformats.org/drawingml/2006/main">
+            <a:r>
+              <a:t>- Deloitte fraud risk management: https://www.deloitte.com/ch/en/services/financial-advisory/perspectives/fraud-risk-management-strategic-imperative.html</a:t>
+            </a:r>
+          </a:p>
+          <a:p xmlns:a="http://schemas.openxmlformats.org/drawingml/2006/main">
+            <a:r>
+              <a:t>- Preserve scope, position, information boundary, owner, date and proof in the annotated register.</a:t>
+            </a:r>
+          </a:p>
+          <a:p xmlns:a="http://schemas.openxmlformats.org/drawingml/2006/main">
+            <a:r>
+              <a:t>- Scenarios: actor, opportunity, entry point, mechanism, bypassed control, concealment, consequence, warning, containment, long-term response.</a:t>
+            </a:r>
+          </a:p>
+          <a:p xmlns:a="http://schemas.openxmlformats.org/drawingml/2006/main">
+            <a:r>
+              <a:t>- Controls: What (control objective), Who, Population, Frequency, Evidence retained, Independent check, Escalation, SLA, Effectiveness measure, Failure response.</a:t>
+            </a:r>
+          </a:p>
+          <a:p xmlns:a="http://schemas.openxmlformats.org/drawingml/2006/main">
+            <a:r>
+              <a:t>- Decisions: three options with cost, benefit, trade-off; recommendation, rationale, rejection reason, owner, deadline.</a:t>
+            </a:r>
+          </a:p>
+          <a:p xmlns:a="http://schemas.openxmlformats.org/drawingml/2006/main">
+            <a:r>
+              <a:t>- Traceability: annotated register preserves the source chain.</a:t>
             </a:r>
           </a:p>
           <a:p xmlns:a="http://schemas.openxmlformats.org/drawingml/2006/main">
@@ -756,27 +801,42 @@
           </a:p>
           <a:p xmlns:a="http://schemas.openxmlformats.org/drawingml/2006/main">
             <a:r>
-              <a:t>- Assessment and reviewer source: persisted Kestrel engagement MKORD-2026-7FBBEE23.</a:t>
-            </a:r>
-          </a:p>
-          <a:p xmlns:a="http://schemas.openxmlformats.org/drawingml/2006/main">
-            <a:r>
-              <a:t>- McKinsey, A board perspective on enterprise risk management: https://www.mckinsey.com/~/media/mckinsey/dotcom/client_service/risk/working%20papers/18_a_board_perspective_on_enterprise_risk_management.pdf</a:t>
-            </a:r>
-          </a:p>
-          <a:p xmlns:a="http://schemas.openxmlformats.org/drawingml/2006/main">
-            <a:r>
-              <a:t>- Deloitte, Fraud Risk Management: https://www.deloitte.com/ch/en/services/financial-advisory/perspectives/fraud-risk-management-strategic-imperative.html</a:t>
-            </a:r>
-          </a:p>
-          <a:p xmlns:a="http://schemas.openxmlformats.org/drawingml/2006/main">
-            <a:r>
-              <a:t>- BCG, The Expanding Agenda for Boards of Directors: https://www.bcg.com/publications/2024/expanding-agenda-for-boards-of-directors</a:t>
-            </a:r>
-          </a:p>
-          <a:p xmlns:a="http://schemas.openxmlformats.org/drawingml/2006/main">
-            <a:r>
-              <a:t>- Bain, TCFD recommendations: https://www.bain.com/contentassets/6b37083d53dc4e9aa676993fa0c4c7dc/2022-tcfd-recommendations.pdf</a:t>
+              <a:t>- Source: persisted Kestrel engagement MKORD-2026-7FBBEE23.</a:t>
+            </a:r>
+          </a:p>
+          <a:p xmlns:a="http://schemas.openxmlformats.org/drawingml/2006/main">
+            <a:r>
+              <a:t>- McKinsey board risk perspective: https://www.mckinsey.com/~/media/mckinsey/dotcom/client_service/risk/working%20papers/18_a_board_perspective_on_enterprise_risk_management.pdf</a:t>
+            </a:r>
+          </a:p>
+          <a:p xmlns:a="http://schemas.openxmlformats.org/drawingml/2006/main">
+            <a:r>
+              <a:t>- Deloitte fraud risk management: https://www.deloitte.com/ch/en/services/financial-advisory/perspectives/fraud-risk-management-strategic-imperative.html</a:t>
+            </a:r>
+          </a:p>
+          <a:p xmlns:a="http://schemas.openxmlformats.org/drawingml/2006/main">
+            <a:r>
+              <a:t>- Preserve scope, position, information boundary, owner, date and proof in the annotated register.</a:t>
+            </a:r>
+          </a:p>
+          <a:p xmlns:a="http://schemas.openxmlformats.org/drawingml/2006/main">
+            <a:r>
+              <a:t>- Scenarios: actor, opportunity, entry point, mechanism, bypassed control, concealment, consequence, warning, containment, long-term response.</a:t>
+            </a:r>
+          </a:p>
+          <a:p xmlns:a="http://schemas.openxmlformats.org/drawingml/2006/main">
+            <a:r>
+              <a:t>- Controls: What (control objective), Who, Population, Frequency, Evidence retained, Independent check, Escalation, SLA, Effectiveness measure, Failure response.</a:t>
+            </a:r>
+          </a:p>
+          <a:p xmlns:a="http://schemas.openxmlformats.org/drawingml/2006/main">
+            <a:r>
+              <a:t>- Decisions: three options with cost, benefit, trade-off; recommendation, rationale, rejection reason, owner, deadline.</a:t>
+            </a:r>
+          </a:p>
+          <a:p xmlns:a="http://schemas.openxmlformats.org/drawingml/2006/main">
+            <a:r>
+              <a:t>- Traceability: annotated register preserves the source chain.</a:t>
             </a:r>
           </a:p>
           <a:p xmlns:a="http://schemas.openxmlformats.org/drawingml/2006/main">
@@ -856,27 +916,42 @@
           </a:p>
           <a:p xmlns:a="http://schemas.openxmlformats.org/drawingml/2006/main">
             <a:r>
-              <a:t>- Assessment and reviewer source: persisted Kestrel engagement MKORD-2026-7FBBEE23.</a:t>
-            </a:r>
-          </a:p>
-          <a:p xmlns:a="http://schemas.openxmlformats.org/drawingml/2006/main">
-            <a:r>
-              <a:t>- McKinsey, A board perspective on enterprise risk management: https://www.mckinsey.com/~/media/mckinsey/dotcom/client_service/risk/working%20papers/18_a_board_perspective_on_enterprise_risk_management.pdf</a:t>
-            </a:r>
-          </a:p>
-          <a:p xmlns:a="http://schemas.openxmlformats.org/drawingml/2006/main">
-            <a:r>
-              <a:t>- Deloitte, Fraud Risk Management: https://www.deloitte.com/ch/en/services/financial-advisory/perspectives/fraud-risk-management-strategic-imperative.html</a:t>
-            </a:r>
-          </a:p>
-          <a:p xmlns:a="http://schemas.openxmlformats.org/drawingml/2006/main">
-            <a:r>
-              <a:t>- BCG, The Expanding Agenda for Boards of Directors: https://www.bcg.com/publications/2024/expanding-agenda-for-boards-of-directors</a:t>
-            </a:r>
-          </a:p>
-          <a:p xmlns:a="http://schemas.openxmlformats.org/drawingml/2006/main">
-            <a:r>
-              <a:t>- Bain, TCFD recommendations: https://www.bain.com/contentassets/6b37083d53dc4e9aa676993fa0c4c7dc/2022-tcfd-recommendations.pdf</a:t>
+              <a:t>- Source: persisted Kestrel engagement MKORD-2026-7FBBEE23.</a:t>
+            </a:r>
+          </a:p>
+          <a:p xmlns:a="http://schemas.openxmlformats.org/drawingml/2006/main">
+            <a:r>
+              <a:t>- McKinsey board risk perspective: https://www.mckinsey.com/~/media/mckinsey/dotcom/client_service/risk/working%20papers/18_a_board_perspective_on_enterprise_risk_management.pdf</a:t>
+            </a:r>
+          </a:p>
+          <a:p xmlns:a="http://schemas.openxmlformats.org/drawingml/2006/main">
+            <a:r>
+              <a:t>- Deloitte fraud risk management: https://www.deloitte.com/ch/en/services/financial-advisory/perspectives/fraud-risk-management-strategic-imperative.html</a:t>
+            </a:r>
+          </a:p>
+          <a:p xmlns:a="http://schemas.openxmlformats.org/drawingml/2006/main">
+            <a:r>
+              <a:t>- Preserve scope, position, information boundary, owner, date and proof in the annotated register.</a:t>
+            </a:r>
+          </a:p>
+          <a:p xmlns:a="http://schemas.openxmlformats.org/drawingml/2006/main">
+            <a:r>
+              <a:t>- Scenarios: actor, opportunity, entry point, mechanism, bypassed control, concealment, consequence, warning, containment, long-term response.</a:t>
+            </a:r>
+          </a:p>
+          <a:p xmlns:a="http://schemas.openxmlformats.org/drawingml/2006/main">
+            <a:r>
+              <a:t>- Controls: What (control objective), Who, Population, Frequency, Evidence retained, Independent check, Escalation, SLA, Effectiveness measure, Failure response.</a:t>
+            </a:r>
+          </a:p>
+          <a:p xmlns:a="http://schemas.openxmlformats.org/drawingml/2006/main">
+            <a:r>
+              <a:t>- Decisions: three options with cost, benefit, trade-off; recommendation, rationale, rejection reason, owner, deadline.</a:t>
+            </a:r>
+          </a:p>
+          <a:p xmlns:a="http://schemas.openxmlformats.org/drawingml/2006/main">
+            <a:r>
+              <a:t>- Traceability: annotated register preserves the source chain.</a:t>
             </a:r>
           </a:p>
           <a:p xmlns:a="http://schemas.openxmlformats.org/drawingml/2006/main">
@@ -956,27 +1031,42 @@
           </a:p>
           <a:p xmlns:a="http://schemas.openxmlformats.org/drawingml/2006/main">
             <a:r>
-              <a:t>- Assessment and reviewer source: persisted Kestrel engagement MKORD-2026-7FBBEE23.</a:t>
-            </a:r>
-          </a:p>
-          <a:p xmlns:a="http://schemas.openxmlformats.org/drawingml/2006/main">
-            <a:r>
-              <a:t>- McKinsey, A board perspective on enterprise risk management: https://www.mckinsey.com/~/media/mckinsey/dotcom/client_service/risk/working%20papers/18_a_board_perspective_on_enterprise_risk_management.pdf</a:t>
-            </a:r>
-          </a:p>
-          <a:p xmlns:a="http://schemas.openxmlformats.org/drawingml/2006/main">
-            <a:r>
-              <a:t>- Deloitte, Fraud Risk Management: https://www.deloitte.com/ch/en/services/financial-advisory/perspectives/fraud-risk-management-strategic-imperative.html</a:t>
-            </a:r>
-          </a:p>
-          <a:p xmlns:a="http://schemas.openxmlformats.org/drawingml/2006/main">
-            <a:r>
-              <a:t>- BCG, The Expanding Agenda for Boards of Directors: https://www.bcg.com/publications/2024/expanding-agenda-for-boards-of-directors</a:t>
-            </a:r>
-          </a:p>
-          <a:p xmlns:a="http://schemas.openxmlformats.org/drawingml/2006/main">
-            <a:r>
-              <a:t>- Bain, TCFD recommendations: https://www.bain.com/contentassets/6b37083d53dc4e9aa676993fa0c4c7dc/2022-tcfd-recommendations.pdf</a:t>
+              <a:t>- Source: persisted Kestrel engagement MKORD-2026-7FBBEE23.</a:t>
+            </a:r>
+          </a:p>
+          <a:p xmlns:a="http://schemas.openxmlformats.org/drawingml/2006/main">
+            <a:r>
+              <a:t>- McKinsey board risk perspective: https://www.mckinsey.com/~/media/mckinsey/dotcom/client_service/risk/working%20papers/18_a_board_perspective_on_enterprise_risk_management.pdf</a:t>
+            </a:r>
+          </a:p>
+          <a:p xmlns:a="http://schemas.openxmlformats.org/drawingml/2006/main">
+            <a:r>
+              <a:t>- Deloitte fraud risk management: https://www.deloitte.com/ch/en/services/financial-advisory/perspectives/fraud-risk-management-strategic-imperative.html</a:t>
+            </a:r>
+          </a:p>
+          <a:p xmlns:a="http://schemas.openxmlformats.org/drawingml/2006/main">
+            <a:r>
+              <a:t>- Preserve scope, position, information boundary, owner, date and proof in the annotated register.</a:t>
+            </a:r>
+          </a:p>
+          <a:p xmlns:a="http://schemas.openxmlformats.org/drawingml/2006/main">
+            <a:r>
+              <a:t>- Scenarios: actor, opportunity, entry point, mechanism, bypassed control, concealment, consequence, warning, containment, long-term response.</a:t>
+            </a:r>
+          </a:p>
+          <a:p xmlns:a="http://schemas.openxmlformats.org/drawingml/2006/main">
+            <a:r>
+              <a:t>- Controls: What (control objective), Who, Population, Frequency, Evidence retained, Independent check, Escalation, SLA, Effectiveness measure, Failure response.</a:t>
+            </a:r>
+          </a:p>
+          <a:p xmlns:a="http://schemas.openxmlformats.org/drawingml/2006/main">
+            <a:r>
+              <a:t>- Decisions: three options with cost, benefit, trade-off; recommendation, rationale, rejection reason, owner, deadline.</a:t>
+            </a:r>
+          </a:p>
+          <a:p xmlns:a="http://schemas.openxmlformats.org/drawingml/2006/main">
+            <a:r>
+              <a:t>- Traceability: annotated register preserves the source chain.</a:t>
             </a:r>
           </a:p>
           <a:p xmlns:a="http://schemas.openxmlformats.org/drawingml/2006/main">
@@ -1056,27 +1146,42 @@
           </a:p>
           <a:p xmlns:a="http://schemas.openxmlformats.org/drawingml/2006/main">
             <a:r>
-              <a:t>- Assessment and reviewer source: persisted Kestrel engagement MKORD-2026-7FBBEE23.</a:t>
-            </a:r>
-          </a:p>
-          <a:p xmlns:a="http://schemas.openxmlformats.org/drawingml/2006/main">
-            <a:r>
-              <a:t>- McKinsey, A board perspective on enterprise risk management: https://www.mckinsey.com/~/media/mckinsey/dotcom/client_service/risk/working%20papers/18_a_board_perspective_on_enterprise_risk_management.pdf</a:t>
-            </a:r>
-          </a:p>
-          <a:p xmlns:a="http://schemas.openxmlformats.org/drawingml/2006/main">
-            <a:r>
-              <a:t>- Deloitte, Fraud Risk Management: https://www.deloitte.com/ch/en/services/financial-advisory/perspectives/fraud-risk-management-strategic-imperative.html</a:t>
-            </a:r>
-          </a:p>
-          <a:p xmlns:a="http://schemas.openxmlformats.org/drawingml/2006/main">
-            <a:r>
-              <a:t>- BCG, The Expanding Agenda for Boards of Directors: https://www.bcg.com/publications/2024/expanding-agenda-for-boards-of-directors</a:t>
-            </a:r>
-          </a:p>
-          <a:p xmlns:a="http://schemas.openxmlformats.org/drawingml/2006/main">
-            <a:r>
-              <a:t>- Bain, TCFD recommendations: https://www.bain.com/contentassets/6b37083d53dc4e9aa676993fa0c4c7dc/2022-tcfd-recommendations.pdf</a:t>
+              <a:t>- Source: persisted Kestrel engagement MKORD-2026-7FBBEE23.</a:t>
+            </a:r>
+          </a:p>
+          <a:p xmlns:a="http://schemas.openxmlformats.org/drawingml/2006/main">
+            <a:r>
+              <a:t>- McKinsey board risk perspective: https://www.mckinsey.com/~/media/mckinsey/dotcom/client_service/risk/working%20papers/18_a_board_perspective_on_enterprise_risk_management.pdf</a:t>
+            </a:r>
+          </a:p>
+          <a:p xmlns:a="http://schemas.openxmlformats.org/drawingml/2006/main">
+            <a:r>
+              <a:t>- Deloitte fraud risk management: https://www.deloitte.com/ch/en/services/financial-advisory/perspectives/fraud-risk-management-strategic-imperative.html</a:t>
+            </a:r>
+          </a:p>
+          <a:p xmlns:a="http://schemas.openxmlformats.org/drawingml/2006/main">
+            <a:r>
+              <a:t>- Preserve scope, position, information boundary, owner, date and proof in the annotated register.</a:t>
+            </a:r>
+          </a:p>
+          <a:p xmlns:a="http://schemas.openxmlformats.org/drawingml/2006/main">
+            <a:r>
+              <a:t>- Scenarios: actor, opportunity, entry point, mechanism, bypassed control, concealment, consequence, warning, containment, long-term response.</a:t>
+            </a:r>
+          </a:p>
+          <a:p xmlns:a="http://schemas.openxmlformats.org/drawingml/2006/main">
+            <a:r>
+              <a:t>- Controls: What (control objective), Who, Population, Frequency, Evidence retained, Independent check, Escalation, SLA, Effectiveness measure, Failure response.</a:t>
+            </a:r>
+          </a:p>
+          <a:p xmlns:a="http://schemas.openxmlformats.org/drawingml/2006/main">
+            <a:r>
+              <a:t>- Decisions: three options with cost, benefit, trade-off; recommendation, rationale, rejection reason, owner, deadline.</a:t>
+            </a:r>
+          </a:p>
+          <a:p xmlns:a="http://schemas.openxmlformats.org/drawingml/2006/main">
+            <a:r>
+              <a:t>- Traceability: annotated register preserves the source chain.</a:t>
             </a:r>
           </a:p>
           <a:p xmlns:a="http://schemas.openxmlformats.org/drawingml/2006/main">
@@ -1156,27 +1261,42 @@
           </a:p>
           <a:p xmlns:a="http://schemas.openxmlformats.org/drawingml/2006/main">
             <a:r>
-              <a:t>- Assessment and reviewer source: persisted Kestrel engagement MKORD-2026-7FBBEE23.</a:t>
-            </a:r>
-          </a:p>
-          <a:p xmlns:a="http://schemas.openxmlformats.org/drawingml/2006/main">
-            <a:r>
-              <a:t>- McKinsey, A board perspective on enterprise risk management: https://www.mckinsey.com/~/media/mckinsey/dotcom/client_service/risk/working%20papers/18_a_board_perspective_on_enterprise_risk_management.pdf</a:t>
-            </a:r>
-          </a:p>
-          <a:p xmlns:a="http://schemas.openxmlformats.org/drawingml/2006/main">
-            <a:r>
-              <a:t>- Deloitte, Fraud Risk Management: https://www.deloitte.com/ch/en/services/financial-advisory/perspectives/fraud-risk-management-strategic-imperative.html</a:t>
-            </a:r>
-          </a:p>
-          <a:p xmlns:a="http://schemas.openxmlformats.org/drawingml/2006/main">
-            <a:r>
-              <a:t>- BCG, The Expanding Agenda for Boards of Directors: https://www.bcg.com/publications/2024/expanding-agenda-for-boards-of-directors</a:t>
-            </a:r>
-          </a:p>
-          <a:p xmlns:a="http://schemas.openxmlformats.org/drawingml/2006/main">
-            <a:r>
-              <a:t>- Bain, TCFD recommendations: https://www.bain.com/contentassets/6b37083d53dc4e9aa676993fa0c4c7dc/2022-tcfd-recommendations.pdf</a:t>
+              <a:t>- Source: persisted Kestrel engagement MKORD-2026-7FBBEE23.</a:t>
+            </a:r>
+          </a:p>
+          <a:p xmlns:a="http://schemas.openxmlformats.org/drawingml/2006/main">
+            <a:r>
+              <a:t>- McKinsey board risk perspective: https://www.mckinsey.com/~/media/mckinsey/dotcom/client_service/risk/working%20papers/18_a_board_perspective_on_enterprise_risk_management.pdf</a:t>
+            </a:r>
+          </a:p>
+          <a:p xmlns:a="http://schemas.openxmlformats.org/drawingml/2006/main">
+            <a:r>
+              <a:t>- Deloitte fraud risk management: https://www.deloitte.com/ch/en/services/financial-advisory/perspectives/fraud-risk-management-strategic-imperative.html</a:t>
+            </a:r>
+          </a:p>
+          <a:p xmlns:a="http://schemas.openxmlformats.org/drawingml/2006/main">
+            <a:r>
+              <a:t>- Preserve scope, position, information boundary, owner, date and proof in the annotated register.</a:t>
+            </a:r>
+          </a:p>
+          <a:p xmlns:a="http://schemas.openxmlformats.org/drawingml/2006/main">
+            <a:r>
+              <a:t>- Scenarios: actor, opportunity, entry point, mechanism, bypassed control, concealment, consequence, warning, containment, long-term response.</a:t>
+            </a:r>
+          </a:p>
+          <a:p xmlns:a="http://schemas.openxmlformats.org/drawingml/2006/main">
+            <a:r>
+              <a:t>- Controls: What (control objective), Who, Population, Frequency, Evidence retained, Independent check, Escalation, SLA, Effectiveness measure, Failure response.</a:t>
+            </a:r>
+          </a:p>
+          <a:p xmlns:a="http://schemas.openxmlformats.org/drawingml/2006/main">
+            <a:r>
+              <a:t>- Decisions: three options with cost, benefit, trade-off; recommendation, rationale, rejection reason, owner, deadline.</a:t>
+            </a:r>
+          </a:p>
+          <a:p xmlns:a="http://schemas.openxmlformats.org/drawingml/2006/main">
+            <a:r>
+              <a:t>- Traceability: annotated register preserves the source chain.</a:t>
             </a:r>
           </a:p>
           <a:p xmlns:a="http://schemas.openxmlformats.org/drawingml/2006/main">
@@ -1256,27 +1376,42 @@
           </a:p>
           <a:p xmlns:a="http://schemas.openxmlformats.org/drawingml/2006/main">
             <a:r>
-              <a:t>- Assessment and reviewer source: persisted Kestrel engagement MKORD-2026-7FBBEE23.</a:t>
-            </a:r>
-          </a:p>
-          <a:p xmlns:a="http://schemas.openxmlformats.org/drawingml/2006/main">
-            <a:r>
-              <a:t>- McKinsey, A board perspective on enterprise risk management: https://www.mckinsey.com/~/media/mckinsey/dotcom/client_service/risk/working%20papers/18_a_board_perspective_on_enterprise_risk_management.pdf</a:t>
-            </a:r>
-          </a:p>
-          <a:p xmlns:a="http://schemas.openxmlformats.org/drawingml/2006/main">
-            <a:r>
-              <a:t>- Deloitte, Fraud Risk Management: https://www.deloitte.com/ch/en/services/financial-advisory/perspectives/fraud-risk-management-strategic-imperative.html</a:t>
-            </a:r>
-          </a:p>
-          <a:p xmlns:a="http://schemas.openxmlformats.org/drawingml/2006/main">
-            <a:r>
-              <a:t>- BCG, The Expanding Agenda for Boards of Directors: https://www.bcg.com/publications/2024/expanding-agenda-for-boards-of-directors</a:t>
-            </a:r>
-          </a:p>
-          <a:p xmlns:a="http://schemas.openxmlformats.org/drawingml/2006/main">
-            <a:r>
-              <a:t>- Bain, TCFD recommendations: https://www.bain.com/contentassets/6b37083d53dc4e9aa676993fa0c4c7dc/2022-tcfd-recommendations.pdf</a:t>
+              <a:t>- Source: persisted Kestrel engagement MKORD-2026-7FBBEE23.</a:t>
+            </a:r>
+          </a:p>
+          <a:p xmlns:a="http://schemas.openxmlformats.org/drawingml/2006/main">
+            <a:r>
+              <a:t>- McKinsey board risk perspective: https://www.mckinsey.com/~/media/mckinsey/dotcom/client_service/risk/working%20papers/18_a_board_perspective_on_enterprise_risk_management.pdf</a:t>
+            </a:r>
+          </a:p>
+          <a:p xmlns:a="http://schemas.openxmlformats.org/drawingml/2006/main">
+            <a:r>
+              <a:t>- Deloitte fraud risk management: https://www.deloitte.com/ch/en/services/financial-advisory/perspectives/fraud-risk-management-strategic-imperative.html</a:t>
+            </a:r>
+          </a:p>
+          <a:p xmlns:a="http://schemas.openxmlformats.org/drawingml/2006/main">
+            <a:r>
+              <a:t>- Preserve scope, position, information boundary, owner, date and proof in the annotated register.</a:t>
+            </a:r>
+          </a:p>
+          <a:p xmlns:a="http://schemas.openxmlformats.org/drawingml/2006/main">
+            <a:r>
+              <a:t>- Scenarios: actor, opportunity, entry point, mechanism, bypassed control, concealment, consequence, warning, containment, long-term response.</a:t>
+            </a:r>
+          </a:p>
+          <a:p xmlns:a="http://schemas.openxmlformats.org/drawingml/2006/main">
+            <a:r>
+              <a:t>- Controls: What (control objective), Who, Population, Frequency, Evidence retained, Independent check, Escalation, SLA, Effectiveness measure, Failure response.</a:t>
+            </a:r>
+          </a:p>
+          <a:p xmlns:a="http://schemas.openxmlformats.org/drawingml/2006/main">
+            <a:r>
+              <a:t>- Decisions: three options with cost, benefit, trade-off; recommendation, rationale, rejection reason, owner, deadline.</a:t>
+            </a:r>
+          </a:p>
+          <a:p xmlns:a="http://schemas.openxmlformats.org/drawingml/2006/main">
+            <a:r>
+              <a:t>- Traceability: annotated register preserves the source chain.</a:t>
             </a:r>
           </a:p>
           <a:p xmlns:a="http://schemas.openxmlformats.org/drawingml/2006/main">
@@ -1356,27 +1491,42 @@
           </a:p>
           <a:p xmlns:a="http://schemas.openxmlformats.org/drawingml/2006/main">
             <a:r>
-              <a:t>- Assessment and reviewer source: persisted Kestrel engagement MKORD-2026-7FBBEE23.</a:t>
-            </a:r>
-          </a:p>
-          <a:p xmlns:a="http://schemas.openxmlformats.org/drawingml/2006/main">
-            <a:r>
-              <a:t>- McKinsey, A board perspective on enterprise risk management: https://www.mckinsey.com/~/media/mckinsey/dotcom/client_service/risk/working%20papers/18_a_board_perspective_on_enterprise_risk_management.pdf</a:t>
-            </a:r>
-          </a:p>
-          <a:p xmlns:a="http://schemas.openxmlformats.org/drawingml/2006/main">
-            <a:r>
-              <a:t>- Deloitte, Fraud Risk Management: https://www.deloitte.com/ch/en/services/financial-advisory/perspectives/fraud-risk-management-strategic-imperative.html</a:t>
-            </a:r>
-          </a:p>
-          <a:p xmlns:a="http://schemas.openxmlformats.org/drawingml/2006/main">
-            <a:r>
-              <a:t>- BCG, The Expanding Agenda for Boards of Directors: https://www.bcg.com/publications/2024/expanding-agenda-for-boards-of-directors</a:t>
-            </a:r>
-          </a:p>
-          <a:p xmlns:a="http://schemas.openxmlformats.org/drawingml/2006/main">
-            <a:r>
-              <a:t>- Bain, TCFD recommendations: https://www.bain.com/contentassets/6b37083d53dc4e9aa676993fa0c4c7dc/2022-tcfd-recommendations.pdf</a:t>
+              <a:t>- Source: persisted Kestrel engagement MKORD-2026-7FBBEE23.</a:t>
+            </a:r>
+          </a:p>
+          <a:p xmlns:a="http://schemas.openxmlformats.org/drawingml/2006/main">
+            <a:r>
+              <a:t>- McKinsey board risk perspective: https://www.mckinsey.com/~/media/mckinsey/dotcom/client_service/risk/working%20papers/18_a_board_perspective_on_enterprise_risk_management.pdf</a:t>
+            </a:r>
+          </a:p>
+          <a:p xmlns:a="http://schemas.openxmlformats.org/drawingml/2006/main">
+            <a:r>
+              <a:t>- Deloitte fraud risk management: https://www.deloitte.com/ch/en/services/financial-advisory/perspectives/fraud-risk-management-strategic-imperative.html</a:t>
+            </a:r>
+          </a:p>
+          <a:p xmlns:a="http://schemas.openxmlformats.org/drawingml/2006/main">
+            <a:r>
+              <a:t>- Preserve scope, position, information boundary, owner, date and proof in the annotated register.</a:t>
+            </a:r>
+          </a:p>
+          <a:p xmlns:a="http://schemas.openxmlformats.org/drawingml/2006/main">
+            <a:r>
+              <a:t>- Scenarios: actor, opportunity, entry point, mechanism, bypassed control, concealment, consequence, warning, containment, long-term response.</a:t>
+            </a:r>
+          </a:p>
+          <a:p xmlns:a="http://schemas.openxmlformats.org/drawingml/2006/main">
+            <a:r>
+              <a:t>- Controls: What (control objective), Who, Population, Frequency, Evidence retained, Independent check, Escalation, SLA, Effectiveness measure, Failure response.</a:t>
+            </a:r>
+          </a:p>
+          <a:p xmlns:a="http://schemas.openxmlformats.org/drawingml/2006/main">
+            <a:r>
+              <a:t>- Decisions: three options with cost, benefit, trade-off; recommendation, rationale, rejection reason, owner, deadline.</a:t>
+            </a:r>
+          </a:p>
+          <a:p xmlns:a="http://schemas.openxmlformats.org/drawingml/2006/main">
+            <a:r>
+              <a:t>- Traceability: annotated register preserves the source chain.</a:t>
             </a:r>
           </a:p>
           <a:p xmlns:a="http://schemas.openxmlformats.org/drawingml/2006/main">
@@ -1449,7 +1599,7 @@
   </p:cSld>
   <p:clrMap bg1="lt1" tx1="dk1" bg2="lt2" tx2="dk2" accent1="accent1" accent2="accent2" accent3="accent3" accent4="accent4" accent5="accent5" accent6="accent6" hlink="hlink" folHlink="folHlink"/>
   <p:sldLayoutIdLst>
-    <p:sldLayoutId xmlns:r="http://schemas.openxmlformats.org/officeDocument/2006/relationships" id="2147483649" r:id="R9635701622a84813"/>
+    <p:sldLayoutId xmlns:r="http://schemas.openxmlformats.org/officeDocument/2006/relationships" id="2147483649" r:id="R679a3d73a6cc47a4"/>
   </p:sldLayoutIdLst>
   <p:txStyles>
     <p:titleStyle>
@@ -2000,7 +2150,7 @@
           <p:cNvPr id="7" name="">
             <a:extLst xmlns:a="http://schemas.openxmlformats.org/drawingml/2006/main">
               <a:ext uri="{FF2B5EF4-FFF2-40B4-BE49-F238E27FC236}">
-                <a16:creationId xmlns:a16="http://schemas.microsoft.com/office/drawing/2014/main" id="{7C16FA7A-5023-4505-91E7-62466541E45C}"/>
+                <a16:creationId xmlns:a16="http://schemas.microsoft.com/office/drawing/2014/main" id="{29A19825-4528-44B1-A55F-642FBD928277}"/>
               </a:ext>
             </a:extLst>
           </p:cNvPr>
@@ -2018,11 +2168,11 @@
             <a:avLst/>
           </a:prstGeom>
           <a:solidFill xmlns:a="http://schemas.openxmlformats.org/drawingml/2006/main">
-            <a:srgbClr val="C77B35"/>
+            <a:srgbClr val="C9A227"/>
           </a:solidFill>
           <a:ln xmlns:a="http://schemas.openxmlformats.org/drawingml/2006/main" w="0">
             <a:solidFill>
-              <a:srgbClr val="C77B35"/>
+              <a:srgbClr val="C9A227"/>
             </a:solidFill>
             <a:prstDash val="solid"/>
           </a:ln>
@@ -2033,7 +2183,7 @@
           <p:cNvPr id="2" name="">
             <a:extLst xmlns:a="http://schemas.openxmlformats.org/drawingml/2006/main">
               <a:ext uri="{FF2B5EF4-FFF2-40B4-BE49-F238E27FC236}">
-                <a16:creationId xmlns:a16="http://schemas.microsoft.com/office/drawing/2014/main" id="{2A26328F-7E19-4539-87CE-C770FBA50679}"/>
+                <a16:creationId xmlns:a16="http://schemas.microsoft.com/office/drawing/2014/main" id="{D3636823-B86E-4D3A-8F6A-4EE3855207FF}"/>
               </a:ext>
             </a:extLst>
           </p:cNvPr>
@@ -2063,14 +2213,14 @@
             <a:pPr>
               <a:defRPr sz="1200" b="1">
                 <a:solidFill>
-                  <a:srgbClr val="CFDDE7"/>
+                  <a:srgbClr val="D9E1E7"/>
                 </a:solidFill>
               </a:defRPr>
             </a:pPr>
             <a:r>
               <a:rPr sz="1200" b="1">
                 <a:solidFill>
-                  <a:srgbClr val="CFDDE7"/>
+                  <a:srgbClr val="D9E1E7"/>
                 </a:solidFill>
               </a:rPr>
               <a:t>MK FRAUD READINESS</a:t>
@@ -2083,7 +2233,7 @@
           <p:cNvPr id="3" name="">
             <a:extLst xmlns:a="http://schemas.openxmlformats.org/drawingml/2006/main">
               <a:ext uri="{FF2B5EF4-FFF2-40B4-BE49-F238E27FC236}">
-                <a16:creationId xmlns:a16="http://schemas.microsoft.com/office/drawing/2014/main" id="{0DF7ADA6-D187-4E7C-A043-3BFC859944A2}"/>
+                <a16:creationId xmlns:a16="http://schemas.microsoft.com/office/drawing/2014/main" id="{E4974725-CDCC-4924-AD18-C4F03117E83B}"/>
               </a:ext>
             </a:extLst>
           </p:cNvPr>
@@ -2123,7 +2273,7 @@
                   <a:srgbClr val="FFFFFF"/>
                 </a:solidFill>
               </a:rPr>
-              <a:t>The evidence review turns a diagnostic into a management decision record.</a:t>
+              <a:t>The target-state blueprint turns a diagnostic into a management decision record.</a:t>
             </a:r>
           </a:p>
         </p:txBody>
@@ -2133,7 +2283,7 @@
           <p:cNvPr id="4" name="">
             <a:extLst xmlns:a="http://schemas.openxmlformats.org/drawingml/2006/main">
               <a:ext uri="{FF2B5EF4-FFF2-40B4-BE49-F238E27FC236}">
-                <a16:creationId xmlns:a16="http://schemas.microsoft.com/office/drawing/2014/main" id="{1A5DB511-39F8-4189-9CE4-896E4E29FFE5}"/>
+                <a16:creationId xmlns:a16="http://schemas.microsoft.com/office/drawing/2014/main" id="{CA3A8299-9F61-436B-8E09-234D68F64072}"/>
               </a:ext>
             </a:extLst>
           </p:cNvPr>
@@ -2163,14 +2313,14 @@
             <a:pPr>
               <a:defRPr sz="1650">
                 <a:solidFill>
-                  <a:srgbClr val="DCE7F1"/>
+                  <a:srgbClr val="D9E1E7"/>
                 </a:solidFill>
               </a:defRPr>
             </a:pPr>
             <a:r>
               <a:rPr sz="1650">
                 <a:solidFill>
-                  <a:srgbClr val="DCE7F1"/>
+                  <a:srgbClr val="D9E1E7"/>
                 </a:solidFill>
               </a:rPr>
               <a:t>Kestrel Industrial Supply (Pty) Ltd</a:t>
@@ -2180,17 +2330,17 @@
             <a:pPr>
               <a:defRPr sz="1650">
                 <a:solidFill>
-                  <a:srgbClr val="DCE7F1"/>
+                  <a:srgbClr val="D9E1E7"/>
                 </a:solidFill>
               </a:defRPr>
             </a:pPr>
             <a:r>
               <a:rPr sz="1650">
                 <a:solidFill>
-                  <a:srgbClr val="DCE7F1"/>
-                </a:solidFill>
-              </a:rPr>
-              <a:t>Comprehensive review · evidence-led engagement</a:t>
+                  <a:srgbClr val="D9E1E7"/>
+                </a:solidFill>
+              </a:rPr>
+              <a:t>Comprehensive review · strategic design engagement</a:t>
             </a:r>
           </a:p>
         </p:txBody>
@@ -2200,7 +2350,7 @@
           <p:cNvPr id="5" name="">
             <a:extLst xmlns:a="http://schemas.openxmlformats.org/drawingml/2006/main">
               <a:ext uri="{FF2B5EF4-FFF2-40B4-BE49-F238E27FC236}">
-                <a16:creationId xmlns:a16="http://schemas.microsoft.com/office/drawing/2014/main" id="{4E0890E4-DC79-4D57-90FF-30CF3ABA23FE}"/>
+                <a16:creationId xmlns:a16="http://schemas.microsoft.com/office/drawing/2014/main" id="{AB4C76E3-CD73-4AA5-9B52-CCB2EBC119E6}"/>
               </a:ext>
             </a:extLst>
           </p:cNvPr>
@@ -2230,17 +2380,17 @@
             <a:pPr>
               <a:defRPr sz="1200">
                 <a:solidFill>
-                  <a:srgbClr val="B9CFDF"/>
+                  <a:srgbClr val="D9E1E7"/>
                 </a:solidFill>
               </a:defRPr>
             </a:pPr>
             <a:r>
               <a:rPr sz="1200">
                 <a:solidFill>
-                  <a:srgbClr val="B9CFDF"/>
-                </a:solidFill>
-              </a:rPr>
-              <a:t>Named reviewer: Independent review lead</a:t>
+                  <a:srgbClr val="D9E1E7"/>
+                </a:solidFill>
+              </a:rPr>
+              <a:t>Named reviewer: Named review lead</a:t>
             </a:r>
           </a:p>
         </p:txBody>
@@ -2250,7 +2400,7 @@
           <p:cNvPr id="6" name="">
             <a:extLst xmlns:a="http://schemas.openxmlformats.org/drawingml/2006/main">
               <a:ext uri="{FF2B5EF4-FFF2-40B4-BE49-F238E27FC236}">
-                <a16:creationId xmlns:a16="http://schemas.microsoft.com/office/drawing/2014/main" id="{23A0C5D1-1C0E-4DD4-AC85-1759C0F36732}"/>
+                <a16:creationId xmlns:a16="http://schemas.microsoft.com/office/drawing/2014/main" id="{985D8EAC-2357-4687-8A74-9287DBB0037B}"/>
               </a:ext>
             </a:extLst>
           </p:cNvPr>
@@ -2280,14 +2430,14 @@
             <a:pPr algn="r">
               <a:defRPr sz="975" b="1">
                 <a:solidFill>
-                  <a:srgbClr val="C77B35"/>
+                  <a:srgbClr val="C9A227"/>
                 </a:solidFill>
               </a:defRPr>
             </a:pPr>
             <a:r>
               <a:rPr sz="975" b="1">
                 <a:solidFill>
-                  <a:srgbClr val="C77B35"/>
+                  <a:srgbClr val="C9A227"/>
                 </a:solidFill>
               </a:rPr>
               <a:t>CONFIDENTIAL · DECISION SUPPORT</a:t>
@@ -2298,7 +2448,7 @@
     </p:spTree>
     <p:extLst>
       <p:ext uri="{BB962C8B-B14F-4D97-AF65-F5344CB8AC3E}">
-        <p14:creationId xmlns:p14="http://schemas.microsoft.com/office/powerpoint/2010/main" val="1902019854"/>
+        <p14:creationId xmlns:p14="http://schemas.microsoft.com/office/powerpoint/2010/main" val="959761915"/>
       </p:ext>
     </p:extLst>
   </p:cSld>
@@ -2311,7 +2461,7 @@
     <p:bg>
       <p:bgPr>
         <a:solidFill xmlns:a="http://schemas.openxmlformats.org/drawingml/2006/main">
-          <a:srgbClr val="F7F4EE"/>
+          <a:srgbClr val="FBF9F5"/>
         </a:solidFill>
       </p:bgPr>
     </p:bg>
@@ -2329,7 +2479,7 @@
           <p:cNvPr id="18" name="">
             <a:extLst xmlns:a="http://schemas.openxmlformats.org/drawingml/2006/main">
               <a:ext uri="{FF2B5EF4-FFF2-40B4-BE49-F238E27FC236}">
-                <a16:creationId xmlns:a16="http://schemas.microsoft.com/office/drawing/2014/main" id="{46CF4546-5F39-41DF-9105-795F972D893D}"/>
+                <a16:creationId xmlns:a16="http://schemas.microsoft.com/office/drawing/2014/main" id="{D50A3F27-B6A8-4DE1-A7F6-89B7923691B3}"/>
               </a:ext>
             </a:extLst>
           </p:cNvPr>
@@ -2359,14 +2509,14 @@
             <a:pPr>
               <a:defRPr sz="1050" b="1">
                 <a:solidFill>
-                  <a:srgbClr val="C77B35"/>
+                  <a:srgbClr val="C9A227"/>
                 </a:solidFill>
               </a:defRPr>
             </a:pPr>
             <a:r>
               <a:rPr sz="1050" b="1">
                 <a:solidFill>
-                  <a:srgbClr val="C77B35"/>
+                  <a:srgbClr val="C9A227"/>
                 </a:solidFill>
               </a:rPr>
               <a:t>COMPREHENSIVE REVIEW · 10</a:t>
@@ -2379,7 +2529,7 @@
           <p:cNvPr id="2" name="">
             <a:extLst xmlns:a="http://schemas.openxmlformats.org/drawingml/2006/main">
               <a:ext uri="{FF2B5EF4-FFF2-40B4-BE49-F238E27FC236}">
-                <a16:creationId xmlns:a16="http://schemas.microsoft.com/office/drawing/2014/main" id="{D8C57FC0-AD1F-4BEE-9BB5-B99B345C270F}"/>
+                <a16:creationId xmlns:a16="http://schemas.microsoft.com/office/drawing/2014/main" id="{9EEC2D83-3EF7-46AE-9888-DC20495324D3}"/>
               </a:ext>
             </a:extLst>
           </p:cNvPr>
@@ -2429,7 +2579,7 @@
           <p:cNvPr id="3" name="">
             <a:extLst xmlns:a="http://schemas.openxmlformats.org/drawingml/2006/main">
               <a:ext uri="{FF2B5EF4-FFF2-40B4-BE49-F238E27FC236}">
-                <a16:creationId xmlns:a16="http://schemas.microsoft.com/office/drawing/2014/main" id="{E6D9C893-CA6E-4552-B9A4-286A33425FC3}"/>
+                <a16:creationId xmlns:a16="http://schemas.microsoft.com/office/drawing/2014/main" id="{E8C9D97D-79DD-4C04-AD84-FB38006372EB}"/>
               </a:ext>
             </a:extLst>
           </p:cNvPr>
@@ -2459,14 +2609,14 @@
             <a:pPr>
               <a:defRPr sz="1350">
                 <a:solidFill>
-                  <a:srgbClr val="5E7080"/>
+                  <a:srgbClr val="5A6B7C"/>
                 </a:solidFill>
               </a:defRPr>
             </a:pPr>
             <a:r>
               <a:rPr sz="1350">
                 <a:solidFill>
-                  <a:srgbClr val="5E7080"/>
+                  <a:srgbClr val="5A6B7C"/>
                 </a:solidFill>
               </a:rPr>
               <a:t>The deliverable is complete when the decision record and proof of operation are both maintained.</a:t>
@@ -2479,7 +2629,7 @@
           <p:cNvPr id="4" name="">
             <a:extLst xmlns:a="http://schemas.openxmlformats.org/drawingml/2006/main">
               <a:ext uri="{FF2B5EF4-FFF2-40B4-BE49-F238E27FC236}">
-                <a16:creationId xmlns:a16="http://schemas.microsoft.com/office/drawing/2014/main" id="{B5FF9D15-4CBD-4FDB-A1CE-B867C8AD2937}"/>
+                <a16:creationId xmlns:a16="http://schemas.microsoft.com/office/drawing/2014/main" id="{7EAB70CA-FF1B-47F8-8C95-69AADEEABFEC}"/>
               </a:ext>
             </a:extLst>
           </p:cNvPr>
@@ -2499,7 +2649,7 @@
           <a:noFill xmlns:a="http://schemas.openxmlformats.org/drawingml/2006/main"/>
           <a:ln xmlns:a="http://schemas.openxmlformats.org/drawingml/2006/main" w="9525">
             <a:solidFill>
-              <a:srgbClr val="D8E0E5"/>
+              <a:srgbClr val="D9E1E7"/>
             </a:solidFill>
             <a:prstDash val="solid"/>
           </a:ln>
@@ -2510,7 +2660,7 @@
           <p:cNvPr id="5" name="">
             <a:extLst xmlns:a="http://schemas.openxmlformats.org/drawingml/2006/main">
               <a:ext uri="{FF2B5EF4-FFF2-40B4-BE49-F238E27FC236}">
-                <a16:creationId xmlns:a16="http://schemas.microsoft.com/office/drawing/2014/main" id="{91FAB56F-7C0C-48CF-89AD-5945792D70FB}"/>
+                <a16:creationId xmlns:a16="http://schemas.microsoft.com/office/drawing/2014/main" id="{6386DBAE-46DD-420A-A6C8-FE6807E4B4B7}"/>
               </a:ext>
             </a:extLst>
           </p:cNvPr>
@@ -2540,14 +2690,14 @@
             <a:pPr>
               <a:defRPr sz="975">
                 <a:solidFill>
-                  <a:srgbClr val="5E7080"/>
+                  <a:srgbClr val="5A6B7C"/>
                 </a:solidFill>
               </a:defRPr>
             </a:pPr>
             <a:r>
               <a:rPr sz="975">
                 <a:solidFill>
-                  <a:srgbClr val="5E7080"/>
+                  <a:srgbClr val="5A6B7C"/>
                 </a:solidFill>
               </a:rPr>
               <a:t>MK Fraud Readiness · Comprehensive</a:t>
@@ -2560,7 +2710,7 @@
           <p:cNvPr id="6" name="">
             <a:extLst xmlns:a="http://schemas.openxmlformats.org/drawingml/2006/main">
               <a:ext uri="{FF2B5EF4-FFF2-40B4-BE49-F238E27FC236}">
-                <a16:creationId xmlns:a16="http://schemas.microsoft.com/office/drawing/2014/main" id="{100379FF-732E-4547-97C8-4C3CC2A5467C}"/>
+                <a16:creationId xmlns:a16="http://schemas.microsoft.com/office/drawing/2014/main" id="{C071C59B-6947-4452-A3CC-83A082CB086F}"/>
               </a:ext>
             </a:extLst>
           </p:cNvPr>
@@ -2590,14 +2740,14 @@
             <a:pPr algn="r">
               <a:defRPr sz="975">
                 <a:solidFill>
-                  <a:srgbClr val="5E7080"/>
+                  <a:srgbClr val="5A6B7C"/>
                 </a:solidFill>
               </a:defRPr>
             </a:pPr>
             <a:r>
               <a:rPr sz="975">
                 <a:solidFill>
-                  <a:srgbClr val="5E7080"/>
+                  <a:srgbClr val="5A6B7C"/>
                 </a:solidFill>
               </a:rPr>
               <a:t>10 / 10</a:t>
@@ -2610,7 +2760,7 @@
           <p:cNvPr id="7" name="">
             <a:extLst xmlns:a="http://schemas.openxmlformats.org/drawingml/2006/main">
               <a:ext uri="{FF2B5EF4-FFF2-40B4-BE49-F238E27FC236}">
-                <a16:creationId xmlns:a16="http://schemas.microsoft.com/office/drawing/2014/main" id="{815B6A4B-540D-4984-99D9-F39B29656EFD}"/>
+                <a16:creationId xmlns:a16="http://schemas.microsoft.com/office/drawing/2014/main" id="{ED845C07-63F9-4944-BA94-2678359D557A}"/>
               </a:ext>
             </a:extLst>
           </p:cNvPr>
@@ -2645,7 +2795,7 @@
           <p:cNvPr id="8" name="">
             <a:extLst xmlns:a="http://schemas.openxmlformats.org/drawingml/2006/main">
               <a:ext uri="{FF2B5EF4-FFF2-40B4-BE49-F238E27FC236}">
-                <a16:creationId xmlns:a16="http://schemas.microsoft.com/office/drawing/2014/main" id="{FC69FCA2-3C6F-4013-9E2D-8DD2848E709C}"/>
+                <a16:creationId xmlns:a16="http://schemas.microsoft.com/office/drawing/2014/main" id="{BA5B8D1E-4654-459A-AEE2-16DD21F3B37C}"/>
               </a:ext>
             </a:extLst>
           </p:cNvPr>
@@ -2675,14 +2825,14 @@
             <a:pPr>
               <a:defRPr sz="1725" b="1">
                 <a:solidFill>
-                  <a:srgbClr val="C77B35"/>
+                  <a:srgbClr val="C9A227"/>
                 </a:solidFill>
               </a:defRPr>
             </a:pPr>
             <a:r>
               <a:rPr sz="1725" b="1">
                 <a:solidFill>
-                  <a:srgbClr val="C77B35"/>
+                  <a:srgbClr val="C9A227"/>
                 </a:solidFill>
               </a:rPr>
               <a:t>Bring four things to the next review</a:t>
@@ -2695,7 +2845,7 @@
           <p:cNvPr id="9" name="">
             <a:extLst xmlns:a="http://schemas.openxmlformats.org/drawingml/2006/main">
               <a:ext uri="{FF2B5EF4-FFF2-40B4-BE49-F238E27FC236}">
-                <a16:creationId xmlns:a16="http://schemas.microsoft.com/office/drawing/2014/main" id="{C99C3726-03CC-4543-9356-A810DE033DAD}"/>
+                <a16:creationId xmlns:a16="http://schemas.microsoft.com/office/drawing/2014/main" id="{23CDDF9C-CE7D-4579-86AA-7D87D98F0594}"/>
               </a:ext>
             </a:extLst>
           </p:cNvPr>
@@ -2713,11 +2863,11 @@
             <a:avLst/>
           </a:prstGeom>
           <a:solidFill xmlns:a="http://schemas.openxmlformats.org/drawingml/2006/main">
-            <a:srgbClr val="C77B35"/>
+            <a:srgbClr val="C9A227"/>
           </a:solidFill>
           <a:ln xmlns:a="http://schemas.openxmlformats.org/drawingml/2006/main" w="0">
             <a:solidFill>
-              <a:srgbClr val="C77B35"/>
+              <a:srgbClr val="C9A227"/>
             </a:solidFill>
             <a:prstDash val="solid"/>
           </a:ln>
@@ -2728,7 +2878,7 @@
           <p:cNvPr id="10" name="">
             <a:extLst xmlns:a="http://schemas.openxmlformats.org/drawingml/2006/main">
               <a:ext uri="{FF2B5EF4-FFF2-40B4-BE49-F238E27FC236}">
-                <a16:creationId xmlns:a16="http://schemas.microsoft.com/office/drawing/2014/main" id="{A7FDEF0F-B71A-43DB-8B3F-2D4B88179D18}"/>
+                <a16:creationId xmlns:a16="http://schemas.microsoft.com/office/drawing/2014/main" id="{EF1675F7-C4C5-4F1C-8F1E-0B6C023BB4F9}"/>
               </a:ext>
             </a:extLst>
           </p:cNvPr>
@@ -2778,7 +2928,7 @@
           <p:cNvPr id="11" name="">
             <a:extLst xmlns:a="http://schemas.openxmlformats.org/drawingml/2006/main">
               <a:ext uri="{FF2B5EF4-FFF2-40B4-BE49-F238E27FC236}">
-                <a16:creationId xmlns:a16="http://schemas.microsoft.com/office/drawing/2014/main" id="{55A82A88-06F6-4362-8D3A-862D5C4DDAB9}"/>
+                <a16:creationId xmlns:a16="http://schemas.microsoft.com/office/drawing/2014/main" id="{380AA2B3-C9C5-484A-897B-E4C77881FC74}"/>
               </a:ext>
             </a:extLst>
           </p:cNvPr>
@@ -2796,11 +2946,11 @@
             <a:avLst/>
           </a:prstGeom>
           <a:solidFill xmlns:a="http://schemas.openxmlformats.org/drawingml/2006/main">
-            <a:srgbClr val="C77B35"/>
+            <a:srgbClr val="C9A227"/>
           </a:solidFill>
           <a:ln xmlns:a="http://schemas.openxmlformats.org/drawingml/2006/main" w="0">
             <a:solidFill>
-              <a:srgbClr val="C77B35"/>
+              <a:srgbClr val="C9A227"/>
             </a:solidFill>
             <a:prstDash val="solid"/>
           </a:ln>
@@ -2811,7 +2961,7 @@
           <p:cNvPr id="12" name="">
             <a:extLst xmlns:a="http://schemas.openxmlformats.org/drawingml/2006/main">
               <a:ext uri="{FF2B5EF4-FFF2-40B4-BE49-F238E27FC236}">
-                <a16:creationId xmlns:a16="http://schemas.microsoft.com/office/drawing/2014/main" id="{8E8567FE-DBB2-4CF5-9C20-6FF54A4DBD92}"/>
+                <a16:creationId xmlns:a16="http://schemas.microsoft.com/office/drawing/2014/main" id="{EB905C43-778C-4B38-8FED-53CDA91F0592}"/>
               </a:ext>
             </a:extLst>
           </p:cNvPr>
@@ -2861,7 +3011,7 @@
           <p:cNvPr id="13" name="">
             <a:extLst xmlns:a="http://schemas.openxmlformats.org/drawingml/2006/main">
               <a:ext uri="{FF2B5EF4-FFF2-40B4-BE49-F238E27FC236}">
-                <a16:creationId xmlns:a16="http://schemas.microsoft.com/office/drawing/2014/main" id="{FF802B6B-BF90-4C3F-B995-94957565706E}"/>
+                <a16:creationId xmlns:a16="http://schemas.microsoft.com/office/drawing/2014/main" id="{EC2815C2-D4AC-45F7-BD43-AD97D96A3010}"/>
               </a:ext>
             </a:extLst>
           </p:cNvPr>
@@ -2879,11 +3029,11 @@
             <a:avLst/>
           </a:prstGeom>
           <a:solidFill xmlns:a="http://schemas.openxmlformats.org/drawingml/2006/main">
-            <a:srgbClr val="C77B35"/>
+            <a:srgbClr val="C9A227"/>
           </a:solidFill>
           <a:ln xmlns:a="http://schemas.openxmlformats.org/drawingml/2006/main" w="0">
             <a:solidFill>
-              <a:srgbClr val="C77B35"/>
+              <a:srgbClr val="C9A227"/>
             </a:solidFill>
             <a:prstDash val="solid"/>
           </a:ln>
@@ -2894,7 +3044,7 @@
           <p:cNvPr id="14" name="">
             <a:extLst xmlns:a="http://schemas.openxmlformats.org/drawingml/2006/main">
               <a:ext uri="{FF2B5EF4-FFF2-40B4-BE49-F238E27FC236}">
-                <a16:creationId xmlns:a16="http://schemas.microsoft.com/office/drawing/2014/main" id="{65000F71-75D6-4DC5-85D0-796A8FF2428F}"/>
+                <a16:creationId xmlns:a16="http://schemas.microsoft.com/office/drawing/2014/main" id="{8902B4A0-BC1A-4DC7-ADAB-6B76A90710DB}"/>
               </a:ext>
             </a:extLst>
           </p:cNvPr>
@@ -2944,7 +3094,7 @@
           <p:cNvPr id="15" name="">
             <a:extLst xmlns:a="http://schemas.openxmlformats.org/drawingml/2006/main">
               <a:ext uri="{FF2B5EF4-FFF2-40B4-BE49-F238E27FC236}">
-                <a16:creationId xmlns:a16="http://schemas.microsoft.com/office/drawing/2014/main" id="{6952B177-D86C-4E7F-8999-01DA0355343C}"/>
+                <a16:creationId xmlns:a16="http://schemas.microsoft.com/office/drawing/2014/main" id="{188AEC13-3B9A-4352-BE90-B51005647D67}"/>
               </a:ext>
             </a:extLst>
           </p:cNvPr>
@@ -2962,11 +3112,11 @@
             <a:avLst/>
           </a:prstGeom>
           <a:solidFill xmlns:a="http://schemas.openxmlformats.org/drawingml/2006/main">
-            <a:srgbClr val="C77B35"/>
+            <a:srgbClr val="C9A227"/>
           </a:solidFill>
           <a:ln xmlns:a="http://schemas.openxmlformats.org/drawingml/2006/main" w="0">
             <a:solidFill>
-              <a:srgbClr val="C77B35"/>
+              <a:srgbClr val="C9A227"/>
             </a:solidFill>
             <a:prstDash val="solid"/>
           </a:ln>
@@ -2977,7 +3127,7 @@
           <p:cNvPr id="16" name="">
             <a:extLst xmlns:a="http://schemas.openxmlformats.org/drawingml/2006/main">
               <a:ext uri="{FF2B5EF4-FFF2-40B4-BE49-F238E27FC236}">
-                <a16:creationId xmlns:a16="http://schemas.microsoft.com/office/drawing/2014/main" id="{C5FB3BB4-B75B-48EE-BFE3-3D473632B8AC}"/>
+                <a16:creationId xmlns:a16="http://schemas.microsoft.com/office/drawing/2014/main" id="{1268A67D-4BA5-445D-8A56-7B288A7B056C}"/>
               </a:ext>
             </a:extLst>
           </p:cNvPr>
@@ -3027,7 +3177,7 @@
           <p:cNvPr id="17" name="">
             <a:extLst xmlns:a="http://schemas.openxmlformats.org/drawingml/2006/main">
               <a:ext uri="{FF2B5EF4-FFF2-40B4-BE49-F238E27FC236}">
-                <a16:creationId xmlns:a16="http://schemas.microsoft.com/office/drawing/2014/main" id="{927F521B-74D4-4263-B387-4F45C870ADDB}"/>
+                <a16:creationId xmlns:a16="http://schemas.microsoft.com/office/drawing/2014/main" id="{3792D049-BBE2-49BF-AA1D-BAB11586B77B}"/>
               </a:ext>
             </a:extLst>
           </p:cNvPr>
@@ -3075,7 +3225,7 @@
     </p:spTree>
     <p:extLst>
       <p:ext uri="{BB962C8B-B14F-4D97-AF65-F5344CB8AC3E}">
-        <p14:creationId xmlns:p14="http://schemas.microsoft.com/office/powerpoint/2010/main" val="120739890"/>
+        <p14:creationId xmlns:p14="http://schemas.microsoft.com/office/powerpoint/2010/main" val="1992989772"/>
       </p:ext>
     </p:extLst>
   </p:cSld>
@@ -3088,7 +3238,7 @@
     <p:bg>
       <p:bgPr>
         <a:solidFill xmlns:a="http://schemas.openxmlformats.org/drawingml/2006/main">
-          <a:srgbClr val="F7F4EE"/>
+          <a:srgbClr val="FBF9F5"/>
         </a:solidFill>
       </p:bgPr>
     </p:bg>
@@ -3106,7 +3256,7 @@
           <p:cNvPr id="30" name="">
             <a:extLst xmlns:a="http://schemas.openxmlformats.org/drawingml/2006/main">
               <a:ext uri="{FF2B5EF4-FFF2-40B4-BE49-F238E27FC236}">
-                <a16:creationId xmlns:a16="http://schemas.microsoft.com/office/drawing/2014/main" id="{802014FB-1CD8-4523-A1A4-A7FADAEB1083}"/>
+                <a16:creationId xmlns:a16="http://schemas.microsoft.com/office/drawing/2014/main" id="{C825834A-EF1B-409C-B8FE-1A89B97CA07A}"/>
               </a:ext>
             </a:extLst>
           </p:cNvPr>
@@ -3136,14 +3286,14 @@
             <a:pPr>
               <a:defRPr sz="1050" b="1">
                 <a:solidFill>
-                  <a:srgbClr val="C77B35"/>
+                  <a:srgbClr val="C9A227"/>
                 </a:solidFill>
               </a:defRPr>
             </a:pPr>
             <a:r>
               <a:rPr sz="1050" b="1">
                 <a:solidFill>
-                  <a:srgbClr val="C77B35"/>
+                  <a:srgbClr val="C9A227"/>
                 </a:solidFill>
               </a:rPr>
               <a:t>COMPREHENSIVE REVIEW · 02</a:t>
@@ -3156,7 +3306,7 @@
           <p:cNvPr id="2" name="">
             <a:extLst xmlns:a="http://schemas.openxmlformats.org/drawingml/2006/main">
               <a:ext uri="{FF2B5EF4-FFF2-40B4-BE49-F238E27FC236}">
-                <a16:creationId xmlns:a16="http://schemas.microsoft.com/office/drawing/2014/main" id="{AE25E539-64AE-4712-82D5-182618FB4976}"/>
+                <a16:creationId xmlns:a16="http://schemas.microsoft.com/office/drawing/2014/main" id="{0C74546D-CC20-4026-885D-33C9BE23D737}"/>
               </a:ext>
             </a:extLst>
           </p:cNvPr>
@@ -3196,7 +3346,7 @@
                   <a:srgbClr val="142F4C"/>
                 </a:solidFill>
               </a:rPr>
-              <a:t>The recorded position is developing; assurance is narrower than the score.</a:t>
+              <a:t>The recorded position is developing; reliance is narrower than the score.</a:t>
             </a:r>
           </a:p>
         </p:txBody>
@@ -3206,7 +3356,7 @@
           <p:cNvPr id="3" name="">
             <a:extLst xmlns:a="http://schemas.openxmlformats.org/drawingml/2006/main">
               <a:ext uri="{FF2B5EF4-FFF2-40B4-BE49-F238E27FC236}">
-                <a16:creationId xmlns:a16="http://schemas.microsoft.com/office/drawing/2014/main" id="{4BD8C2AD-9881-47E3-9A42-62236C4B83B3}"/>
+                <a16:creationId xmlns:a16="http://schemas.microsoft.com/office/drawing/2014/main" id="{D0155E4E-4881-4440-9124-D876348B253A}"/>
               </a:ext>
             </a:extLst>
           </p:cNvPr>
@@ -3236,17 +3386,17 @@
             <a:pPr>
               <a:defRPr sz="1350">
                 <a:solidFill>
-                  <a:srgbClr val="5E7080"/>
+                  <a:srgbClr val="5A6B7C"/>
                 </a:solidFill>
               </a:defRPr>
             </a:pPr>
             <a:r>
               <a:rPr sz="1350">
                 <a:solidFill>
-                  <a:srgbClr val="5E7080"/>
-                </a:solidFill>
-              </a:rPr>
-              <a:t>Separate the deterministic result from what the evidence review can support.</a:t>
+                  <a:srgbClr val="5A6B7C"/>
+                </a:solidFill>
+              </a:rPr>
+              <a:t>Separate the deterministic result from the information boundary.</a:t>
             </a:r>
           </a:p>
         </p:txBody>
@@ -3256,7 +3406,7 @@
           <p:cNvPr id="4" name="">
             <a:extLst xmlns:a="http://schemas.openxmlformats.org/drawingml/2006/main">
               <a:ext uri="{FF2B5EF4-FFF2-40B4-BE49-F238E27FC236}">
-                <a16:creationId xmlns:a16="http://schemas.microsoft.com/office/drawing/2014/main" id="{147AC30B-6B5B-46DF-A9C1-27EA0B27AD3D}"/>
+                <a16:creationId xmlns:a16="http://schemas.microsoft.com/office/drawing/2014/main" id="{C541939B-7C97-4437-B7B6-E48196663C4A}"/>
               </a:ext>
             </a:extLst>
           </p:cNvPr>
@@ -3276,7 +3426,7 @@
           <a:noFill xmlns:a="http://schemas.openxmlformats.org/drawingml/2006/main"/>
           <a:ln xmlns:a="http://schemas.openxmlformats.org/drawingml/2006/main" w="9525">
             <a:solidFill>
-              <a:srgbClr val="D8E0E5"/>
+              <a:srgbClr val="D9E1E7"/>
             </a:solidFill>
             <a:prstDash val="solid"/>
           </a:ln>
@@ -3287,7 +3437,7 @@
           <p:cNvPr id="5" name="">
             <a:extLst xmlns:a="http://schemas.openxmlformats.org/drawingml/2006/main">
               <a:ext uri="{FF2B5EF4-FFF2-40B4-BE49-F238E27FC236}">
-                <a16:creationId xmlns:a16="http://schemas.microsoft.com/office/drawing/2014/main" id="{FB2AA95C-B79D-496C-89AC-DE01B13535A2}"/>
+                <a16:creationId xmlns:a16="http://schemas.microsoft.com/office/drawing/2014/main" id="{5EA55524-05DC-41CB-A902-BB53FF1607AF}"/>
               </a:ext>
             </a:extLst>
           </p:cNvPr>
@@ -3317,14 +3467,14 @@
             <a:pPr>
               <a:defRPr sz="975">
                 <a:solidFill>
-                  <a:srgbClr val="5E7080"/>
+                  <a:srgbClr val="5A6B7C"/>
                 </a:solidFill>
               </a:defRPr>
             </a:pPr>
             <a:r>
               <a:rPr sz="975">
                 <a:solidFill>
-                  <a:srgbClr val="5E7080"/>
+                  <a:srgbClr val="5A6B7C"/>
                 </a:solidFill>
               </a:rPr>
               <a:t>MK Fraud Readiness · Comprehensive</a:t>
@@ -3337,7 +3487,7 @@
           <p:cNvPr id="6" name="">
             <a:extLst xmlns:a="http://schemas.openxmlformats.org/drawingml/2006/main">
               <a:ext uri="{FF2B5EF4-FFF2-40B4-BE49-F238E27FC236}">
-                <a16:creationId xmlns:a16="http://schemas.microsoft.com/office/drawing/2014/main" id="{F29867B0-F4C7-4C90-9DAC-CB6C8ABC6F60}"/>
+                <a16:creationId xmlns:a16="http://schemas.microsoft.com/office/drawing/2014/main" id="{A9EA9CA3-8935-4633-9FF0-B8C75461DAA3}"/>
               </a:ext>
             </a:extLst>
           </p:cNvPr>
@@ -3367,14 +3517,14 @@
             <a:pPr algn="r">
               <a:defRPr sz="975">
                 <a:solidFill>
-                  <a:srgbClr val="5E7080"/>
+                  <a:srgbClr val="5A6B7C"/>
                 </a:solidFill>
               </a:defRPr>
             </a:pPr>
             <a:r>
               <a:rPr sz="975">
                 <a:solidFill>
-                  <a:srgbClr val="5E7080"/>
+                  <a:srgbClr val="5A6B7C"/>
                 </a:solidFill>
               </a:rPr>
               <a:t>02 / 10</a:t>
@@ -3387,7 +3537,7 @@
           <p:cNvPr id="7" name="">
             <a:extLst xmlns:a="http://schemas.openxmlformats.org/drawingml/2006/main">
               <a:ext uri="{FF2B5EF4-FFF2-40B4-BE49-F238E27FC236}">
-                <a16:creationId xmlns:a16="http://schemas.microsoft.com/office/drawing/2014/main" id="{D77A54FC-5918-48EF-9C80-B75B4514EBD3}"/>
+                <a16:creationId xmlns:a16="http://schemas.microsoft.com/office/drawing/2014/main" id="{893CF7D6-68C9-4DCF-BECC-F5ACB967CD3D}"/>
               </a:ext>
             </a:extLst>
           </p:cNvPr>
@@ -3411,7 +3561,7 @@
           </a:solidFill>
           <a:ln xmlns:a="http://schemas.openxmlformats.org/drawingml/2006/main" w="9525">
             <a:solidFill>
-              <a:srgbClr val="D8E0E5"/>
+              <a:srgbClr val="D9E1E7"/>
             </a:solidFill>
             <a:prstDash val="solid"/>
           </a:ln>
@@ -3422,7 +3572,7 @@
           <p:cNvPr id="8" name="">
             <a:extLst xmlns:a="http://schemas.openxmlformats.org/drawingml/2006/main">
               <a:ext uri="{FF2B5EF4-FFF2-40B4-BE49-F238E27FC236}">
-                <a16:creationId xmlns:a16="http://schemas.microsoft.com/office/drawing/2014/main" id="{DAFE578D-E148-4349-B300-C9CB9C45EB6B}"/>
+                <a16:creationId xmlns:a16="http://schemas.microsoft.com/office/drawing/2014/main" id="{D9A47215-634D-4FB1-BD89-68B6539221BB}"/>
               </a:ext>
             </a:extLst>
           </p:cNvPr>
@@ -3455,7 +3605,7 @@
           <p:cNvPr id="9" name="">
             <a:extLst xmlns:a="http://schemas.openxmlformats.org/drawingml/2006/main">
               <a:ext uri="{FF2B5EF4-FFF2-40B4-BE49-F238E27FC236}">
-                <a16:creationId xmlns:a16="http://schemas.microsoft.com/office/drawing/2014/main" id="{CE5C91B8-5005-4EFB-B1DF-0EC6E36C5982}"/>
+                <a16:creationId xmlns:a16="http://schemas.microsoft.com/office/drawing/2014/main" id="{DAEBF81C-CF6D-42A2-B47B-3E724F24022B}"/>
               </a:ext>
             </a:extLst>
           </p:cNvPr>
@@ -3485,14 +3635,14 @@
             <a:pPr>
               <a:defRPr sz="1125" b="1">
                 <a:solidFill>
-                  <a:srgbClr val="5E7080"/>
+                  <a:srgbClr val="5A6B7C"/>
                 </a:solidFill>
               </a:defRPr>
             </a:pPr>
             <a:r>
               <a:rPr sz="1125" b="1">
                 <a:solidFill>
-                  <a:srgbClr val="5E7080"/>
+                  <a:srgbClr val="5A6B7C"/>
                 </a:solidFill>
               </a:rPr>
               <a:t>Reported readiness</a:t>
@@ -3505,7 +3655,7 @@
           <p:cNvPr id="10" name="">
             <a:extLst xmlns:a="http://schemas.openxmlformats.org/drawingml/2006/main">
               <a:ext uri="{FF2B5EF4-FFF2-40B4-BE49-F238E27FC236}">
-                <a16:creationId xmlns:a16="http://schemas.microsoft.com/office/drawing/2014/main" id="{1BFC3CAE-A098-4EE7-8FC1-42F4FBCE2CA0}"/>
+                <a16:creationId xmlns:a16="http://schemas.microsoft.com/office/drawing/2014/main" id="{E505F4D6-DE07-4B70-A2F9-F71AAF0C8D30}"/>
               </a:ext>
             </a:extLst>
           </p:cNvPr>
@@ -3555,7 +3705,7 @@
           <p:cNvPr id="11" name="">
             <a:extLst xmlns:a="http://schemas.openxmlformats.org/drawingml/2006/main">
               <a:ext uri="{FF2B5EF4-FFF2-40B4-BE49-F238E27FC236}">
-                <a16:creationId xmlns:a16="http://schemas.microsoft.com/office/drawing/2014/main" id="{AFCB3694-3FE0-4988-BAE7-AAE0DE3C8259}"/>
+                <a16:creationId xmlns:a16="http://schemas.microsoft.com/office/drawing/2014/main" id="{AEF1A09B-8E76-4632-93B0-53EF789D89A7}"/>
               </a:ext>
             </a:extLst>
           </p:cNvPr>
@@ -3585,14 +3735,14 @@
             <a:pPr>
               <a:defRPr sz="1050">
                 <a:solidFill>
-                  <a:srgbClr val="5E7080"/>
+                  <a:srgbClr val="5A6B7C"/>
                 </a:solidFill>
               </a:defRPr>
             </a:pPr>
             <a:r>
               <a:rPr sz="1050">
                 <a:solidFill>
-                  <a:srgbClr val="5E7080"/>
+                  <a:srgbClr val="5A6B7C"/>
                 </a:solidFill>
               </a:rPr>
               <a:t>Developing</a:t>
@@ -3605,7 +3755,7 @@
           <p:cNvPr id="12" name="">
             <a:extLst xmlns:a="http://schemas.openxmlformats.org/drawingml/2006/main">
               <a:ext uri="{FF2B5EF4-FFF2-40B4-BE49-F238E27FC236}">
-                <a16:creationId xmlns:a16="http://schemas.microsoft.com/office/drawing/2014/main" id="{89364139-6C64-483C-A776-ADFCA9810DD4}"/>
+                <a16:creationId xmlns:a16="http://schemas.microsoft.com/office/drawing/2014/main" id="{2940C5EF-8EDA-44C7-973F-9F0FCE445A2E}"/>
               </a:ext>
             </a:extLst>
           </p:cNvPr>
@@ -3629,7 +3779,7 @@
           </a:solidFill>
           <a:ln xmlns:a="http://schemas.openxmlformats.org/drawingml/2006/main" w="9525">
             <a:solidFill>
-              <a:srgbClr val="D8E0E5"/>
+              <a:srgbClr val="D9E1E7"/>
             </a:solidFill>
             <a:prstDash val="solid"/>
           </a:ln>
@@ -3640,7 +3790,7 @@
           <p:cNvPr id="13" name="">
             <a:extLst xmlns:a="http://schemas.openxmlformats.org/drawingml/2006/main">
               <a:ext uri="{FF2B5EF4-FFF2-40B4-BE49-F238E27FC236}">
-                <a16:creationId xmlns:a16="http://schemas.microsoft.com/office/drawing/2014/main" id="{BB5E37E0-2F03-44EC-B453-103DE09841B0}"/>
+                <a16:creationId xmlns:a16="http://schemas.microsoft.com/office/drawing/2014/main" id="{949B6C5B-DF06-4C24-ADCB-8B6237EDB3E1}"/>
               </a:ext>
             </a:extLst>
           </p:cNvPr>
@@ -3658,11 +3808,11 @@
             <a:avLst/>
           </a:prstGeom>
           <a:solidFill xmlns:a="http://schemas.openxmlformats.org/drawingml/2006/main">
-            <a:srgbClr val="A93E38"/>
+            <a:srgbClr val="A32020"/>
           </a:solidFill>
           <a:ln xmlns:a="http://schemas.openxmlformats.org/drawingml/2006/main" w="0">
             <a:solidFill>
-              <a:srgbClr val="A93E38"/>
+              <a:srgbClr val="A32020"/>
             </a:solidFill>
             <a:prstDash val="solid"/>
           </a:ln>
@@ -3673,7 +3823,7 @@
           <p:cNvPr id="14" name="">
             <a:extLst xmlns:a="http://schemas.openxmlformats.org/drawingml/2006/main">
               <a:ext uri="{FF2B5EF4-FFF2-40B4-BE49-F238E27FC236}">
-                <a16:creationId xmlns:a16="http://schemas.microsoft.com/office/drawing/2014/main" id="{5F230AB9-F2D0-45CF-AD64-05A4E8EC2434}"/>
+                <a16:creationId xmlns:a16="http://schemas.microsoft.com/office/drawing/2014/main" id="{5166B83F-B1FE-486D-B236-5DA927F96563}"/>
               </a:ext>
             </a:extLst>
           </p:cNvPr>
@@ -3703,14 +3853,14 @@
             <a:pPr>
               <a:defRPr sz="1125" b="1">
                 <a:solidFill>
-                  <a:srgbClr val="5E7080"/>
+                  <a:srgbClr val="5A6B7C"/>
                 </a:solidFill>
               </a:defRPr>
             </a:pPr>
             <a:r>
               <a:rPr sz="1125" b="1">
                 <a:solidFill>
-                  <a:srgbClr val="5E7080"/>
+                  <a:srgbClr val="5A6B7C"/>
                 </a:solidFill>
               </a:rPr>
               <a:t>Exposure position</a:t>
@@ -3723,7 +3873,7 @@
           <p:cNvPr id="15" name="">
             <a:extLst xmlns:a="http://schemas.openxmlformats.org/drawingml/2006/main">
               <a:ext uri="{FF2B5EF4-FFF2-40B4-BE49-F238E27FC236}">
-                <a16:creationId xmlns:a16="http://schemas.microsoft.com/office/drawing/2014/main" id="{204ECFC7-90A6-4CF5-945E-17E474F0E2C8}"/>
+                <a16:creationId xmlns:a16="http://schemas.microsoft.com/office/drawing/2014/main" id="{4A6AD16E-812E-4F57-BA78-1D28F257FA48}"/>
               </a:ext>
             </a:extLst>
           </p:cNvPr>
@@ -3773,7 +3923,7 @@
           <p:cNvPr id="16" name="">
             <a:extLst xmlns:a="http://schemas.openxmlformats.org/drawingml/2006/main">
               <a:ext uri="{FF2B5EF4-FFF2-40B4-BE49-F238E27FC236}">
-                <a16:creationId xmlns:a16="http://schemas.microsoft.com/office/drawing/2014/main" id="{48C35721-0EDC-4C69-9ECA-4234313DDE01}"/>
+                <a16:creationId xmlns:a16="http://schemas.microsoft.com/office/drawing/2014/main" id="{E1316EF6-C248-4AE5-880C-B6411464BA8B}"/>
               </a:ext>
             </a:extLst>
           </p:cNvPr>
@@ -3803,14 +3953,14 @@
             <a:pPr>
               <a:defRPr sz="1050">
                 <a:solidFill>
-                  <a:srgbClr val="5E7080"/>
+                  <a:srgbClr val="5A6B7C"/>
                 </a:solidFill>
               </a:defRPr>
             </a:pPr>
             <a:r>
               <a:rPr sz="1050">
                 <a:solidFill>
-                  <a:srgbClr val="5E7080"/>
+                  <a:srgbClr val="5A6B7C"/>
                 </a:solidFill>
               </a:rPr>
               <a:t>Not assessed</a:t>
@@ -3823,7 +3973,7 @@
           <p:cNvPr id="17" name="">
             <a:extLst xmlns:a="http://schemas.openxmlformats.org/drawingml/2006/main">
               <a:ext uri="{FF2B5EF4-FFF2-40B4-BE49-F238E27FC236}">
-                <a16:creationId xmlns:a16="http://schemas.microsoft.com/office/drawing/2014/main" id="{70D867D1-24A9-417C-92BC-46111A57BAA2}"/>
+                <a16:creationId xmlns:a16="http://schemas.microsoft.com/office/drawing/2014/main" id="{BDD49F69-FAE6-4E33-8449-AE56F96FF0DA}"/>
               </a:ext>
             </a:extLst>
           </p:cNvPr>
@@ -3847,7 +3997,7 @@
           </a:solidFill>
           <a:ln xmlns:a="http://schemas.openxmlformats.org/drawingml/2006/main" w="9525">
             <a:solidFill>
-              <a:srgbClr val="D8E0E5"/>
+              <a:srgbClr val="D9E1E7"/>
             </a:solidFill>
             <a:prstDash val="solid"/>
           </a:ln>
@@ -3858,7 +4008,7 @@
           <p:cNvPr id="18" name="">
             <a:extLst xmlns:a="http://schemas.openxmlformats.org/drawingml/2006/main">
               <a:ext uri="{FF2B5EF4-FFF2-40B4-BE49-F238E27FC236}">
-                <a16:creationId xmlns:a16="http://schemas.microsoft.com/office/drawing/2014/main" id="{642C252E-0CB9-441E-92EA-1E2A056196D5}"/>
+                <a16:creationId xmlns:a16="http://schemas.microsoft.com/office/drawing/2014/main" id="{60A06F0F-AD92-411C-9915-C155A180F7AB}"/>
               </a:ext>
             </a:extLst>
           </p:cNvPr>
@@ -3876,11 +4026,11 @@
             <a:avLst/>
           </a:prstGeom>
           <a:solidFill xmlns:a="http://schemas.openxmlformats.org/drawingml/2006/main">
-            <a:srgbClr val="2D7C57"/>
+            <a:srgbClr val="1F6B4A"/>
           </a:solidFill>
           <a:ln xmlns:a="http://schemas.openxmlformats.org/drawingml/2006/main" w="0">
             <a:solidFill>
-              <a:srgbClr val="2D7C57"/>
+              <a:srgbClr val="1F6B4A"/>
             </a:solidFill>
             <a:prstDash val="solid"/>
           </a:ln>
@@ -3891,7 +4041,7 @@
           <p:cNvPr id="19" name="">
             <a:extLst xmlns:a="http://schemas.openxmlformats.org/drawingml/2006/main">
               <a:ext uri="{FF2B5EF4-FFF2-40B4-BE49-F238E27FC236}">
-                <a16:creationId xmlns:a16="http://schemas.microsoft.com/office/drawing/2014/main" id="{91C222C7-C5EB-4643-AABA-EEECC946F765}"/>
+                <a16:creationId xmlns:a16="http://schemas.microsoft.com/office/drawing/2014/main" id="{A9C9389D-0548-4ACD-8F5D-8F909E000E41}"/>
               </a:ext>
             </a:extLst>
           </p:cNvPr>
@@ -3921,17 +4071,17 @@
             <a:pPr>
               <a:defRPr sz="1125" b="1">
                 <a:solidFill>
-                  <a:srgbClr val="5E7080"/>
+                  <a:srgbClr val="5A6B7C"/>
                 </a:solidFill>
               </a:defRPr>
             </a:pPr>
             <a:r>
               <a:rPr sz="1125" b="1">
                 <a:solidFill>
-                  <a:srgbClr val="5E7080"/>
-                </a:solidFill>
-              </a:rPr>
-              <a:t>Supported evidence</a:t>
+                  <a:srgbClr val="5A6B7C"/>
+                </a:solidFill>
+              </a:rPr>
+              <a:t>Review notes in scope</a:t>
             </a:r>
           </a:p>
         </p:txBody>
@@ -3941,7 +4091,7 @@
           <p:cNvPr id="20" name="">
             <a:extLst xmlns:a="http://schemas.openxmlformats.org/drawingml/2006/main">
               <a:ext uri="{FF2B5EF4-FFF2-40B4-BE49-F238E27FC236}">
-                <a16:creationId xmlns:a16="http://schemas.microsoft.com/office/drawing/2014/main" id="{D47DA5D9-B314-45E1-90F0-ADD74B584057}"/>
+                <a16:creationId xmlns:a16="http://schemas.microsoft.com/office/drawing/2014/main" id="{138FCCE7-D987-4A9A-B260-E45EBFC58017}"/>
               </a:ext>
             </a:extLst>
           </p:cNvPr>
@@ -3981,7 +4131,7 @@
                   <a:srgbClr val="142F4C"/>
                 </a:solidFill>
               </a:rPr>
-              <a:t>3</a:t>
+              <a:t>1</a:t>
             </a:r>
           </a:p>
         </p:txBody>
@@ -3991,7 +4141,7 @@
           <p:cNvPr id="21" name="">
             <a:extLst xmlns:a="http://schemas.openxmlformats.org/drawingml/2006/main">
               <a:ext uri="{FF2B5EF4-FFF2-40B4-BE49-F238E27FC236}">
-                <a16:creationId xmlns:a16="http://schemas.microsoft.com/office/drawing/2014/main" id="{13AA956B-64DE-43F5-8B14-02B8F304F6DF}"/>
+                <a16:creationId xmlns:a16="http://schemas.microsoft.com/office/drawing/2014/main" id="{9523CD68-B0BC-45F8-B787-71B28F3438BA}"/>
               </a:ext>
             </a:extLst>
           </p:cNvPr>
@@ -4021,17 +4171,17 @@
             <a:pPr>
               <a:defRPr sz="1050">
                 <a:solidFill>
-                  <a:srgbClr val="5E7080"/>
+                  <a:srgbClr val="5A6B7C"/>
                 </a:solidFill>
               </a:defRPr>
             </a:pPr>
             <a:r>
               <a:rPr sz="1050">
                 <a:solidFill>
-                  <a:srgbClr val="5E7080"/>
-                </a:solidFill>
-              </a:rPr>
-              <a:t>of 12 items</a:t>
+                  <a:srgbClr val="5A6B7C"/>
+                </a:solidFill>
+              </a:rPr>
+              <a:t>of 64 items</a:t>
             </a:r>
           </a:p>
         </p:txBody>
@@ -4041,7 +4191,7 @@
           <p:cNvPr id="22" name="">
             <a:extLst xmlns:a="http://schemas.openxmlformats.org/drawingml/2006/main">
               <a:ext uri="{FF2B5EF4-FFF2-40B4-BE49-F238E27FC236}">
-                <a16:creationId xmlns:a16="http://schemas.microsoft.com/office/drawing/2014/main" id="{80290845-B6BD-40B2-BCBF-BB417C8F4261}"/>
+                <a16:creationId xmlns:a16="http://schemas.microsoft.com/office/drawing/2014/main" id="{98EDF595-0D64-47CA-A583-C8EF67313513}"/>
               </a:ext>
             </a:extLst>
           </p:cNvPr>
@@ -4065,7 +4215,7 @@
           </a:solidFill>
           <a:ln xmlns:a="http://schemas.openxmlformats.org/drawingml/2006/main" w="9525">
             <a:solidFill>
-              <a:srgbClr val="D8E0E5"/>
+              <a:srgbClr val="D9E1E7"/>
             </a:solidFill>
             <a:prstDash val="solid"/>
           </a:ln>
@@ -4076,7 +4226,7 @@
           <p:cNvPr id="23" name="">
             <a:extLst xmlns:a="http://schemas.openxmlformats.org/drawingml/2006/main">
               <a:ext uri="{FF2B5EF4-FFF2-40B4-BE49-F238E27FC236}">
-                <a16:creationId xmlns:a16="http://schemas.microsoft.com/office/drawing/2014/main" id="{9C9FD64B-B68D-4576-B9A6-E0EDB771C98E}"/>
+                <a16:creationId xmlns:a16="http://schemas.microsoft.com/office/drawing/2014/main" id="{F3E9AEDE-515A-4C98-AE8E-8393188DCDA7}"/>
               </a:ext>
             </a:extLst>
           </p:cNvPr>
@@ -4094,11 +4244,11 @@
             <a:avLst/>
           </a:prstGeom>
           <a:solidFill xmlns:a="http://schemas.openxmlformats.org/drawingml/2006/main">
-            <a:srgbClr val="C77B35"/>
+            <a:srgbClr val="C9A227"/>
           </a:solidFill>
           <a:ln xmlns:a="http://schemas.openxmlformats.org/drawingml/2006/main" w="0">
             <a:solidFill>
-              <a:srgbClr val="C77B35"/>
+              <a:srgbClr val="C9A227"/>
             </a:solidFill>
             <a:prstDash val="solid"/>
           </a:ln>
@@ -4109,7 +4259,7 @@
           <p:cNvPr id="24" name="">
             <a:extLst xmlns:a="http://schemas.openxmlformats.org/drawingml/2006/main">
               <a:ext uri="{FF2B5EF4-FFF2-40B4-BE49-F238E27FC236}">
-                <a16:creationId xmlns:a16="http://schemas.microsoft.com/office/drawing/2014/main" id="{D7C96D25-C3EA-4B23-A057-3BE7D9F6C37D}"/>
+                <a16:creationId xmlns:a16="http://schemas.microsoft.com/office/drawing/2014/main" id="{64DFA2F0-B629-4B4C-AEC6-E2CFF1DA92CD}"/>
               </a:ext>
             </a:extLst>
           </p:cNvPr>
@@ -4139,17 +4289,17 @@
             <a:pPr>
               <a:defRPr sz="1125" b="1">
                 <a:solidFill>
-                  <a:srgbClr val="5E7080"/>
+                  <a:srgbClr val="5A6B7C"/>
                 </a:solidFill>
               </a:defRPr>
             </a:pPr>
             <a:r>
               <a:rPr sz="1125" b="1">
                 <a:solidFill>
-                  <a:srgbClr val="5E7080"/>
-                </a:solidFill>
-              </a:rPr>
-              <a:t>Unresolved evidence</a:t>
+                  <a:srgbClr val="5A6B7C"/>
+                </a:solidFill>
+              </a:rPr>
+              <a:t>Open information items</a:t>
             </a:r>
           </a:p>
         </p:txBody>
@@ -4159,7 +4309,7 @@
           <p:cNvPr id="25" name="">
             <a:extLst xmlns:a="http://schemas.openxmlformats.org/drawingml/2006/main">
               <a:ext uri="{FF2B5EF4-FFF2-40B4-BE49-F238E27FC236}">
-                <a16:creationId xmlns:a16="http://schemas.microsoft.com/office/drawing/2014/main" id="{1B37592B-65E7-4BFF-B9B7-5C35F7FCA29A}"/>
+                <a16:creationId xmlns:a16="http://schemas.microsoft.com/office/drawing/2014/main" id="{275BAE27-9D45-47D2-807D-94D22551A384}"/>
               </a:ext>
             </a:extLst>
           </p:cNvPr>
@@ -4199,7 +4349,7 @@
                   <a:srgbClr val="142F4C"/>
                 </a:solidFill>
               </a:rPr>
-              <a:t>8</a:t>
+              <a:t>63</a:t>
             </a:r>
           </a:p>
         </p:txBody>
@@ -4209,7 +4359,7 @@
           <p:cNvPr id="26" name="">
             <a:extLst xmlns:a="http://schemas.openxmlformats.org/drawingml/2006/main">
               <a:ext uri="{FF2B5EF4-FFF2-40B4-BE49-F238E27FC236}">
-                <a16:creationId xmlns:a16="http://schemas.microsoft.com/office/drawing/2014/main" id="{E759E1A6-D26B-4C37-BACE-5D201DE3C260}"/>
+                <a16:creationId xmlns:a16="http://schemas.microsoft.com/office/drawing/2014/main" id="{FBD6F357-E5C3-4F06-88BA-689A4BD14AAC}"/>
               </a:ext>
             </a:extLst>
           </p:cNvPr>
@@ -4239,14 +4389,14 @@
             <a:pPr>
               <a:defRPr sz="1050">
                 <a:solidFill>
-                  <a:srgbClr val="5E7080"/>
+                  <a:srgbClr val="5A6B7C"/>
                 </a:solidFill>
               </a:defRPr>
             </a:pPr>
             <a:r>
               <a:rPr sz="1050">
                 <a:solidFill>
-                  <a:srgbClr val="5E7080"/>
+                  <a:srgbClr val="5A6B7C"/>
                 </a:solidFill>
               </a:rPr>
               <a:t>items requiring closure</a:t>
@@ -4259,7 +4409,7 @@
           <p:cNvPr id="27" name="">
             <a:extLst xmlns:a="http://schemas.openxmlformats.org/drawingml/2006/main">
               <a:ext uri="{FF2B5EF4-FFF2-40B4-BE49-F238E27FC236}">
-                <a16:creationId xmlns:a16="http://schemas.microsoft.com/office/drawing/2014/main" id="{E88032D5-C145-43EF-9A1B-192345904230}"/>
+                <a16:creationId xmlns:a16="http://schemas.microsoft.com/office/drawing/2014/main" id="{84D4F7A7-D39C-4347-B8EC-A332061F6807}"/>
               </a:ext>
             </a:extLst>
           </p:cNvPr>
@@ -4279,11 +4429,11 @@
             </a:avLst>
           </a:prstGeom>
           <a:solidFill xmlns:a="http://schemas.openxmlformats.org/drawingml/2006/main">
-            <a:srgbClr val="EEF3F6"/>
+            <a:srgbClr val="FBF9F5"/>
           </a:solidFill>
           <a:ln xmlns:a="http://schemas.openxmlformats.org/drawingml/2006/main" w="9525">
             <a:solidFill>
-              <a:srgbClr val="D8E0E5"/>
+              <a:srgbClr val="D9E1E7"/>
             </a:solidFill>
             <a:prstDash val="solid"/>
           </a:ln>
@@ -4294,7 +4444,7 @@
           <p:cNvPr id="28" name="">
             <a:extLst xmlns:a="http://schemas.openxmlformats.org/drawingml/2006/main">
               <a:ext uri="{FF2B5EF4-FFF2-40B4-BE49-F238E27FC236}">
-                <a16:creationId xmlns:a16="http://schemas.microsoft.com/office/drawing/2014/main" id="{2983B2A6-09C5-47F4-AA3F-B86C9C3B86D9}"/>
+                <a16:creationId xmlns:a16="http://schemas.microsoft.com/office/drawing/2014/main" id="{9CCF0F89-9FE6-4B63-A537-FB2ADEDB6941}"/>
               </a:ext>
             </a:extLst>
           </p:cNvPr>
@@ -4324,14 +4474,14 @@
             <a:pPr>
               <a:defRPr sz="1200" b="1">
                 <a:solidFill>
-                  <a:srgbClr val="C77B35"/>
+                  <a:srgbClr val="C9A227"/>
                 </a:solidFill>
               </a:defRPr>
             </a:pPr>
             <a:r>
               <a:rPr sz="1200" b="1">
                 <a:solidFill>
-                  <a:srgbClr val="C77B35"/>
+                  <a:srgbClr val="C9A227"/>
                 </a:solidFill>
               </a:rPr>
               <a:t>Management reading</a:t>
@@ -4344,7 +4494,7 @@
           <p:cNvPr id="29" name="">
             <a:extLst xmlns:a="http://schemas.openxmlformats.org/drawingml/2006/main">
               <a:ext uri="{FF2B5EF4-FFF2-40B4-BE49-F238E27FC236}">
-                <a16:creationId xmlns:a16="http://schemas.microsoft.com/office/drawing/2014/main" id="{F4C479BF-D2C6-4922-9182-529DEB61EE93}"/>
+                <a16:creationId xmlns:a16="http://schemas.microsoft.com/office/drawing/2014/main" id="{8A914FCB-DF61-4DE6-93DC-285E5E29EDCA}"/>
               </a:ext>
             </a:extLst>
           </p:cNvPr>
@@ -4392,7 +4542,7 @@
     </p:spTree>
     <p:extLst>
       <p:ext uri="{BB962C8B-B14F-4D97-AF65-F5344CB8AC3E}">
-        <p14:creationId xmlns:p14="http://schemas.microsoft.com/office/powerpoint/2010/main" val="1243259252"/>
+        <p14:creationId xmlns:p14="http://schemas.microsoft.com/office/powerpoint/2010/main" val="416502629"/>
       </p:ext>
     </p:extLst>
   </p:cSld>
@@ -4405,7 +4555,7 @@
     <p:bg>
       <p:bgPr>
         <a:solidFill xmlns:a="http://schemas.openxmlformats.org/drawingml/2006/main">
-          <a:srgbClr val="F7F4EE"/>
+          <a:srgbClr val="FBF9F5"/>
         </a:solidFill>
       </p:bgPr>
     </p:bg>
@@ -4423,7 +4573,7 @@
           <p:cNvPr id="26" name="">
             <a:extLst xmlns:a="http://schemas.openxmlformats.org/drawingml/2006/main">
               <a:ext uri="{FF2B5EF4-FFF2-40B4-BE49-F238E27FC236}">
-                <a16:creationId xmlns:a16="http://schemas.microsoft.com/office/drawing/2014/main" id="{8A1AAEEC-0435-46C2-A31E-A8DF7770C07A}"/>
+                <a16:creationId xmlns:a16="http://schemas.microsoft.com/office/drawing/2014/main" id="{79E107F4-EE55-4DCD-8EBE-1C6D786DA6EC}"/>
               </a:ext>
             </a:extLst>
           </p:cNvPr>
@@ -4453,14 +4603,14 @@
             <a:pPr>
               <a:defRPr sz="1050" b="1">
                 <a:solidFill>
-                  <a:srgbClr val="C77B35"/>
+                  <a:srgbClr val="C9A227"/>
                 </a:solidFill>
               </a:defRPr>
             </a:pPr>
             <a:r>
               <a:rPr sz="1050" b="1">
                 <a:solidFill>
-                  <a:srgbClr val="C77B35"/>
+                  <a:srgbClr val="C9A227"/>
                 </a:solidFill>
               </a:rPr>
               <a:t>COMPREHENSIVE REVIEW · 03</a:t>
@@ -4473,7 +4623,7 @@
           <p:cNvPr id="2" name="">
             <a:extLst xmlns:a="http://schemas.openxmlformats.org/drawingml/2006/main">
               <a:ext uri="{FF2B5EF4-FFF2-40B4-BE49-F238E27FC236}">
-                <a16:creationId xmlns:a16="http://schemas.microsoft.com/office/drawing/2014/main" id="{7E71DE62-CBC3-4740-8742-B78CF0C275E1}"/>
+                <a16:creationId xmlns:a16="http://schemas.microsoft.com/office/drawing/2014/main" id="{ED7BEEBD-129E-4F5B-99E5-5492BC7C6D00}"/>
               </a:ext>
             </a:extLst>
           </p:cNvPr>
@@ -4513,7 +4663,7 @@
                   <a:srgbClr val="142F4C"/>
                 </a:solidFill>
               </a:rPr>
-              <a:t>Evidence review supports selected positions, but the scope is not fully closed.</a:t>
+              <a:t>The information boundary is visible before decisions are made.</a:t>
             </a:r>
           </a:p>
         </p:txBody>
@@ -4523,7 +4673,7 @@
           <p:cNvPr id="3" name="">
             <a:extLst xmlns:a="http://schemas.openxmlformats.org/drawingml/2006/main">
               <a:ext uri="{FF2B5EF4-FFF2-40B4-BE49-F238E27FC236}">
-                <a16:creationId xmlns:a16="http://schemas.microsoft.com/office/drawing/2014/main" id="{16942336-9817-448F-8366-060726EAFB7F}"/>
+                <a16:creationId xmlns:a16="http://schemas.microsoft.com/office/drawing/2014/main" id="{6F4AB1DF-9B55-4F00-91B7-B674A6D87380}"/>
               </a:ext>
             </a:extLst>
           </p:cNvPr>
@@ -4553,17 +4703,17 @@
             <a:pPr>
               <a:defRPr sz="1350">
                 <a:solidFill>
-                  <a:srgbClr val="5E7080"/>
+                  <a:srgbClr val="5A6B7C"/>
                 </a:solidFill>
               </a:defRPr>
             </a:pPr>
             <a:r>
               <a:rPr sz="1350">
                 <a:solidFill>
-                  <a:srgbClr val="5E7080"/>
-                </a:solidFill>
-              </a:rPr>
-              <a:t>The evidence ledger makes the reliance boundary visible in one view.</a:t>
+                  <a:srgbClr val="5A6B7C"/>
+                </a:solidFill>
+              </a:rPr>
+              <a:t>The register makes scope, review notes and open items visible in one view.</a:t>
             </a:r>
           </a:p>
         </p:txBody>
@@ -4573,7 +4723,7 @@
           <p:cNvPr id="4" name="">
             <a:extLst xmlns:a="http://schemas.openxmlformats.org/drawingml/2006/main">
               <a:ext uri="{FF2B5EF4-FFF2-40B4-BE49-F238E27FC236}">
-                <a16:creationId xmlns:a16="http://schemas.microsoft.com/office/drawing/2014/main" id="{232D4578-6F42-4844-A7ED-3AE49A9FB091}"/>
+                <a16:creationId xmlns:a16="http://schemas.microsoft.com/office/drawing/2014/main" id="{F278BDA9-A097-4A2E-B3CD-6CA810D31D5C}"/>
               </a:ext>
             </a:extLst>
           </p:cNvPr>
@@ -4593,7 +4743,7 @@
           <a:noFill xmlns:a="http://schemas.openxmlformats.org/drawingml/2006/main"/>
           <a:ln xmlns:a="http://schemas.openxmlformats.org/drawingml/2006/main" w="9525">
             <a:solidFill>
-              <a:srgbClr val="D8E0E5"/>
+              <a:srgbClr val="D9E1E7"/>
             </a:solidFill>
             <a:prstDash val="solid"/>
           </a:ln>
@@ -4604,7 +4754,7 @@
           <p:cNvPr id="5" name="">
             <a:extLst xmlns:a="http://schemas.openxmlformats.org/drawingml/2006/main">
               <a:ext uri="{FF2B5EF4-FFF2-40B4-BE49-F238E27FC236}">
-                <a16:creationId xmlns:a16="http://schemas.microsoft.com/office/drawing/2014/main" id="{CD7185C6-4B33-4383-98E4-61EEBFC82E69}"/>
+                <a16:creationId xmlns:a16="http://schemas.microsoft.com/office/drawing/2014/main" id="{18C13C4C-60A0-413A-9204-F0A9E7F6F9DA}"/>
               </a:ext>
             </a:extLst>
           </p:cNvPr>
@@ -4634,14 +4784,14 @@
             <a:pPr>
               <a:defRPr sz="975">
                 <a:solidFill>
-                  <a:srgbClr val="5E7080"/>
+                  <a:srgbClr val="5A6B7C"/>
                 </a:solidFill>
               </a:defRPr>
             </a:pPr>
             <a:r>
               <a:rPr sz="975">
                 <a:solidFill>
-                  <a:srgbClr val="5E7080"/>
+                  <a:srgbClr val="5A6B7C"/>
                 </a:solidFill>
               </a:rPr>
               <a:t>MK Fraud Readiness · Comprehensive</a:t>
@@ -4654,7 +4804,7 @@
           <p:cNvPr id="6" name="">
             <a:extLst xmlns:a="http://schemas.openxmlformats.org/drawingml/2006/main">
               <a:ext uri="{FF2B5EF4-FFF2-40B4-BE49-F238E27FC236}">
-                <a16:creationId xmlns:a16="http://schemas.microsoft.com/office/drawing/2014/main" id="{5A2831CF-9E8C-4450-9038-FC39C09BE7BC}"/>
+                <a16:creationId xmlns:a16="http://schemas.microsoft.com/office/drawing/2014/main" id="{FE9F0A9B-3248-4AA4-B1D8-91FA950C0141}"/>
               </a:ext>
             </a:extLst>
           </p:cNvPr>
@@ -4684,14 +4834,14 @@
             <a:pPr algn="r">
               <a:defRPr sz="975">
                 <a:solidFill>
-                  <a:srgbClr val="5E7080"/>
+                  <a:srgbClr val="5A6B7C"/>
                 </a:solidFill>
               </a:defRPr>
             </a:pPr>
             <a:r>
               <a:rPr sz="975">
                 <a:solidFill>
-                  <a:srgbClr val="5E7080"/>
+                  <a:srgbClr val="5A6B7C"/>
                 </a:solidFill>
               </a:rPr>
               <a:t>03 / 10</a:t>
@@ -4704,7 +4854,7 @@
           <p:cNvPr id="7" name="">
             <a:extLst xmlns:a="http://schemas.openxmlformats.org/drawingml/2006/main">
               <a:ext uri="{FF2B5EF4-FFF2-40B4-BE49-F238E27FC236}">
-                <a16:creationId xmlns:a16="http://schemas.microsoft.com/office/drawing/2014/main" id="{71CCD90C-A78E-474D-BAE4-DD7E76448522}"/>
+                <a16:creationId xmlns:a16="http://schemas.microsoft.com/office/drawing/2014/main" id="{37F651B7-E832-4B7E-932F-D315023D39A7}"/>
               </a:ext>
             </a:extLst>
           </p:cNvPr>
@@ -4744,7 +4894,7 @@
                   <a:srgbClr val="142F4C"/>
                 </a:solidFill>
               </a:rPr>
-              <a:t>Supported for stated scope</a:t>
+              <a:t>Review note — stated scope</a:t>
             </a:r>
           </a:p>
         </p:txBody>
@@ -4754,7 +4904,7 @@
           <p:cNvPr id="8" name="">
             <a:extLst xmlns:a="http://schemas.openxmlformats.org/drawingml/2006/main">
               <a:ext uri="{FF2B5EF4-FFF2-40B4-BE49-F238E27FC236}">
-                <a16:creationId xmlns:a16="http://schemas.microsoft.com/office/drawing/2014/main" id="{4B05931B-4460-452A-AEC4-69C6FD0725F2}"/>
+                <a16:creationId xmlns:a16="http://schemas.microsoft.com/office/drawing/2014/main" id="{5D704A54-D545-4607-AADD-E6A42CD11687}"/>
               </a:ext>
             </a:extLst>
           </p:cNvPr>
@@ -4772,11 +4922,11 @@
             <a:avLst/>
           </a:prstGeom>
           <a:solidFill xmlns:a="http://schemas.openxmlformats.org/drawingml/2006/main">
-            <a:srgbClr val="E4EAEE"/>
+            <a:srgbClr val="D9E1E7"/>
           </a:solidFill>
           <a:ln xmlns:a="http://schemas.openxmlformats.org/drawingml/2006/main" w="0">
             <a:solidFill>
-              <a:srgbClr val="E4EAEE"/>
+              <a:srgbClr val="D9E1E7"/>
             </a:solidFill>
             <a:prstDash val="solid"/>
           </a:ln>
@@ -4787,7 +4937,7 @@
           <p:cNvPr id="9" name="">
             <a:extLst xmlns:a="http://schemas.openxmlformats.org/drawingml/2006/main">
               <a:ext uri="{FF2B5EF4-FFF2-40B4-BE49-F238E27FC236}">
-                <a16:creationId xmlns:a16="http://schemas.microsoft.com/office/drawing/2014/main" id="{F9DEFA2B-F720-4C1D-BD68-93C5B2558133}"/>
+                <a16:creationId xmlns:a16="http://schemas.microsoft.com/office/drawing/2014/main" id="{7C34A210-A4A0-4A62-8E0B-39EA6229A5A9}"/>
               </a:ext>
             </a:extLst>
           </p:cNvPr>
@@ -4799,17 +4949,17 @@
         <p:spPr>
           <a:xfrm xmlns:a="http://schemas.openxmlformats.org/drawingml/2006/main">
             <a:off x="4000500" y="2143125"/>
-            <a:ext cx="1238250" cy="228600"/>
+            <a:ext cx="171450" cy="228600"/>
           </a:xfrm>
           <a:prstGeom xmlns:a="http://schemas.openxmlformats.org/drawingml/2006/main" prst="rect">
             <a:avLst/>
           </a:prstGeom>
           <a:solidFill xmlns:a="http://schemas.openxmlformats.org/drawingml/2006/main">
-            <a:srgbClr val="2D7C57"/>
+            <a:srgbClr val="1F6B4A"/>
           </a:solidFill>
           <a:ln xmlns:a="http://schemas.openxmlformats.org/drawingml/2006/main" w="0">
             <a:solidFill>
-              <a:srgbClr val="2D7C57"/>
+              <a:srgbClr val="1F6B4A"/>
             </a:solidFill>
             <a:prstDash val="solid"/>
           </a:ln>
@@ -4820,7 +4970,7 @@
           <p:cNvPr id="10" name="">
             <a:extLst xmlns:a="http://schemas.openxmlformats.org/drawingml/2006/main">
               <a:ext uri="{FF2B5EF4-FFF2-40B4-BE49-F238E27FC236}">
-                <a16:creationId xmlns:a16="http://schemas.microsoft.com/office/drawing/2014/main" id="{E84C1B34-21EA-4419-9CDF-81876EFE40CB}"/>
+                <a16:creationId xmlns:a16="http://schemas.microsoft.com/office/drawing/2014/main" id="{87B29164-BE79-4029-8D3B-65EC73E01916}"/>
               </a:ext>
             </a:extLst>
           </p:cNvPr>
@@ -4860,7 +5010,7 @@
                   <a:srgbClr val="142F4C"/>
                 </a:solidFill>
               </a:rPr>
-              <a:t>3</a:t>
+              <a:t>1</a:t>
             </a:r>
           </a:p>
         </p:txBody>
@@ -4870,7 +5020,7 @@
           <p:cNvPr id="11" name="">
             <a:extLst xmlns:a="http://schemas.openxmlformats.org/drawingml/2006/main">
               <a:ext uri="{FF2B5EF4-FFF2-40B4-BE49-F238E27FC236}">
-                <a16:creationId xmlns:a16="http://schemas.microsoft.com/office/drawing/2014/main" id="{60984588-8180-42EF-B549-98F741AE5DCE}"/>
+                <a16:creationId xmlns:a16="http://schemas.microsoft.com/office/drawing/2014/main" id="{A6FACD6D-4585-492E-A320-9D6EBF940E9F}"/>
               </a:ext>
             </a:extLst>
           </p:cNvPr>
@@ -4910,7 +5060,7 @@
                   <a:srgbClr val="142F4C"/>
                 </a:solidFill>
               </a:rPr>
-              <a:t>Evidence reviewed</a:t>
+              <a:t>Management review record</a:t>
             </a:r>
           </a:p>
         </p:txBody>
@@ -4920,7 +5070,7 @@
           <p:cNvPr id="12" name="">
             <a:extLst xmlns:a="http://schemas.openxmlformats.org/drawingml/2006/main">
               <a:ext uri="{FF2B5EF4-FFF2-40B4-BE49-F238E27FC236}">
-                <a16:creationId xmlns:a16="http://schemas.microsoft.com/office/drawing/2014/main" id="{9EF807D6-F6A6-4500-B202-A292C93C9C85}"/>
+                <a16:creationId xmlns:a16="http://schemas.microsoft.com/office/drawing/2014/main" id="{2B3A5B6C-6AF1-497E-BA88-C96C5853983B}"/>
               </a:ext>
             </a:extLst>
           </p:cNvPr>
@@ -4938,11 +5088,11 @@
             <a:avLst/>
           </a:prstGeom>
           <a:solidFill xmlns:a="http://schemas.openxmlformats.org/drawingml/2006/main">
-            <a:srgbClr val="E4EAEE"/>
+            <a:srgbClr val="D9E1E7"/>
           </a:solidFill>
           <a:ln xmlns:a="http://schemas.openxmlformats.org/drawingml/2006/main" w="0">
             <a:solidFill>
-              <a:srgbClr val="E4EAEE"/>
+              <a:srgbClr val="D9E1E7"/>
             </a:solidFill>
             <a:prstDash val="solid"/>
           </a:ln>
@@ -4953,7 +5103,7 @@
           <p:cNvPr id="13" name="">
             <a:extLst xmlns:a="http://schemas.openxmlformats.org/drawingml/2006/main">
               <a:ext uri="{FF2B5EF4-FFF2-40B4-BE49-F238E27FC236}">
-                <a16:creationId xmlns:a16="http://schemas.microsoft.com/office/drawing/2014/main" id="{D7D9F9C1-FABD-4CDF-89B1-0F6C4A0F1EB8}"/>
+                <a16:creationId xmlns:a16="http://schemas.microsoft.com/office/drawing/2014/main" id="{B3F1AF7D-3B58-4E0E-95B9-90819E56F3C9}"/>
               </a:ext>
             </a:extLst>
           </p:cNvPr>
@@ -4965,17 +5115,17 @@
         <p:spPr>
           <a:xfrm xmlns:a="http://schemas.openxmlformats.org/drawingml/2006/main">
             <a:off x="4000500" y="2733675"/>
-            <a:ext cx="412750" cy="228600"/>
+            <a:ext cx="171450" cy="228600"/>
           </a:xfrm>
           <a:prstGeom xmlns:a="http://schemas.openxmlformats.org/drawingml/2006/main" prst="rect">
             <a:avLst/>
           </a:prstGeom>
           <a:solidFill xmlns:a="http://schemas.openxmlformats.org/drawingml/2006/main">
-            <a:srgbClr val="25658C"/>
+            <a:srgbClr val="2C4A6B"/>
           </a:solidFill>
           <a:ln xmlns:a="http://schemas.openxmlformats.org/drawingml/2006/main" w="0">
             <a:solidFill>
-              <a:srgbClr val="25658C"/>
+              <a:srgbClr val="2C4A6B"/>
             </a:solidFill>
             <a:prstDash val="solid"/>
           </a:ln>
@@ -4986,7 +5136,7 @@
           <p:cNvPr id="14" name="">
             <a:extLst xmlns:a="http://schemas.openxmlformats.org/drawingml/2006/main">
               <a:ext uri="{FF2B5EF4-FFF2-40B4-BE49-F238E27FC236}">
-                <a16:creationId xmlns:a16="http://schemas.microsoft.com/office/drawing/2014/main" id="{25F61447-A436-4C97-9059-83200237D3FD}"/>
+                <a16:creationId xmlns:a16="http://schemas.microsoft.com/office/drawing/2014/main" id="{8FDADAF9-647D-4F22-A8D4-052D531892E8}"/>
               </a:ext>
             </a:extLst>
           </p:cNvPr>
@@ -5026,7 +5176,7 @@
                   <a:srgbClr val="142F4C"/>
                 </a:solidFill>
               </a:rPr>
-              <a:t>1</a:t>
+              <a:t>0</a:t>
             </a:r>
           </a:p>
         </p:txBody>
@@ -5036,7 +5186,7 @@
           <p:cNvPr id="15" name="">
             <a:extLst xmlns:a="http://schemas.openxmlformats.org/drawingml/2006/main">
               <a:ext uri="{FF2B5EF4-FFF2-40B4-BE49-F238E27FC236}">
-                <a16:creationId xmlns:a16="http://schemas.microsoft.com/office/drawing/2014/main" id="{CFBC038C-6638-4444-8D32-8D97331316FD}"/>
+                <a16:creationId xmlns:a16="http://schemas.microsoft.com/office/drawing/2014/main" id="{6DAC25CE-C57A-49D4-94C2-F09FA2E2277D}"/>
               </a:ext>
             </a:extLst>
           </p:cNvPr>
@@ -5076,7 +5226,7 @@
                   <a:srgbClr val="142F4C"/>
                 </a:solidFill>
               </a:rPr>
-              <a:t>Insufficient for conclusion</a:t>
+              <a:t>Further basis required</a:t>
             </a:r>
           </a:p>
         </p:txBody>
@@ -5086,7 +5236,7 @@
           <p:cNvPr id="16" name="">
             <a:extLst xmlns:a="http://schemas.openxmlformats.org/drawingml/2006/main">
               <a:ext uri="{FF2B5EF4-FFF2-40B4-BE49-F238E27FC236}">
-                <a16:creationId xmlns:a16="http://schemas.microsoft.com/office/drawing/2014/main" id="{B2DF93EC-7B73-4D45-877F-FE0759A0FDCE}"/>
+                <a16:creationId xmlns:a16="http://schemas.microsoft.com/office/drawing/2014/main" id="{8F07F24B-20BB-4E94-B390-EFB9436AFC80}"/>
               </a:ext>
             </a:extLst>
           </p:cNvPr>
@@ -5104,11 +5254,11 @@
             <a:avLst/>
           </a:prstGeom>
           <a:solidFill xmlns:a="http://schemas.openxmlformats.org/drawingml/2006/main">
-            <a:srgbClr val="E4EAEE"/>
+            <a:srgbClr val="D9E1E7"/>
           </a:solidFill>
           <a:ln xmlns:a="http://schemas.openxmlformats.org/drawingml/2006/main" w="0">
             <a:solidFill>
-              <a:srgbClr val="E4EAEE"/>
+              <a:srgbClr val="D9E1E7"/>
             </a:solidFill>
             <a:prstDash val="solid"/>
           </a:ln>
@@ -5119,7 +5269,7 @@
           <p:cNvPr id="17" name="">
             <a:extLst xmlns:a="http://schemas.openxmlformats.org/drawingml/2006/main">
               <a:ext uri="{FF2B5EF4-FFF2-40B4-BE49-F238E27FC236}">
-                <a16:creationId xmlns:a16="http://schemas.microsoft.com/office/drawing/2014/main" id="{43C3DF77-D24D-4E62-A02A-752A0808F247}"/>
+                <a16:creationId xmlns:a16="http://schemas.microsoft.com/office/drawing/2014/main" id="{3F63A6E1-F119-4901-A719-9F5B58261139}"/>
               </a:ext>
             </a:extLst>
           </p:cNvPr>
@@ -5131,17 +5281,17 @@
         <p:spPr>
           <a:xfrm xmlns:a="http://schemas.openxmlformats.org/drawingml/2006/main">
             <a:off x="4000500" y="3324225"/>
-            <a:ext cx="825500" cy="228600"/>
+            <a:ext cx="171450" cy="228600"/>
           </a:xfrm>
           <a:prstGeom xmlns:a="http://schemas.openxmlformats.org/drawingml/2006/main" prst="rect">
             <a:avLst/>
           </a:prstGeom>
           <a:solidFill xmlns:a="http://schemas.openxmlformats.org/drawingml/2006/main">
-            <a:srgbClr val="A93E38"/>
+            <a:srgbClr val="A32020"/>
           </a:solidFill>
           <a:ln xmlns:a="http://schemas.openxmlformats.org/drawingml/2006/main" w="0">
             <a:solidFill>
-              <a:srgbClr val="A93E38"/>
+              <a:srgbClr val="A32020"/>
             </a:solidFill>
             <a:prstDash val="solid"/>
           </a:ln>
@@ -5152,7 +5302,7 @@
           <p:cNvPr id="18" name="">
             <a:extLst xmlns:a="http://schemas.openxmlformats.org/drawingml/2006/main">
               <a:ext uri="{FF2B5EF4-FFF2-40B4-BE49-F238E27FC236}">
-                <a16:creationId xmlns:a16="http://schemas.microsoft.com/office/drawing/2014/main" id="{01528D56-CC1E-444F-8701-215FEA907A8C}"/>
+                <a16:creationId xmlns:a16="http://schemas.microsoft.com/office/drawing/2014/main" id="{0ED3DC40-EF2F-4B2A-903F-D6F0B736CE23}"/>
               </a:ext>
             </a:extLst>
           </p:cNvPr>
@@ -5192,7 +5342,7 @@
                   <a:srgbClr val="142F4C"/>
                 </a:solidFill>
               </a:rPr>
-              <a:t>2</a:t>
+              <a:t>1</a:t>
             </a:r>
           </a:p>
         </p:txBody>
@@ -5202,7 +5352,7 @@
           <p:cNvPr id="19" name="">
             <a:extLst xmlns:a="http://schemas.openxmlformats.org/drawingml/2006/main">
               <a:ext uri="{FF2B5EF4-FFF2-40B4-BE49-F238E27FC236}">
-                <a16:creationId xmlns:a16="http://schemas.microsoft.com/office/drawing/2014/main" id="{BE9502D5-2049-42BE-8470-3A06F73AC36A}"/>
+                <a16:creationId xmlns:a16="http://schemas.microsoft.com/office/drawing/2014/main" id="{A35CC518-02DE-4F4E-AD7F-D856DC39C4BE}"/>
               </a:ext>
             </a:extLst>
           </p:cNvPr>
@@ -5242,7 +5392,7 @@
                   <a:srgbClr val="142F4C"/>
                 </a:solidFill>
               </a:rPr>
-              <a:t>Self-reported / open</a:t>
+              <a:t>Recorded / open</a:t>
             </a:r>
           </a:p>
         </p:txBody>
@@ -5252,7 +5402,7 @@
           <p:cNvPr id="20" name="">
             <a:extLst xmlns:a="http://schemas.openxmlformats.org/drawingml/2006/main">
               <a:ext uri="{FF2B5EF4-FFF2-40B4-BE49-F238E27FC236}">
-                <a16:creationId xmlns:a16="http://schemas.microsoft.com/office/drawing/2014/main" id="{3779F4DE-A9A0-4ACB-99BB-583C7032B032}"/>
+                <a16:creationId xmlns:a16="http://schemas.microsoft.com/office/drawing/2014/main" id="{623E7CAE-544D-4FF2-BB91-701B3C378837}"/>
               </a:ext>
             </a:extLst>
           </p:cNvPr>
@@ -5270,11 +5420,11 @@
             <a:avLst/>
           </a:prstGeom>
           <a:solidFill xmlns:a="http://schemas.openxmlformats.org/drawingml/2006/main">
-            <a:srgbClr val="E4EAEE"/>
+            <a:srgbClr val="D9E1E7"/>
           </a:solidFill>
           <a:ln xmlns:a="http://schemas.openxmlformats.org/drawingml/2006/main" w="0">
             <a:solidFill>
-              <a:srgbClr val="E4EAEE"/>
+              <a:srgbClr val="D9E1E7"/>
             </a:solidFill>
             <a:prstDash val="solid"/>
           </a:ln>
@@ -5285,7 +5435,7 @@
           <p:cNvPr id="21" name="">
             <a:extLst xmlns:a="http://schemas.openxmlformats.org/drawingml/2006/main">
               <a:ext uri="{FF2B5EF4-FFF2-40B4-BE49-F238E27FC236}">
-                <a16:creationId xmlns:a16="http://schemas.microsoft.com/office/drawing/2014/main" id="{6A3883B9-882B-47C2-A588-B98BB23CE0DD}"/>
+                <a16:creationId xmlns:a16="http://schemas.microsoft.com/office/drawing/2014/main" id="{067C5F36-0DCF-484F-B4B9-851C717E61BE}"/>
               </a:ext>
             </a:extLst>
           </p:cNvPr>
@@ -5297,17 +5447,17 @@
         <p:spPr>
           <a:xfrm xmlns:a="http://schemas.openxmlformats.org/drawingml/2006/main">
             <a:off x="4000500" y="3914775"/>
-            <a:ext cx="1651000" cy="228600"/>
+            <a:ext cx="4720828" cy="228600"/>
           </a:xfrm>
           <a:prstGeom xmlns:a="http://schemas.openxmlformats.org/drawingml/2006/main" prst="rect">
             <a:avLst/>
           </a:prstGeom>
           <a:solidFill xmlns:a="http://schemas.openxmlformats.org/drawingml/2006/main">
-            <a:srgbClr val="C77B35"/>
+            <a:srgbClr val="C9A227"/>
           </a:solidFill>
           <a:ln xmlns:a="http://schemas.openxmlformats.org/drawingml/2006/main" w="0">
             <a:solidFill>
-              <a:srgbClr val="C77B35"/>
+              <a:srgbClr val="C9A227"/>
             </a:solidFill>
             <a:prstDash val="solid"/>
           </a:ln>
@@ -5318,7 +5468,7 @@
           <p:cNvPr id="22" name="">
             <a:extLst xmlns:a="http://schemas.openxmlformats.org/drawingml/2006/main">
               <a:ext uri="{FF2B5EF4-FFF2-40B4-BE49-F238E27FC236}">
-                <a16:creationId xmlns:a16="http://schemas.microsoft.com/office/drawing/2014/main" id="{041718B2-4405-4193-B794-BF91335FC99B}"/>
+                <a16:creationId xmlns:a16="http://schemas.microsoft.com/office/drawing/2014/main" id="{648C6E77-15B8-4469-89F6-B87C28AAC95E}"/>
               </a:ext>
             </a:extLst>
           </p:cNvPr>
@@ -5358,7 +5508,7 @@
                   <a:srgbClr val="142F4C"/>
                 </a:solidFill>
               </a:rPr>
-              <a:t>4</a:t>
+              <a:t>61</a:t>
             </a:r>
           </a:p>
         </p:txBody>
@@ -5368,7 +5518,7 @@
           <p:cNvPr id="23" name="">
             <a:extLst xmlns:a="http://schemas.openxmlformats.org/drawingml/2006/main">
               <a:ext uri="{FF2B5EF4-FFF2-40B4-BE49-F238E27FC236}">
-                <a16:creationId xmlns:a16="http://schemas.microsoft.com/office/drawing/2014/main" id="{DC28EFC3-3E57-4406-A8A6-04D8FEBE1960}"/>
+                <a16:creationId xmlns:a16="http://schemas.microsoft.com/office/drawing/2014/main" id="{351DBD84-CBCF-4F7D-B560-2060FD4B6EAA}"/>
               </a:ext>
             </a:extLst>
           </p:cNvPr>
@@ -5392,7 +5542,7 @@
           </a:solidFill>
           <a:ln xmlns:a="http://schemas.openxmlformats.org/drawingml/2006/main" w="9525">
             <a:solidFill>
-              <a:srgbClr val="D8E0E5"/>
+              <a:srgbClr val="D9E1E7"/>
             </a:solidFill>
             <a:prstDash val="solid"/>
           </a:ln>
@@ -5403,7 +5553,7 @@
           <p:cNvPr id="24" name="">
             <a:extLst xmlns:a="http://schemas.openxmlformats.org/drawingml/2006/main">
               <a:ext uri="{FF2B5EF4-FFF2-40B4-BE49-F238E27FC236}">
-                <a16:creationId xmlns:a16="http://schemas.microsoft.com/office/drawing/2014/main" id="{96D31E15-BF5C-4D84-8AEB-3CE8A992A589}"/>
+                <a16:creationId xmlns:a16="http://schemas.microsoft.com/office/drawing/2014/main" id="{4976D506-6AAD-4C3A-B989-0E99F2BBB839}"/>
               </a:ext>
             </a:extLst>
           </p:cNvPr>
@@ -5433,14 +5583,14 @@
             <a:pPr>
               <a:defRPr sz="1200" b="1">
                 <a:solidFill>
-                  <a:srgbClr val="C77B35"/>
+                  <a:srgbClr val="C9A227"/>
                 </a:solidFill>
               </a:defRPr>
             </a:pPr>
             <a:r>
               <a:rPr sz="1200" b="1">
                 <a:solidFill>
-                  <a:srgbClr val="C77B35"/>
+                  <a:srgbClr val="C9A227"/>
                 </a:solidFill>
               </a:rPr>
               <a:t>What the board can rely on</a:t>
@@ -5453,7 +5603,7 @@
           <p:cNvPr id="25" name="">
             <a:extLst xmlns:a="http://schemas.openxmlformats.org/drawingml/2006/main">
               <a:ext uri="{FF2B5EF4-FFF2-40B4-BE49-F238E27FC236}">
-                <a16:creationId xmlns:a16="http://schemas.microsoft.com/office/drawing/2014/main" id="{2067B2FE-4FE8-4E4A-A693-0BE0B2AB3A02}"/>
+                <a16:creationId xmlns:a16="http://schemas.microsoft.com/office/drawing/2014/main" id="{998AE405-97FA-415C-B822-4C77800BE665}"/>
               </a:ext>
             </a:extLst>
           </p:cNvPr>
@@ -5483,17 +5633,17 @@
             <a:pPr>
               <a:defRPr sz="1350">
                 <a:solidFill>
-                  <a:srgbClr val="172232"/>
+                  <a:srgbClr val="1A2634"/>
                 </a:solidFill>
               </a:defRPr>
             </a:pPr>
             <a:r>
               <a:rPr sz="1350">
                 <a:solidFill>
-                  <a:srgbClr val="172232"/>
-                </a:solidFill>
-              </a:rPr>
-              <a:t>Only the named evidence scope. “Insufficient” means the evidence did not establish a conclusion; it does not mean misconduct occurred.</a:t>
+                  <a:srgbClr val="1A2634"/>
+                </a:solidFill>
+              </a:rPr>
+              <a:t>Only the named information scope. An open item limits reliance; it does not mean misconduct occurred.</a:t>
             </a:r>
           </a:p>
         </p:txBody>
@@ -5501,7 +5651,7 @@
     </p:spTree>
     <p:extLst>
       <p:ext uri="{BB962C8B-B14F-4D97-AF65-F5344CB8AC3E}">
-        <p14:creationId xmlns:p14="http://schemas.microsoft.com/office/powerpoint/2010/main" val="85255804"/>
+        <p14:creationId xmlns:p14="http://schemas.microsoft.com/office/powerpoint/2010/main" val="433915504"/>
       </p:ext>
     </p:extLst>
   </p:cSld>
@@ -5514,7 +5664,7 @@
     <p:bg>
       <p:bgPr>
         <a:solidFill xmlns:a="http://schemas.openxmlformats.org/drawingml/2006/main">
-          <a:srgbClr val="F7F4EE"/>
+          <a:srgbClr val="FBF9F5"/>
         </a:solidFill>
       </p:bgPr>
     </p:bg>
@@ -5532,7 +5682,7 @@
           <p:cNvPr id="23" name="">
             <a:extLst xmlns:a="http://schemas.openxmlformats.org/drawingml/2006/main">
               <a:ext uri="{FF2B5EF4-FFF2-40B4-BE49-F238E27FC236}">
-                <a16:creationId xmlns:a16="http://schemas.microsoft.com/office/drawing/2014/main" id="{BA4D6905-1F88-45A2-93D5-745F580D5B3C}"/>
+                <a16:creationId xmlns:a16="http://schemas.microsoft.com/office/drawing/2014/main" id="{A3CB138A-F95C-43F6-9A20-8BBC3C878039}"/>
               </a:ext>
             </a:extLst>
           </p:cNvPr>
@@ -5562,14 +5712,14 @@
             <a:pPr>
               <a:defRPr sz="1050" b="1">
                 <a:solidFill>
-                  <a:srgbClr val="C77B35"/>
+                  <a:srgbClr val="C9A227"/>
                 </a:solidFill>
               </a:defRPr>
             </a:pPr>
             <a:r>
               <a:rPr sz="1050" b="1">
                 <a:solidFill>
-                  <a:srgbClr val="C77B35"/>
+                  <a:srgbClr val="C9A227"/>
                 </a:solidFill>
               </a:rPr>
               <a:t>COMPREHENSIVE REVIEW · 04</a:t>
@@ -5582,7 +5732,7 @@
           <p:cNvPr id="2" name="">
             <a:extLst xmlns:a="http://schemas.openxmlformats.org/drawingml/2006/main">
               <a:ext uri="{FF2B5EF4-FFF2-40B4-BE49-F238E27FC236}">
-                <a16:creationId xmlns:a16="http://schemas.microsoft.com/office/drawing/2014/main" id="{9729942C-78AF-4F79-B427-0E126BB46DD6}"/>
+                <a16:creationId xmlns:a16="http://schemas.microsoft.com/office/drawing/2014/main" id="{3C683ADB-6C2A-43E9-80C7-42479B3CEF72}"/>
               </a:ext>
             </a:extLst>
           </p:cNvPr>
@@ -5622,7 +5772,7 @@
                   <a:srgbClr val="142F4C"/>
                 </a:solidFill>
               </a:rPr>
-              <a:t>Human review adds judgement where the self-assessment is too broad.</a:t>
+              <a:t>Management review adds context where the assessment is too broad.</a:t>
             </a:r>
           </a:p>
         </p:txBody>
@@ -5632,7 +5782,7 @@
           <p:cNvPr id="3" name="">
             <a:extLst xmlns:a="http://schemas.openxmlformats.org/drawingml/2006/main">
               <a:ext uri="{FF2B5EF4-FFF2-40B4-BE49-F238E27FC236}">
-                <a16:creationId xmlns:a16="http://schemas.microsoft.com/office/drawing/2014/main" id="{29B35857-6DB8-4F27-A88A-0CDDC0321CEF}"/>
+                <a16:creationId xmlns:a16="http://schemas.microsoft.com/office/drawing/2014/main" id="{E3C62BE2-0AD0-49F1-AB8F-1EB6B20F2C75}"/>
               </a:ext>
             </a:extLst>
           </p:cNvPr>
@@ -5662,17 +5812,17 @@
             <a:pPr>
               <a:defRPr sz="1350">
                 <a:solidFill>
-                  <a:srgbClr val="5E7080"/>
+                  <a:srgbClr val="5A6B7C"/>
                 </a:solidFill>
               </a:defRPr>
             </a:pPr>
             <a:r>
               <a:rPr sz="1350">
                 <a:solidFill>
-                  <a:srgbClr val="5E7080"/>
-                </a:solidFill>
-              </a:rPr>
-              <a:t>The review narrows claims to the population and artefacts actually examined.</a:t>
+                  <a:srgbClr val="5A6B7C"/>
+                </a:solidFill>
+              </a:rPr>
+              <a:t>Review notes narrow the conversation to the population and records actually supplied.</a:t>
             </a:r>
           </a:p>
         </p:txBody>
@@ -5682,7 +5832,7 @@
           <p:cNvPr id="4" name="">
             <a:extLst xmlns:a="http://schemas.openxmlformats.org/drawingml/2006/main">
               <a:ext uri="{FF2B5EF4-FFF2-40B4-BE49-F238E27FC236}">
-                <a16:creationId xmlns:a16="http://schemas.microsoft.com/office/drawing/2014/main" id="{F5B9660B-E22D-4654-A04B-436F1D4D48A1}"/>
+                <a16:creationId xmlns:a16="http://schemas.microsoft.com/office/drawing/2014/main" id="{68CFEE42-0C6A-4BD9-B8DC-93E6812913ED}"/>
               </a:ext>
             </a:extLst>
           </p:cNvPr>
@@ -5702,7 +5852,7 @@
           <a:noFill xmlns:a="http://schemas.openxmlformats.org/drawingml/2006/main"/>
           <a:ln xmlns:a="http://schemas.openxmlformats.org/drawingml/2006/main" w="9525">
             <a:solidFill>
-              <a:srgbClr val="D8E0E5"/>
+              <a:srgbClr val="D9E1E7"/>
             </a:solidFill>
             <a:prstDash val="solid"/>
           </a:ln>
@@ -5713,7 +5863,7 @@
           <p:cNvPr id="5" name="">
             <a:extLst xmlns:a="http://schemas.openxmlformats.org/drawingml/2006/main">
               <a:ext uri="{FF2B5EF4-FFF2-40B4-BE49-F238E27FC236}">
-                <a16:creationId xmlns:a16="http://schemas.microsoft.com/office/drawing/2014/main" id="{AABCC038-C505-4541-ACD6-88D55B07BF96}"/>
+                <a16:creationId xmlns:a16="http://schemas.microsoft.com/office/drawing/2014/main" id="{D3D4E4D5-2B09-479C-BC0C-516FAA26799A}"/>
               </a:ext>
             </a:extLst>
           </p:cNvPr>
@@ -5743,14 +5893,14 @@
             <a:pPr>
               <a:defRPr sz="975">
                 <a:solidFill>
-                  <a:srgbClr val="5E7080"/>
+                  <a:srgbClr val="5A6B7C"/>
                 </a:solidFill>
               </a:defRPr>
             </a:pPr>
             <a:r>
               <a:rPr sz="975">
                 <a:solidFill>
-                  <a:srgbClr val="5E7080"/>
+                  <a:srgbClr val="5A6B7C"/>
                 </a:solidFill>
               </a:rPr>
               <a:t>MK Fraud Readiness · Comprehensive</a:t>
@@ -5763,7 +5913,7 @@
           <p:cNvPr id="6" name="">
             <a:extLst xmlns:a="http://schemas.openxmlformats.org/drawingml/2006/main">
               <a:ext uri="{FF2B5EF4-FFF2-40B4-BE49-F238E27FC236}">
-                <a16:creationId xmlns:a16="http://schemas.microsoft.com/office/drawing/2014/main" id="{50C2371B-BA82-4C45-A0F8-8F500E35B246}"/>
+                <a16:creationId xmlns:a16="http://schemas.microsoft.com/office/drawing/2014/main" id="{CA201A8D-9CAF-4BDE-B8C8-0DF9EA107024}"/>
               </a:ext>
             </a:extLst>
           </p:cNvPr>
@@ -5793,14 +5943,14 @@
             <a:pPr algn="r">
               <a:defRPr sz="975">
                 <a:solidFill>
-                  <a:srgbClr val="5E7080"/>
+                  <a:srgbClr val="5A6B7C"/>
                 </a:solidFill>
               </a:defRPr>
             </a:pPr>
             <a:r>
               <a:rPr sz="975">
                 <a:solidFill>
-                  <a:srgbClr val="5E7080"/>
+                  <a:srgbClr val="5A6B7C"/>
                 </a:solidFill>
               </a:rPr>
               <a:t>04 / 10</a:t>
@@ -5813,7 +5963,7 @@
           <p:cNvPr id="7" name="">
             <a:extLst xmlns:a="http://schemas.openxmlformats.org/drawingml/2006/main">
               <a:ext uri="{FF2B5EF4-FFF2-40B4-BE49-F238E27FC236}">
-                <a16:creationId xmlns:a16="http://schemas.microsoft.com/office/drawing/2014/main" id="{89A522C7-6606-4EB4-A766-B3338373E385}"/>
+                <a16:creationId xmlns:a16="http://schemas.microsoft.com/office/drawing/2014/main" id="{15055817-FA8B-4CFA-B12F-66197D4821BA}"/>
               </a:ext>
             </a:extLst>
           </p:cNvPr>
@@ -5831,11 +5981,11 @@
             <a:avLst/>
           </a:prstGeom>
           <a:solidFill xmlns:a="http://schemas.openxmlformats.org/drawingml/2006/main">
-            <a:srgbClr val="2D7C57"/>
+            <a:srgbClr val="1F6B4A"/>
           </a:solidFill>
           <a:ln xmlns:a="http://schemas.openxmlformats.org/drawingml/2006/main" w="0">
             <a:solidFill>
-              <a:srgbClr val="2D7C57"/>
+              <a:srgbClr val="1F6B4A"/>
             </a:solidFill>
             <a:prstDash val="solid"/>
           </a:ln>
@@ -5846,7 +5996,7 @@
           <p:cNvPr id="8" name="">
             <a:extLst xmlns:a="http://schemas.openxmlformats.org/drawingml/2006/main">
               <a:ext uri="{FF2B5EF4-FFF2-40B4-BE49-F238E27FC236}">
-                <a16:creationId xmlns:a16="http://schemas.microsoft.com/office/drawing/2014/main" id="{53A52361-4FF1-484A-8893-E30AEF03813D}"/>
+                <a16:creationId xmlns:a16="http://schemas.microsoft.com/office/drawing/2014/main" id="{6F135C87-B53F-4CDC-B5EC-DD95EFA699D0}"/>
               </a:ext>
             </a:extLst>
           </p:cNvPr>
@@ -5886,7 +6036,7 @@
                   <a:srgbClr val="142F4C"/>
                 </a:solidFill>
               </a:rPr>
-              <a:t>Awareness completion is not reconciled to higher-risk roles</a:t>
+              <a:t>control design</a:t>
             </a:r>
           </a:p>
         </p:txBody>
@@ -5896,7 +6046,7 @@
           <p:cNvPr id="9" name="">
             <a:extLst xmlns:a="http://schemas.openxmlformats.org/drawingml/2006/main">
               <a:ext uri="{FF2B5EF4-FFF2-40B4-BE49-F238E27FC236}">
-                <a16:creationId xmlns:a16="http://schemas.microsoft.com/office/drawing/2014/main" id="{BF36DE4F-54B1-4C5C-8ED4-E025CA20DB36}"/>
+                <a16:creationId xmlns:a16="http://schemas.microsoft.com/office/drawing/2014/main" id="{D475D8EE-8410-4DA5-BFAD-2B8D2D54E4F0}"/>
               </a:ext>
             </a:extLst>
           </p:cNvPr>
@@ -5926,17 +6076,17 @@
             <a:pPr>
               <a:defRPr sz="1200">
                 <a:solidFill>
-                  <a:srgbClr val="5E7080"/>
+                  <a:srgbClr val="5A6B7C"/>
                 </a:solidFill>
               </a:defRPr>
             </a:pPr>
             <a:r>
               <a:rPr sz="1200">
                 <a:solidFill>
-                  <a:srgbClr val="5E7080"/>
-                </a:solidFill>
-              </a:rPr>
-              <a:t>Recorded: Self-reported position: Exists only informally or inconsistently</a:t>
+                  <a:srgbClr val="5A6B7C"/>
+                </a:solidFill>
+              </a:rPr>
+              <a:t>Recorded: Self-reported position retained unless separately evidenced.</a:t>
             </a:r>
           </a:p>
         </p:txBody>
@@ -5946,7 +6096,7 @@
           <p:cNvPr id="10" name="">
             <a:extLst xmlns:a="http://schemas.openxmlformats.org/drawingml/2006/main">
               <a:ext uri="{FF2B5EF4-FFF2-40B4-BE49-F238E27FC236}">
-                <a16:creationId xmlns:a16="http://schemas.microsoft.com/office/drawing/2014/main" id="{427A3EE4-6490-47A2-B16F-9BC0AE06A1AC}"/>
+                <a16:creationId xmlns:a16="http://schemas.microsoft.com/office/drawing/2014/main" id="{D1272FDF-76CD-49E0-8DC2-E38B32436633}"/>
               </a:ext>
             </a:extLst>
           </p:cNvPr>
@@ -5976,17 +6126,17 @@
             <a:pPr>
               <a:defRPr sz="1200">
                 <a:solidFill>
-                  <a:srgbClr val="172232"/>
+                  <a:srgbClr val="1A2634"/>
                 </a:solidFill>
               </a:defRPr>
             </a:pPr>
             <a:r>
               <a:rPr sz="1200">
                 <a:solidFill>
-                  <a:srgbClr val="172232"/>
-                </a:solidFill>
-              </a:rPr>
-              <a:t>Reviewer view: Retain the deterministic issue while keeping assurance bounded.</a:t>
+                  <a:srgbClr val="1A2634"/>
+                </a:solidFill>
+              </a:rPr>
+              <a:t>Review note: Design weakness: the control has no specification. Without red-flag definitions per process, monitoring frequency, population scope and an exception-handling route, two competent operators would monitor differently and neither could be shown to be wrong. Recommended adjustment: (1) define red-flag indicators for the three highest-value processes first - vendor master data changes, stock adjustments at depots, and payroll master changes, which is where the 2026 incidents actually clustered; (2) fix a monthly monitoring cycle with a named preparer and an independent reviewer; (3) produce a coverage report reconciling monitored population to the ERP transaction population; (4) route exceptions into the existing incident register so detection and response become one measured pipeline rather than two.</a:t>
             </a:r>
           </a:p>
         </p:txBody>
@@ -5996,7 +6146,7 @@
           <p:cNvPr id="11" name="">
             <a:extLst xmlns:a="http://schemas.openxmlformats.org/drawingml/2006/main">
               <a:ext uri="{FF2B5EF4-FFF2-40B4-BE49-F238E27FC236}">
-                <a16:creationId xmlns:a16="http://schemas.microsoft.com/office/drawing/2014/main" id="{8F5CFDA2-6B33-4F51-92DD-082AC10E32A2}"/>
+                <a16:creationId xmlns:a16="http://schemas.microsoft.com/office/drawing/2014/main" id="{BE85D750-F457-4E36-9146-B35BCB26A98A}"/>
               </a:ext>
             </a:extLst>
           </p:cNvPr>
@@ -6014,11 +6164,11 @@
             <a:avLst/>
           </a:prstGeom>
           <a:solidFill xmlns:a="http://schemas.openxmlformats.org/drawingml/2006/main">
-            <a:srgbClr val="C77B35"/>
+            <a:srgbClr val="C9A227"/>
           </a:solidFill>
           <a:ln xmlns:a="http://schemas.openxmlformats.org/drawingml/2006/main" w="0">
             <a:solidFill>
-              <a:srgbClr val="C77B35"/>
+              <a:srgbClr val="C9A227"/>
             </a:solidFill>
             <a:prstDash val="solid"/>
           </a:ln>
@@ -6029,7 +6179,7 @@
           <p:cNvPr id="12" name="">
             <a:extLst xmlns:a="http://schemas.openxmlformats.org/drawingml/2006/main">
               <a:ext uri="{FF2B5EF4-FFF2-40B4-BE49-F238E27FC236}">
-                <a16:creationId xmlns:a16="http://schemas.microsoft.com/office/drawing/2014/main" id="{3C25948F-72D4-4621-817A-335096859A96}"/>
+                <a16:creationId xmlns:a16="http://schemas.microsoft.com/office/drawing/2014/main" id="{7116291D-C3AC-4B19-B181-76487F8D0601}"/>
               </a:ext>
             </a:extLst>
           </p:cNvPr>
@@ -6069,7 +6219,7 @@
                   <a:srgbClr val="142F4C"/>
                 </a:solidFill>
               </a:rPr>
-              <a:t>Committee oversight does not yet evidence a complete fraud-risk cycle</a:t>
+              <a:t>decision</a:t>
             </a:r>
           </a:p>
         </p:txBody>
@@ -6079,7 +6229,7 @@
           <p:cNvPr id="13" name="">
             <a:extLst xmlns:a="http://schemas.openxmlformats.org/drawingml/2006/main">
               <a:ext uri="{FF2B5EF4-FFF2-40B4-BE49-F238E27FC236}">
-                <a16:creationId xmlns:a16="http://schemas.microsoft.com/office/drawing/2014/main" id="{E1F26368-C287-445F-A49A-7B0C79AE0692}"/>
+                <a16:creationId xmlns:a16="http://schemas.microsoft.com/office/drawing/2014/main" id="{10C2882C-008E-48F0-9835-BDE60776C041}"/>
               </a:ext>
             </a:extLst>
           </p:cNvPr>
@@ -6109,17 +6259,17 @@
             <a:pPr>
               <a:defRPr sz="1200">
                 <a:solidFill>
-                  <a:srgbClr val="5E7080"/>
+                  <a:srgbClr val="5A6B7C"/>
                 </a:solidFill>
               </a:defRPr>
             </a:pPr>
             <a:r>
               <a:rPr sz="1200">
                 <a:solidFill>
-                  <a:srgbClr val="5E7080"/>
-                </a:solidFill>
-              </a:rPr>
-              <a:t>Recorded: Self-reported position: No control exists</a:t>
+                  <a:srgbClr val="5A6B7C"/>
+                </a:solidFill>
+              </a:rPr>
+              <a:t>Recorded: Self-reported position retained unless separately evidenced.</a:t>
             </a:r>
           </a:p>
         </p:txBody>
@@ -6129,7 +6279,7 @@
           <p:cNvPr id="14" name="">
             <a:extLst xmlns:a="http://schemas.openxmlformats.org/drawingml/2006/main">
               <a:ext uri="{FF2B5EF4-FFF2-40B4-BE49-F238E27FC236}">
-                <a16:creationId xmlns:a16="http://schemas.microsoft.com/office/drawing/2014/main" id="{0045E5F6-2289-4342-A1F9-51A154ED6A5D}"/>
+                <a16:creationId xmlns:a16="http://schemas.microsoft.com/office/drawing/2014/main" id="{35F6E924-9C41-4873-906E-BF455DC9BE3B}"/>
               </a:ext>
             </a:extLst>
           </p:cNvPr>
@@ -6159,17 +6309,17 @@
             <a:pPr>
               <a:defRPr sz="1200">
                 <a:solidFill>
-                  <a:srgbClr val="172232"/>
+                  <a:srgbClr val="1A2634"/>
                 </a:solidFill>
               </a:defRPr>
             </a:pPr>
             <a:r>
               <a:rPr sz="1200">
                 <a:solidFill>
-                  <a:srgbClr val="172232"/>
-                </a:solidFill>
-              </a:rPr>
-              <a:t>Reviewer view: Retain the conclusion for the reviewed scope only.</a:t>
+                  <a:srgbClr val="1A2634"/>
+                </a:solidFill>
+              </a:rPr>
+              <a:t>Review note: Viable options considered. Option A - leave accountability with the Finance Director as the policy currently states. Trade-off: preserves the approved policy and needs no change control, but the Finance Director is already the escalation route for reported incidents, so the same executive would own both detection design and incident adjudication, which weakens independence. Option B - delegate detection design to the Financial Controller with quarterly Committee reporting. Trade-off: separates design from adjudication and uses an existing budgeted workstream; requires a minor policy amendment at the next review. Option C - outsource monitoring to an external provider. Trade-off: fastest route to coverage, but at this maturity Kestrel cannot yet specify what it wants monitored, so the provider would define the indicators and the organisation would not own them. Management decision: Option B accepted by the Finance Director on review. Owner: Financial Controller. Date: 30 November 2026 for the first quarterly report to the Committee.</a:t>
             </a:r>
           </a:p>
         </p:txBody>
@@ -6179,7 +6329,7 @@
           <p:cNvPr id="15" name="">
             <a:extLst xmlns:a="http://schemas.openxmlformats.org/drawingml/2006/main">
               <a:ext uri="{FF2B5EF4-FFF2-40B4-BE49-F238E27FC236}">
-                <a16:creationId xmlns:a16="http://schemas.microsoft.com/office/drawing/2014/main" id="{E90BFC1D-176D-4305-A5F1-80B707DFFE41}"/>
+                <a16:creationId xmlns:a16="http://schemas.microsoft.com/office/drawing/2014/main" id="{D96B0100-4D3E-47E4-8CC9-D34BC148584E}"/>
               </a:ext>
             </a:extLst>
           </p:cNvPr>
@@ -6197,11 +6347,11 @@
             <a:avLst/>
           </a:prstGeom>
           <a:solidFill xmlns:a="http://schemas.openxmlformats.org/drawingml/2006/main">
-            <a:srgbClr val="2D7C57"/>
+            <a:srgbClr val="1F6B4A"/>
           </a:solidFill>
           <a:ln xmlns:a="http://schemas.openxmlformats.org/drawingml/2006/main" w="0">
             <a:solidFill>
-              <a:srgbClr val="2D7C57"/>
+              <a:srgbClr val="1F6B4A"/>
             </a:solidFill>
             <a:prstDash val="solid"/>
           </a:ln>
@@ -6212,7 +6362,7 @@
           <p:cNvPr id="16" name="">
             <a:extLst xmlns:a="http://schemas.openxmlformats.org/drawingml/2006/main">
               <a:ext uri="{FF2B5EF4-FFF2-40B4-BE49-F238E27FC236}">
-                <a16:creationId xmlns:a16="http://schemas.microsoft.com/office/drawing/2014/main" id="{FC566423-278B-48AF-B501-BE45FD7CB601}"/>
+                <a16:creationId xmlns:a16="http://schemas.microsoft.com/office/drawing/2014/main" id="{3E25AC83-DF1B-4661-A2B2-83356F795CEA}"/>
               </a:ext>
             </a:extLst>
           </p:cNvPr>
@@ -6252,7 +6402,7 @@
                   <a:srgbClr val="142F4C"/>
                 </a:solidFill>
               </a:rPr>
-              <a:t>Detection tuning and alert ageing need a fixed management rhythm</a:t>
+              <a:t>finding</a:t>
             </a:r>
           </a:p>
         </p:txBody>
@@ -6262,7 +6412,7 @@
           <p:cNvPr id="17" name="">
             <a:extLst xmlns:a="http://schemas.openxmlformats.org/drawingml/2006/main">
               <a:ext uri="{FF2B5EF4-FFF2-40B4-BE49-F238E27FC236}">
-                <a16:creationId xmlns:a16="http://schemas.microsoft.com/office/drawing/2014/main" id="{3C08148D-BF8F-4855-95E8-AE08C2C1B55D}"/>
+                <a16:creationId xmlns:a16="http://schemas.microsoft.com/office/drawing/2014/main" id="{7F3CEB9B-4A16-4CF8-A205-109000ECB93A}"/>
               </a:ext>
             </a:extLst>
           </p:cNvPr>
@@ -6292,17 +6442,17 @@
             <a:pPr>
               <a:defRPr sz="1200">
                 <a:solidFill>
-                  <a:srgbClr val="5E7080"/>
+                  <a:srgbClr val="5A6B7C"/>
                 </a:solidFill>
               </a:defRPr>
             </a:pPr>
             <a:r>
               <a:rPr sz="1200">
                 <a:solidFill>
-                  <a:srgbClr val="5E7080"/>
-                </a:solidFill>
-              </a:rPr>
-              <a:t>Recorded: Self-reported position: No control exists</a:t>
+                  <a:srgbClr val="5A6B7C"/>
+                </a:solidFill>
+              </a:rPr>
+              <a:t>Recorded: Self-reported position retained unless separately evidenced.</a:t>
             </a:r>
           </a:p>
         </p:txBody>
@@ -6312,7 +6462,7 @@
           <p:cNvPr id="18" name="">
             <a:extLst xmlns:a="http://schemas.openxmlformats.org/drawingml/2006/main">
               <a:ext uri="{FF2B5EF4-FFF2-40B4-BE49-F238E27FC236}">
-                <a16:creationId xmlns:a16="http://schemas.microsoft.com/office/drawing/2014/main" id="{D35F8CAD-364A-4EFC-B5AA-5A804557B8DC}"/>
+                <a16:creationId xmlns:a16="http://schemas.microsoft.com/office/drawing/2014/main" id="{54BA229D-7332-4D10-AC9B-32582C6A3AE4}"/>
               </a:ext>
             </a:extLst>
           </p:cNvPr>
@@ -6342,17 +6492,17 @@
             <a:pPr>
               <a:defRPr sz="1200">
                 <a:solidFill>
-                  <a:srgbClr val="172232"/>
+                  <a:srgbClr val="1A2634"/>
                 </a:solidFill>
               </a:defRPr>
             </a:pPr>
             <a:r>
               <a:rPr sz="1200">
                 <a:solidFill>
-                  <a:srgbClr val="172232"/>
-                </a:solidFill>
-              </a:rPr>
-              <a:t>Reviewer view: Retain the deterministic issue while keeping assurance bounded.</a:t>
+                  <a:srgbClr val="1A2634"/>
+                </a:solidFill>
+              </a:rPr>
+              <a:t>Review note: Partially supported, and materially weaker than the self-assessed position. Kestrel asserts transaction and operational monitoring for unusual patterns. The evidence establishes that incidents are captured, investigated and closed, but does not establish that monitoring runs on a defined cycle over a defined population, and the policy contains no red-flag indicator definitions. The organisation is detecting fraud largely through people and after the fact, not through designed surveillance. Reviewed the 2026 incident register (six incidents, four sites) and KIS-POL-FRM-004 v3.1. Two of six incidents originated from data analytics or Internal Audit, which shows genuine proactive capability exists in pockets and should not be understated. However no monitoring output, population reconciliation, coverage report or indicator definition was produced for any period. Limitation: this conclusion rests on documentation only; no system walkthrough, ERP configuration review or re-performance over a transaction population was carried out. Adjusted interpretation: the self-assessed maturity for D4-Q01 overstates operating reality and should be read down one level pending indicator definitions and a first coverage report. Owner: Financial Controller. Due date: 30 November 2026. Management response: management accepts the gap and has linked it to the Q4 2026 ERP role remediation already scheduled for the Germiston segregation issue.</a:t>
             </a:r>
           </a:p>
         </p:txBody>
@@ -6362,7 +6512,7 @@
           <p:cNvPr id="19" name="">
             <a:extLst xmlns:a="http://schemas.openxmlformats.org/drawingml/2006/main">
               <a:ext uri="{FF2B5EF4-FFF2-40B4-BE49-F238E27FC236}">
-                <a16:creationId xmlns:a16="http://schemas.microsoft.com/office/drawing/2014/main" id="{8D156377-1E63-4994-9159-A55F925426DA}"/>
+                <a16:creationId xmlns:a16="http://schemas.microsoft.com/office/drawing/2014/main" id="{6805FD85-4A50-4664-8986-A30EA81C2FB1}"/>
               </a:ext>
             </a:extLst>
           </p:cNvPr>
@@ -6380,11 +6530,11 @@
             <a:avLst/>
           </a:prstGeom>
           <a:solidFill xmlns:a="http://schemas.openxmlformats.org/drawingml/2006/main">
-            <a:srgbClr val="C77B35"/>
+            <a:srgbClr val="C9A227"/>
           </a:solidFill>
           <a:ln xmlns:a="http://schemas.openxmlformats.org/drawingml/2006/main" w="0">
             <a:solidFill>
-              <a:srgbClr val="C77B35"/>
+              <a:srgbClr val="C9A227"/>
             </a:solidFill>
             <a:prstDash val="solid"/>
           </a:ln>
@@ -6395,7 +6545,7 @@
           <p:cNvPr id="20" name="">
             <a:extLst xmlns:a="http://schemas.openxmlformats.org/drawingml/2006/main">
               <a:ext uri="{FF2B5EF4-FFF2-40B4-BE49-F238E27FC236}">
-                <a16:creationId xmlns:a16="http://schemas.microsoft.com/office/drawing/2014/main" id="{D5A83B2E-C012-4A1D-A84E-DFD57894E7F2}"/>
+                <a16:creationId xmlns:a16="http://schemas.microsoft.com/office/drawing/2014/main" id="{03048AE6-CF98-4F9D-8293-BF547AF7DB2A}"/>
               </a:ext>
             </a:extLst>
           </p:cNvPr>
@@ -6435,7 +6585,7 @@
                   <a:srgbClr val="142F4C"/>
                 </a:solidFill>
               </a:rPr>
-              <a:t>Evidence review: Approved fraud risk management policy and committee terms</a:t>
+              <a:t>Fraud Detection Capability: The organisation monitors transactions or operational activity for unusual patterns, anomalies or red flags.</a:t>
             </a:r>
           </a:p>
         </p:txBody>
@@ -6445,7 +6595,7 @@
           <p:cNvPr id="21" name="">
             <a:extLst xmlns:a="http://schemas.openxmlformats.org/drawingml/2006/main">
               <a:ext uri="{FF2B5EF4-FFF2-40B4-BE49-F238E27FC236}">
-                <a16:creationId xmlns:a16="http://schemas.microsoft.com/office/drawing/2014/main" id="{51B86A56-78CD-4D04-9C3B-BF7F7520044B}"/>
+                <a16:creationId xmlns:a16="http://schemas.microsoft.com/office/drawing/2014/main" id="{24386B0C-B456-4F84-B620-481D8BBC2053}"/>
               </a:ext>
             </a:extLst>
           </p:cNvPr>
@@ -6475,17 +6625,17 @@
             <a:pPr>
               <a:defRPr sz="1200">
                 <a:solidFill>
-                  <a:srgbClr val="5E7080"/>
+                  <a:srgbClr val="5A6B7C"/>
                 </a:solidFill>
               </a:defRPr>
             </a:pPr>
             <a:r>
               <a:rPr sz="1200">
                 <a:solidFill>
-                  <a:srgbClr val="5E7080"/>
-                </a:solidFill>
-              </a:rPr>
-              <a:t>Recorded: Self-reported position retained unless separately evidenced.</a:t>
+                  <a:srgbClr val="5A6B7C"/>
+                </a:solidFill>
+              </a:rPr>
+              <a:t>Recorded: Self-reported position: Partially designed — Some elements exist, but implementation is incomplete, inconsistent or not evidenced.</a:t>
             </a:r>
           </a:p>
         </p:txBody>
@@ -6495,7 +6645,7 @@
           <p:cNvPr id="22" name="">
             <a:extLst xmlns:a="http://schemas.openxmlformats.org/drawingml/2006/main">
               <a:ext uri="{FF2B5EF4-FFF2-40B4-BE49-F238E27FC236}">
-                <a16:creationId xmlns:a16="http://schemas.microsoft.com/office/drawing/2014/main" id="{8F1D8307-E061-45D7-A992-7193265F01F8}"/>
+                <a16:creationId xmlns:a16="http://schemas.microsoft.com/office/drawing/2014/main" id="{122F9811-0301-453C-ABD7-4CF2D2D14CB9}"/>
               </a:ext>
             </a:extLst>
           </p:cNvPr>
@@ -6525,17 +6675,17 @@
             <a:pPr>
               <a:defRPr sz="1200">
                 <a:solidFill>
-                  <a:srgbClr val="172232"/>
+                  <a:srgbClr val="1A2634"/>
                 </a:solidFill>
               </a:defRPr>
             </a:pPr>
             <a:r>
               <a:rPr sz="1200">
                 <a:solidFill>
-                  <a:srgbClr val="172232"/>
-                </a:solidFill>
-              </a:rPr>
-              <a:t>Reviewer view: The reviewed artefact supports the stated scope.</a:t>
+                  <a:srgbClr val="1A2634"/>
+                </a:solidFill>
+              </a:rPr>
+              <a:t>Review note: The supplied information does not establish an unqualified conclusion for the recorded scope.</a:t>
             </a:r>
           </a:p>
         </p:txBody>
@@ -6543,7 +6693,7 @@
     </p:spTree>
     <p:extLst>
       <p:ext uri="{BB962C8B-B14F-4D97-AF65-F5344CB8AC3E}">
-        <p14:creationId xmlns:p14="http://schemas.microsoft.com/office/powerpoint/2010/main" val="938005233"/>
+        <p14:creationId xmlns:p14="http://schemas.microsoft.com/office/powerpoint/2010/main" val="1090361987"/>
       </p:ext>
     </p:extLst>
   </p:cSld>
@@ -6556,7 +6706,7 @@
     <p:bg>
       <p:bgPr>
         <a:solidFill xmlns:a="http://schemas.openxmlformats.org/drawingml/2006/main">
-          <a:srgbClr val="F7F4EE"/>
+          <a:srgbClr val="FBF9F5"/>
         </a:solidFill>
       </p:bgPr>
     </p:bg>
@@ -6574,7 +6724,7 @@
           <p:cNvPr id="32" name="">
             <a:extLst xmlns:a="http://schemas.openxmlformats.org/drawingml/2006/main">
               <a:ext uri="{FF2B5EF4-FFF2-40B4-BE49-F238E27FC236}">
-                <a16:creationId xmlns:a16="http://schemas.microsoft.com/office/drawing/2014/main" id="{22638CD4-3E4C-4EE9-B3E2-8EAC1C88FF88}"/>
+                <a16:creationId xmlns:a16="http://schemas.microsoft.com/office/drawing/2014/main" id="{26C5552C-C8B1-417A-91BF-490213BD3591}"/>
               </a:ext>
             </a:extLst>
           </p:cNvPr>
@@ -6604,14 +6754,14 @@
             <a:pPr>
               <a:defRPr sz="1050" b="1">
                 <a:solidFill>
-                  <a:srgbClr val="C77B35"/>
+                  <a:srgbClr val="C9A227"/>
                 </a:solidFill>
               </a:defRPr>
             </a:pPr>
             <a:r>
               <a:rPr sz="1050" b="1">
                 <a:solidFill>
-                  <a:srgbClr val="C77B35"/>
+                  <a:srgbClr val="C9A227"/>
                 </a:solidFill>
               </a:rPr>
               <a:t>COMPREHENSIVE REVIEW · 05</a:t>
@@ -6624,7 +6774,7 @@
           <p:cNvPr id="2" name="">
             <a:extLst xmlns:a="http://schemas.openxmlformats.org/drawingml/2006/main">
               <a:ext uri="{FF2B5EF4-FFF2-40B4-BE49-F238E27FC236}">
-                <a16:creationId xmlns:a16="http://schemas.microsoft.com/office/drawing/2014/main" id="{C107EEB0-8A3B-4011-9EC0-AD43DE8D5B2B}"/>
+                <a16:creationId xmlns:a16="http://schemas.microsoft.com/office/drawing/2014/main" id="{14E31863-C90B-4EEC-AB0C-966F07998C4C}"/>
               </a:ext>
             </a:extLst>
           </p:cNvPr>
@@ -6674,7 +6824,7 @@
           <p:cNvPr id="3" name="">
             <a:extLst xmlns:a="http://schemas.openxmlformats.org/drawingml/2006/main">
               <a:ext uri="{FF2B5EF4-FFF2-40B4-BE49-F238E27FC236}">
-                <a16:creationId xmlns:a16="http://schemas.microsoft.com/office/drawing/2014/main" id="{46C925E9-94CC-4442-8877-03F3573EDC78}"/>
+                <a16:creationId xmlns:a16="http://schemas.microsoft.com/office/drawing/2014/main" id="{9C49BD48-5D5B-4BEC-867E-B9A32D33A0D6}"/>
               </a:ext>
             </a:extLst>
           </p:cNvPr>
@@ -6704,14 +6854,14 @@
             <a:pPr>
               <a:defRPr sz="1350">
                 <a:solidFill>
-                  <a:srgbClr val="5E7080"/>
+                  <a:srgbClr val="5A6B7C"/>
                 </a:solidFill>
               </a:defRPr>
             </a:pPr>
             <a:r>
               <a:rPr sz="1350">
                 <a:solidFill>
-                  <a:srgbClr val="5E7080"/>
+                  <a:srgbClr val="5A6B7C"/>
                 </a:solidFill>
               </a:rPr>
               <a:t>Top risk pathways are shown as operating exposure, not as allegations.</a:t>
@@ -6724,7 +6874,7 @@
           <p:cNvPr id="4" name="">
             <a:extLst xmlns:a="http://schemas.openxmlformats.org/drawingml/2006/main">
               <a:ext uri="{FF2B5EF4-FFF2-40B4-BE49-F238E27FC236}">
-                <a16:creationId xmlns:a16="http://schemas.microsoft.com/office/drawing/2014/main" id="{C3144A9B-90E5-4335-A8D2-F033B5775D1D}"/>
+                <a16:creationId xmlns:a16="http://schemas.microsoft.com/office/drawing/2014/main" id="{AA0D9617-8785-42E3-8121-CD1BFD790430}"/>
               </a:ext>
             </a:extLst>
           </p:cNvPr>
@@ -6744,7 +6894,7 @@
           <a:noFill xmlns:a="http://schemas.openxmlformats.org/drawingml/2006/main"/>
           <a:ln xmlns:a="http://schemas.openxmlformats.org/drawingml/2006/main" w="9525">
             <a:solidFill>
-              <a:srgbClr val="D8E0E5"/>
+              <a:srgbClr val="D9E1E7"/>
             </a:solidFill>
             <a:prstDash val="solid"/>
           </a:ln>
@@ -6755,7 +6905,7 @@
           <p:cNvPr id="5" name="">
             <a:extLst xmlns:a="http://schemas.openxmlformats.org/drawingml/2006/main">
               <a:ext uri="{FF2B5EF4-FFF2-40B4-BE49-F238E27FC236}">
-                <a16:creationId xmlns:a16="http://schemas.microsoft.com/office/drawing/2014/main" id="{0A9B8E5A-D955-4317-9C31-72F0E59B7884}"/>
+                <a16:creationId xmlns:a16="http://schemas.microsoft.com/office/drawing/2014/main" id="{49892A40-54D1-4A08-A3C8-E9586D9A58DC}"/>
               </a:ext>
             </a:extLst>
           </p:cNvPr>
@@ -6785,14 +6935,14 @@
             <a:pPr>
               <a:defRPr sz="975">
                 <a:solidFill>
-                  <a:srgbClr val="5E7080"/>
+                  <a:srgbClr val="5A6B7C"/>
                 </a:solidFill>
               </a:defRPr>
             </a:pPr>
             <a:r>
               <a:rPr sz="975">
                 <a:solidFill>
-                  <a:srgbClr val="5E7080"/>
+                  <a:srgbClr val="5A6B7C"/>
                 </a:solidFill>
               </a:rPr>
               <a:t>MK Fraud Readiness · Comprehensive</a:t>
@@ -6805,7 +6955,7 @@
           <p:cNvPr id="6" name="">
             <a:extLst xmlns:a="http://schemas.openxmlformats.org/drawingml/2006/main">
               <a:ext uri="{FF2B5EF4-FFF2-40B4-BE49-F238E27FC236}">
-                <a16:creationId xmlns:a16="http://schemas.microsoft.com/office/drawing/2014/main" id="{1AA38FAB-1F24-462A-8875-29BB63945FFE}"/>
+                <a16:creationId xmlns:a16="http://schemas.microsoft.com/office/drawing/2014/main" id="{6920E218-253B-40A5-B731-E7294553757D}"/>
               </a:ext>
             </a:extLst>
           </p:cNvPr>
@@ -6835,14 +6985,14 @@
             <a:pPr algn="r">
               <a:defRPr sz="975">
                 <a:solidFill>
-                  <a:srgbClr val="5E7080"/>
+                  <a:srgbClr val="5A6B7C"/>
                 </a:solidFill>
               </a:defRPr>
             </a:pPr>
             <a:r>
               <a:rPr sz="975">
                 <a:solidFill>
-                  <a:srgbClr val="5E7080"/>
+                  <a:srgbClr val="5A6B7C"/>
                 </a:solidFill>
               </a:rPr>
               <a:t>05 / 10</a:t>
@@ -6855,7 +7005,7 @@
           <p:cNvPr id="7" name="">
             <a:extLst xmlns:a="http://schemas.openxmlformats.org/drawingml/2006/main">
               <a:ext uri="{FF2B5EF4-FFF2-40B4-BE49-F238E27FC236}">
-                <a16:creationId xmlns:a16="http://schemas.microsoft.com/office/drawing/2014/main" id="{9F7D8229-3F80-49F5-88C2-69AC99AF1EC5}"/>
+                <a16:creationId xmlns:a16="http://schemas.microsoft.com/office/drawing/2014/main" id="{5FE99F72-53EB-4FC1-A921-2FB4C7B4C9E5}"/>
               </a:ext>
             </a:extLst>
           </p:cNvPr>
@@ -6895,7 +7045,7 @@
                   <a:srgbClr val="142F4C"/>
                 </a:solidFill>
               </a:rPr>
-              <a:t>A supplier bank change may redirect a legitimate payment</a:t>
+              <a:t>Unauthorised system access enables transaction or record manipulation</a:t>
             </a:r>
           </a:p>
         </p:txBody>
@@ -6905,7 +7055,7 @@
           <p:cNvPr id="8" name="">
             <a:extLst xmlns:a="http://schemas.openxmlformats.org/drawingml/2006/main">
               <a:ext uri="{FF2B5EF4-FFF2-40B4-BE49-F238E27FC236}">
-                <a16:creationId xmlns:a16="http://schemas.microsoft.com/office/drawing/2014/main" id="{1210502E-CABD-42EE-BB9C-8D84AD77F423}"/>
+                <a16:creationId xmlns:a16="http://schemas.microsoft.com/office/drawing/2014/main" id="{BAEF42BA-836C-4EA0-9AD1-D1325379B3A9}"/>
               </a:ext>
             </a:extLst>
           </p:cNvPr>
@@ -6923,11 +7073,11 @@
             <a:avLst/>
           </a:prstGeom>
           <a:solidFill xmlns:a="http://schemas.openxmlformats.org/drawingml/2006/main">
-            <a:srgbClr val="E4EAEE"/>
+            <a:srgbClr val="D9E1E7"/>
           </a:solidFill>
           <a:ln xmlns:a="http://schemas.openxmlformats.org/drawingml/2006/main" w="0">
             <a:solidFill>
-              <a:srgbClr val="E4EAEE"/>
+              <a:srgbClr val="D9E1E7"/>
             </a:solidFill>
             <a:prstDash val="solid"/>
           </a:ln>
@@ -6938,7 +7088,7 @@
           <p:cNvPr id="9" name="">
             <a:extLst xmlns:a="http://schemas.openxmlformats.org/drawingml/2006/main">
               <a:ext uri="{FF2B5EF4-FFF2-40B4-BE49-F238E27FC236}">
-                <a16:creationId xmlns:a16="http://schemas.microsoft.com/office/drawing/2014/main" id="{59B492A1-F12E-4885-96EA-E2258904A8EF}"/>
+                <a16:creationId xmlns:a16="http://schemas.microsoft.com/office/drawing/2014/main" id="{FE1B0E48-B690-4E8D-B9D3-14DEE0FEF013}"/>
               </a:ext>
             </a:extLst>
           </p:cNvPr>
@@ -6956,11 +7106,11 @@
             <a:avLst/>
           </a:prstGeom>
           <a:solidFill xmlns:a="http://schemas.openxmlformats.org/drawingml/2006/main">
-            <a:srgbClr val="A93E38"/>
+            <a:srgbClr val="A32020"/>
           </a:solidFill>
           <a:ln xmlns:a="http://schemas.openxmlformats.org/drawingml/2006/main" w="0">
             <a:solidFill>
-              <a:srgbClr val="A93E38"/>
+              <a:srgbClr val="A32020"/>
             </a:solidFill>
             <a:prstDash val="solid"/>
           </a:ln>
@@ -6971,7 +7121,7 @@
           <p:cNvPr id="10" name="">
             <a:extLst xmlns:a="http://schemas.openxmlformats.org/drawingml/2006/main">
               <a:ext uri="{FF2B5EF4-FFF2-40B4-BE49-F238E27FC236}">
-                <a16:creationId xmlns:a16="http://schemas.microsoft.com/office/drawing/2014/main" id="{61BC7966-57CD-4D2F-91BA-F6F593D377C9}"/>
+                <a16:creationId xmlns:a16="http://schemas.microsoft.com/office/drawing/2014/main" id="{991E57BF-880B-42FD-BD45-21C48C4D5F77}"/>
               </a:ext>
             </a:extLst>
           </p:cNvPr>
@@ -7001,14 +7151,14 @@
             <a:pPr>
               <a:defRPr sz="1200" b="1">
                 <a:solidFill>
-                  <a:srgbClr val="A93E38"/>
+                  <a:srgbClr val="A32020"/>
                 </a:solidFill>
               </a:defRPr>
             </a:pPr>
             <a:r>
               <a:rPr sz="1200" b="1">
                 <a:solidFill>
-                  <a:srgbClr val="A93E38"/>
+                  <a:srgbClr val="A32020"/>
                 </a:solidFill>
               </a:rPr>
               <a:t>Critical</a:t>
@@ -7021,7 +7171,7 @@
           <p:cNvPr id="11" name="">
             <a:extLst xmlns:a="http://schemas.openxmlformats.org/drawingml/2006/main">
               <a:ext uri="{FF2B5EF4-FFF2-40B4-BE49-F238E27FC236}">
-                <a16:creationId xmlns:a16="http://schemas.microsoft.com/office/drawing/2014/main" id="{B50B1D5E-D8F4-47DB-885D-4E8C57C3B847}"/>
+                <a16:creationId xmlns:a16="http://schemas.microsoft.com/office/drawing/2014/main" id="{C31ACF55-C0CA-4F7F-A622-D93CFE919BBC}"/>
               </a:ext>
             </a:extLst>
           </p:cNvPr>
@@ -7051,17 +7201,17 @@
             <a:pPr>
               <a:defRPr sz="1050">
                 <a:solidFill>
-                  <a:srgbClr val="5E7080"/>
+                  <a:srgbClr val="5A6B7C"/>
                 </a:solidFill>
               </a:defRPr>
             </a:pPr>
             <a:r>
               <a:rPr sz="1050">
                 <a:solidFill>
-                  <a:srgbClr val="5E7080"/>
-                </a:solidFill>
-              </a:rPr>
-              <a:t>Implement a complete role-based access review.</a:t>
+                  <a:srgbClr val="5A6B7C"/>
+                </a:solidFill>
+              </a:rPr>
+              <a:t>IT Security maintains a complete privileged-account register, links each human and service account to an owner and approved justification, enforces separate named admin identities and MFA, records privileged sessions, and sends the full population quarterly to system owners and Risk for independent keep/remove certification; removals close within 24 hours for leavers and five business days otherwise.</a:t>
             </a:r>
           </a:p>
         </p:txBody>
@@ -7071,7 +7221,7 @@
           <p:cNvPr id="12" name="">
             <a:extLst xmlns:a="http://schemas.openxmlformats.org/drawingml/2006/main">
               <a:ext uri="{FF2B5EF4-FFF2-40B4-BE49-F238E27FC236}">
-                <a16:creationId xmlns:a16="http://schemas.microsoft.com/office/drawing/2014/main" id="{BD62B8BE-7352-40A1-9D9F-43F97E6DAF7F}"/>
+                <a16:creationId xmlns:a16="http://schemas.microsoft.com/office/drawing/2014/main" id="{88669A93-380A-45A3-A4EE-9E9D4948FD61}"/>
               </a:ext>
             </a:extLst>
           </p:cNvPr>
@@ -7111,7 +7261,7 @@
                   <a:srgbClr val="142F4C"/>
                 </a:solidFill>
               </a:rPr>
-              <a:t>Privileged access may enable unauthorised record changes</a:t>
+              <a:t>Fraud Detection Capability control effectiveness risk</a:t>
             </a:r>
           </a:p>
         </p:txBody>
@@ -7121,7 +7271,7 @@
           <p:cNvPr id="13" name="">
             <a:extLst xmlns:a="http://schemas.openxmlformats.org/drawingml/2006/main">
               <a:ext uri="{FF2B5EF4-FFF2-40B4-BE49-F238E27FC236}">
-                <a16:creationId xmlns:a16="http://schemas.microsoft.com/office/drawing/2014/main" id="{7AE976F8-B154-418A-A997-31DB22CE76A7}"/>
+                <a16:creationId xmlns:a16="http://schemas.microsoft.com/office/drawing/2014/main" id="{D24C32ED-82AD-45FD-9E57-DCD600F51CD6}"/>
               </a:ext>
             </a:extLst>
           </p:cNvPr>
@@ -7139,11 +7289,11 @@
             <a:avLst/>
           </a:prstGeom>
           <a:solidFill xmlns:a="http://schemas.openxmlformats.org/drawingml/2006/main">
-            <a:srgbClr val="E4EAEE"/>
+            <a:srgbClr val="D9E1E7"/>
           </a:solidFill>
           <a:ln xmlns:a="http://schemas.openxmlformats.org/drawingml/2006/main" w="0">
             <a:solidFill>
-              <a:srgbClr val="E4EAEE"/>
+              <a:srgbClr val="D9E1E7"/>
             </a:solidFill>
             <a:prstDash val="solid"/>
           </a:ln>
@@ -7154,7 +7304,7 @@
           <p:cNvPr id="14" name="">
             <a:extLst xmlns:a="http://schemas.openxmlformats.org/drawingml/2006/main">
               <a:ext uri="{FF2B5EF4-FFF2-40B4-BE49-F238E27FC236}">
-                <a16:creationId xmlns:a16="http://schemas.microsoft.com/office/drawing/2014/main" id="{21ADC740-4321-42E5-86E4-4824FBEF3B23}"/>
+                <a16:creationId xmlns:a16="http://schemas.microsoft.com/office/drawing/2014/main" id="{45FDECEB-3D26-410B-89B1-C3209B72F916}"/>
               </a:ext>
             </a:extLst>
           </p:cNvPr>
@@ -7172,11 +7322,11 @@
             <a:avLst/>
           </a:prstGeom>
           <a:solidFill xmlns:a="http://schemas.openxmlformats.org/drawingml/2006/main">
-            <a:srgbClr val="A93E38"/>
+            <a:srgbClr val="A32020"/>
           </a:solidFill>
           <a:ln xmlns:a="http://schemas.openxmlformats.org/drawingml/2006/main" w="0">
             <a:solidFill>
-              <a:srgbClr val="A93E38"/>
+              <a:srgbClr val="A32020"/>
             </a:solidFill>
             <a:prstDash val="solid"/>
           </a:ln>
@@ -7187,7 +7337,7 @@
           <p:cNvPr id="15" name="">
             <a:extLst xmlns:a="http://schemas.openxmlformats.org/drawingml/2006/main">
               <a:ext uri="{FF2B5EF4-FFF2-40B4-BE49-F238E27FC236}">
-                <a16:creationId xmlns:a16="http://schemas.microsoft.com/office/drawing/2014/main" id="{F3B6A9C5-F62A-49A1-826C-DDEA68D6E43D}"/>
+                <a16:creationId xmlns:a16="http://schemas.microsoft.com/office/drawing/2014/main" id="{AA941748-6E3F-4389-9180-CF4D9DA8FDFE}"/>
               </a:ext>
             </a:extLst>
           </p:cNvPr>
@@ -7217,14 +7367,14 @@
             <a:pPr>
               <a:defRPr sz="1200" b="1">
                 <a:solidFill>
-                  <a:srgbClr val="A93E38"/>
+                  <a:srgbClr val="A32020"/>
                 </a:solidFill>
               </a:defRPr>
             </a:pPr>
             <a:r>
               <a:rPr sz="1200" b="1">
                 <a:solidFill>
-                  <a:srgbClr val="A93E38"/>
+                  <a:srgbClr val="A32020"/>
                 </a:solidFill>
               </a:rPr>
               <a:t>Critical</a:t>
@@ -7237,7 +7387,7 @@
           <p:cNvPr id="16" name="">
             <a:extLst xmlns:a="http://schemas.openxmlformats.org/drawingml/2006/main">
               <a:ext uri="{FF2B5EF4-FFF2-40B4-BE49-F238E27FC236}">
-                <a16:creationId xmlns:a16="http://schemas.microsoft.com/office/drawing/2014/main" id="{EFD0472F-A954-45A5-80BE-71A6FF23642E}"/>
+                <a16:creationId xmlns:a16="http://schemas.microsoft.com/office/drawing/2014/main" id="{F832D516-4437-4D6B-B31A-4D9A61B2797F}"/>
               </a:ext>
             </a:extLst>
           </p:cNvPr>
@@ -7267,17 +7417,17 @@
             <a:pPr>
               <a:defRPr sz="1050">
                 <a:solidFill>
-                  <a:srgbClr val="5E7080"/>
+                  <a:srgbClr val="5A6B7C"/>
                 </a:solidFill>
               </a:defRPr>
             </a:pPr>
             <a:r>
               <a:rPr sz="1050">
                 <a:solidFill>
-                  <a:srgbClr val="5E7080"/>
-                </a:solidFill>
-              </a:rPr>
-              <a:t>Implement a complete role-based access review.</a:t>
+                  <a:srgbClr val="5A6B7C"/>
+                </a:solidFill>
+              </a:rPr>
+              <a:t>The monitoring owner must define red-flag indicators per material process — duplicate payments, round-value patterns, out-of-hours activity, unusual volume by user, adjustments reversing prior entries, and supplier or customer concentration — run them against the complete transaction population on a set rhythm, and route output into the exception queue with named reviewers and SLAs; coverage against the process fraud maps is reported to the fraud forum.</a:t>
             </a:r>
           </a:p>
         </p:txBody>
@@ -7287,7 +7437,7 @@
           <p:cNvPr id="17" name="">
             <a:extLst xmlns:a="http://schemas.openxmlformats.org/drawingml/2006/main">
               <a:ext uri="{FF2B5EF4-FFF2-40B4-BE49-F238E27FC236}">
-                <a16:creationId xmlns:a16="http://schemas.microsoft.com/office/drawing/2014/main" id="{C7435C66-6185-4D08-AF71-0E23A08E0D77}"/>
+                <a16:creationId xmlns:a16="http://schemas.microsoft.com/office/drawing/2014/main" id="{1CE9FB9F-AD55-4BA2-BDFE-35AEF6B6E063}"/>
               </a:ext>
             </a:extLst>
           </p:cNvPr>
@@ -7327,7 +7477,7 @@
                   <a:srgbClr val="142F4C"/>
                 </a:solidFill>
               </a:rPr>
-              <a:t>Fraud-risk decisions may remain unchallenged</a:t>
+              <a:t>Continuous Improvement and Fraud Risk Monitoring control effectiveness risk</a:t>
             </a:r>
           </a:p>
         </p:txBody>
@@ -7337,7 +7487,7 @@
           <p:cNvPr id="18" name="">
             <a:extLst xmlns:a="http://schemas.openxmlformats.org/drawingml/2006/main">
               <a:ext uri="{FF2B5EF4-FFF2-40B4-BE49-F238E27FC236}">
-                <a16:creationId xmlns:a16="http://schemas.microsoft.com/office/drawing/2014/main" id="{1C009170-F475-4B84-90B7-C3656BA0CE55}"/>
+                <a16:creationId xmlns:a16="http://schemas.microsoft.com/office/drawing/2014/main" id="{139D2D2B-5E4A-4FB8-8496-A9B7CFE52147}"/>
               </a:ext>
             </a:extLst>
           </p:cNvPr>
@@ -7355,11 +7505,11 @@
             <a:avLst/>
           </a:prstGeom>
           <a:solidFill xmlns:a="http://schemas.openxmlformats.org/drawingml/2006/main">
-            <a:srgbClr val="E4EAEE"/>
+            <a:srgbClr val="D9E1E7"/>
           </a:solidFill>
           <a:ln xmlns:a="http://schemas.openxmlformats.org/drawingml/2006/main" w="0">
             <a:solidFill>
-              <a:srgbClr val="E4EAEE"/>
+              <a:srgbClr val="D9E1E7"/>
             </a:solidFill>
             <a:prstDash val="solid"/>
           </a:ln>
@@ -7370,7 +7520,7 @@
           <p:cNvPr id="19" name="">
             <a:extLst xmlns:a="http://schemas.openxmlformats.org/drawingml/2006/main">
               <a:ext uri="{FF2B5EF4-FFF2-40B4-BE49-F238E27FC236}">
-                <a16:creationId xmlns:a16="http://schemas.microsoft.com/office/drawing/2014/main" id="{FAF9A0BE-3145-45BD-8781-E2904D079B27}"/>
+                <a16:creationId xmlns:a16="http://schemas.microsoft.com/office/drawing/2014/main" id="{7EADC3D6-9E8C-4A7A-8676-7B919147725D}"/>
               </a:ext>
             </a:extLst>
           </p:cNvPr>
@@ -7382,17 +7532,17 @@
         <p:spPr>
           <a:xfrm xmlns:a="http://schemas.openxmlformats.org/drawingml/2006/main">
             <a:off x="4810125" y="3390900"/>
-            <a:ext cx="2476500" cy="190500"/>
+            <a:ext cx="3429000" cy="190500"/>
           </a:xfrm>
           <a:prstGeom xmlns:a="http://schemas.openxmlformats.org/drawingml/2006/main" prst="rect">
             <a:avLst/>
           </a:prstGeom>
           <a:solidFill xmlns:a="http://schemas.openxmlformats.org/drawingml/2006/main">
-            <a:srgbClr val="C77B35"/>
+            <a:srgbClr val="A32020"/>
           </a:solidFill>
           <a:ln xmlns:a="http://schemas.openxmlformats.org/drawingml/2006/main" w="0">
             <a:solidFill>
-              <a:srgbClr val="C77B35"/>
+              <a:srgbClr val="A32020"/>
             </a:solidFill>
             <a:prstDash val="solid"/>
           </a:ln>
@@ -7403,7 +7553,7 @@
           <p:cNvPr id="20" name="">
             <a:extLst xmlns:a="http://schemas.openxmlformats.org/drawingml/2006/main">
               <a:ext uri="{FF2B5EF4-FFF2-40B4-BE49-F238E27FC236}">
-                <a16:creationId xmlns:a16="http://schemas.microsoft.com/office/drawing/2014/main" id="{63956546-8A13-4C98-97CB-3E15ACA17370}"/>
+                <a16:creationId xmlns:a16="http://schemas.microsoft.com/office/drawing/2014/main" id="{47901C24-8EF8-4F09-AAA8-A6B9DEC21EBB}"/>
               </a:ext>
             </a:extLst>
           </p:cNvPr>
@@ -7433,17 +7583,17 @@
             <a:pPr>
               <a:defRPr sz="1200" b="1">
                 <a:solidFill>
-                  <a:srgbClr val="C77B35"/>
+                  <a:srgbClr val="A32020"/>
                 </a:solidFill>
               </a:defRPr>
             </a:pPr>
             <a:r>
               <a:rPr sz="1200" b="1">
                 <a:solidFill>
-                  <a:srgbClr val="C77B35"/>
-                </a:solidFill>
-              </a:rPr>
-              <a:t>High</a:t>
+                  <a:srgbClr val="A32020"/>
+                </a:solidFill>
+              </a:rPr>
+              <a:t>Critical</a:t>
             </a:r>
           </a:p>
         </p:txBody>
@@ -7453,7 +7603,7 @@
           <p:cNvPr id="21" name="">
             <a:extLst xmlns:a="http://schemas.openxmlformats.org/drawingml/2006/main">
               <a:ext uri="{FF2B5EF4-FFF2-40B4-BE49-F238E27FC236}">
-                <a16:creationId xmlns:a16="http://schemas.microsoft.com/office/drawing/2014/main" id="{9B3913E6-5E5E-479F-95E3-74D54491FEB3}"/>
+                <a16:creationId xmlns:a16="http://schemas.microsoft.com/office/drawing/2014/main" id="{DD56A60F-7FD6-43E9-A721-2295B20CB481}"/>
               </a:ext>
             </a:extLst>
           </p:cNvPr>
@@ -7483,17 +7633,17 @@
             <a:pPr>
               <a:defRPr sz="1050">
                 <a:solidFill>
-                  <a:srgbClr val="5E7080"/>
+                  <a:srgbClr val="5A6B7C"/>
                 </a:solidFill>
               </a:defRPr>
             </a:pPr>
             <a:r>
               <a:rPr sz="1050">
                 <a:solidFill>
-                  <a:srgbClr val="5E7080"/>
-                </a:solidFill>
-              </a:rPr>
-              <a:t>Implement a complete role-based access review.</a:t>
+                  <a:srgbClr val="5A6B7C"/>
+                </a:solidFill>
+              </a:rPr>
+              <a:t>The Head of Risk must run a scheduled review that revisits the fraud risk assessment for continued relevance, confirms for each key control that it still has a named owner and is still operating by sampling recent evidence rather than accepting attestation, records any control that has lapsed or degraded, and reports a consolidated risk and control position to the governing body with owned remediation actions and due dates.</a:t>
             </a:r>
           </a:p>
         </p:txBody>
@@ -7503,7 +7653,7 @@
           <p:cNvPr id="22" name="">
             <a:extLst xmlns:a="http://schemas.openxmlformats.org/drawingml/2006/main">
               <a:ext uri="{FF2B5EF4-FFF2-40B4-BE49-F238E27FC236}">
-                <a16:creationId xmlns:a16="http://schemas.microsoft.com/office/drawing/2014/main" id="{1A479DC5-81AF-435B-8D9B-9FB2A8E22F99}"/>
+                <a16:creationId xmlns:a16="http://schemas.microsoft.com/office/drawing/2014/main" id="{A4911884-1049-43BB-A321-9D15EC215030}"/>
               </a:ext>
             </a:extLst>
           </p:cNvPr>
@@ -7543,7 +7693,7 @@
                   <a:srgbClr val="142F4C"/>
                 </a:solidFill>
               </a:rPr>
-              <a:t>Stale detection rules may delay an alert</a:t>
+              <a:t>Fraud Risk Identification control effectiveness risk</a:t>
             </a:r>
           </a:p>
         </p:txBody>
@@ -7553,7 +7703,7 @@
           <p:cNvPr id="23" name="">
             <a:extLst xmlns:a="http://schemas.openxmlformats.org/drawingml/2006/main">
               <a:ext uri="{FF2B5EF4-FFF2-40B4-BE49-F238E27FC236}">
-                <a16:creationId xmlns:a16="http://schemas.microsoft.com/office/drawing/2014/main" id="{B1A152A7-DD42-4AA1-8999-41DF54519CB2}"/>
+                <a16:creationId xmlns:a16="http://schemas.microsoft.com/office/drawing/2014/main" id="{7B63502B-3B77-41B0-B2C5-EF7781FE10A9}"/>
               </a:ext>
             </a:extLst>
           </p:cNvPr>
@@ -7571,11 +7721,11 @@
             <a:avLst/>
           </a:prstGeom>
           <a:solidFill xmlns:a="http://schemas.openxmlformats.org/drawingml/2006/main">
-            <a:srgbClr val="E4EAEE"/>
+            <a:srgbClr val="D9E1E7"/>
           </a:solidFill>
           <a:ln xmlns:a="http://schemas.openxmlformats.org/drawingml/2006/main" w="0">
             <a:solidFill>
-              <a:srgbClr val="E4EAEE"/>
+              <a:srgbClr val="D9E1E7"/>
             </a:solidFill>
             <a:prstDash val="solid"/>
           </a:ln>
@@ -7586,7 +7736,7 @@
           <p:cNvPr id="24" name="">
             <a:extLst xmlns:a="http://schemas.openxmlformats.org/drawingml/2006/main">
               <a:ext uri="{FF2B5EF4-FFF2-40B4-BE49-F238E27FC236}">
-                <a16:creationId xmlns:a16="http://schemas.microsoft.com/office/drawing/2014/main" id="{076AA508-BE06-4C31-AA1D-5C526AB51BDE}"/>
+                <a16:creationId xmlns:a16="http://schemas.microsoft.com/office/drawing/2014/main" id="{99DD28A9-7DD7-4BAD-AE16-9715C778D5DE}"/>
               </a:ext>
             </a:extLst>
           </p:cNvPr>
@@ -7598,17 +7748,17 @@
         <p:spPr>
           <a:xfrm xmlns:a="http://schemas.openxmlformats.org/drawingml/2006/main">
             <a:off x="4810125" y="4057650"/>
-            <a:ext cx="2476500" cy="190500"/>
+            <a:ext cx="3429000" cy="190500"/>
           </a:xfrm>
           <a:prstGeom xmlns:a="http://schemas.openxmlformats.org/drawingml/2006/main" prst="rect">
             <a:avLst/>
           </a:prstGeom>
           <a:solidFill xmlns:a="http://schemas.openxmlformats.org/drawingml/2006/main">
-            <a:srgbClr val="C77B35"/>
+            <a:srgbClr val="A32020"/>
           </a:solidFill>
           <a:ln xmlns:a="http://schemas.openxmlformats.org/drawingml/2006/main" w="0">
             <a:solidFill>
-              <a:srgbClr val="C77B35"/>
+              <a:srgbClr val="A32020"/>
             </a:solidFill>
             <a:prstDash val="solid"/>
           </a:ln>
@@ -7619,7 +7769,7 @@
           <p:cNvPr id="25" name="">
             <a:extLst xmlns:a="http://schemas.openxmlformats.org/drawingml/2006/main">
               <a:ext uri="{FF2B5EF4-FFF2-40B4-BE49-F238E27FC236}">
-                <a16:creationId xmlns:a16="http://schemas.microsoft.com/office/drawing/2014/main" id="{362A4429-1C94-41B6-919B-6C728474AE6A}"/>
+                <a16:creationId xmlns:a16="http://schemas.microsoft.com/office/drawing/2014/main" id="{A5AF81CE-4ED1-4764-914D-FCF80FD14597}"/>
               </a:ext>
             </a:extLst>
           </p:cNvPr>
@@ -7649,17 +7799,17 @@
             <a:pPr>
               <a:defRPr sz="1200" b="1">
                 <a:solidFill>
-                  <a:srgbClr val="C77B35"/>
+                  <a:srgbClr val="A32020"/>
                 </a:solidFill>
               </a:defRPr>
             </a:pPr>
             <a:r>
               <a:rPr sz="1200" b="1">
                 <a:solidFill>
-                  <a:srgbClr val="C77B35"/>
-                </a:solidFill>
-              </a:rPr>
-              <a:t>High</a:t>
+                  <a:srgbClr val="A32020"/>
+                </a:solidFill>
+              </a:rPr>
+              <a:t>Critical</a:t>
             </a:r>
           </a:p>
         </p:txBody>
@@ -7669,7 +7819,7 @@
           <p:cNvPr id="26" name="">
             <a:extLst xmlns:a="http://schemas.openxmlformats.org/drawingml/2006/main">
               <a:ext uri="{FF2B5EF4-FFF2-40B4-BE49-F238E27FC236}">
-                <a16:creationId xmlns:a16="http://schemas.microsoft.com/office/drawing/2014/main" id="{1623DDBB-7EB6-4F59-AAAA-7BCF0358A859}"/>
+                <a16:creationId xmlns:a16="http://schemas.microsoft.com/office/drawing/2014/main" id="{7126832C-207E-47AC-9082-F3345989DB1E}"/>
               </a:ext>
             </a:extLst>
           </p:cNvPr>
@@ -7699,17 +7849,17 @@
             <a:pPr>
               <a:defRPr sz="1050">
                 <a:solidFill>
-                  <a:srgbClr val="5E7080"/>
+                  <a:srgbClr val="5A6B7C"/>
                 </a:solidFill>
               </a:defRPr>
             </a:pPr>
             <a:r>
               <a:rPr sz="1050">
                 <a:solidFill>
-                  <a:srgbClr val="5E7080"/>
-                </a:solidFill>
-              </a:rPr>
-              <a:t>Implement a complete role-based access review.</a:t>
+                  <a:srgbClr val="5A6B7C"/>
+                </a:solidFill>
+              </a:rPr>
+              <a:t>The Head of Risk must run a documented fraud risk assessment at least every two years using a repeatable method: scope the material processes and channels, identify fraud scenarios per process with the roles able to execute them, rate likelihood and impact before and after existing controls, name a treatment owner and due date for every unacceptable residual risk, and obtain governing-body approval of the plan; assessment date, participants and method are retained.</a:t>
             </a:r>
           </a:p>
         </p:txBody>
@@ -7719,7 +7869,7 @@
           <p:cNvPr id="27" name="">
             <a:extLst xmlns:a="http://schemas.openxmlformats.org/drawingml/2006/main">
               <a:ext uri="{FF2B5EF4-FFF2-40B4-BE49-F238E27FC236}">
-                <a16:creationId xmlns:a16="http://schemas.microsoft.com/office/drawing/2014/main" id="{BE313233-D681-479B-BB26-1BBADFFBDD29}"/>
+                <a16:creationId xmlns:a16="http://schemas.microsoft.com/office/drawing/2014/main" id="{CD28982B-E6AE-4FB1-B7BB-1093CDD9FCC2}"/>
               </a:ext>
             </a:extLst>
           </p:cNvPr>
@@ -7759,7 +7909,7 @@
                   <a:srgbClr val="142F4C"/>
                 </a:solidFill>
               </a:rPr>
-              <a:t>Incident lessons may not reduce repeat exposure</a:t>
+              <a:t>Digital and Identity Fraud Risk control effectiveness risk</a:t>
             </a:r>
           </a:p>
         </p:txBody>
@@ -7769,7 +7919,7 @@
           <p:cNvPr id="28" name="">
             <a:extLst xmlns:a="http://schemas.openxmlformats.org/drawingml/2006/main">
               <a:ext uri="{FF2B5EF4-FFF2-40B4-BE49-F238E27FC236}">
-                <a16:creationId xmlns:a16="http://schemas.microsoft.com/office/drawing/2014/main" id="{74EFB5A4-410D-48B9-A77C-42D9DEC344E6}"/>
+                <a16:creationId xmlns:a16="http://schemas.microsoft.com/office/drawing/2014/main" id="{D1C66875-7D3B-403B-A32B-72B703DB74EC}"/>
               </a:ext>
             </a:extLst>
           </p:cNvPr>
@@ -7787,11 +7937,11 @@
             <a:avLst/>
           </a:prstGeom>
           <a:solidFill xmlns:a="http://schemas.openxmlformats.org/drawingml/2006/main">
-            <a:srgbClr val="E4EAEE"/>
+            <a:srgbClr val="D9E1E7"/>
           </a:solidFill>
           <a:ln xmlns:a="http://schemas.openxmlformats.org/drawingml/2006/main" w="0">
             <a:solidFill>
-              <a:srgbClr val="E4EAEE"/>
+              <a:srgbClr val="D9E1E7"/>
             </a:solidFill>
             <a:prstDash val="solid"/>
           </a:ln>
@@ -7802,7 +7952,7 @@
           <p:cNvPr id="29" name="">
             <a:extLst xmlns:a="http://schemas.openxmlformats.org/drawingml/2006/main">
               <a:ext uri="{FF2B5EF4-FFF2-40B4-BE49-F238E27FC236}">
-                <a16:creationId xmlns:a16="http://schemas.microsoft.com/office/drawing/2014/main" id="{7779323D-1618-4FD9-97C7-CEB1BD054062}"/>
+                <a16:creationId xmlns:a16="http://schemas.microsoft.com/office/drawing/2014/main" id="{24CA9512-9942-426B-8F6F-CCAED5AE49BE}"/>
               </a:ext>
             </a:extLst>
           </p:cNvPr>
@@ -7814,17 +7964,17 @@
         <p:spPr>
           <a:xfrm xmlns:a="http://schemas.openxmlformats.org/drawingml/2006/main">
             <a:off x="4810125" y="4724400"/>
-            <a:ext cx="2476500" cy="190500"/>
+            <a:ext cx="3429000" cy="190500"/>
           </a:xfrm>
           <a:prstGeom xmlns:a="http://schemas.openxmlformats.org/drawingml/2006/main" prst="rect">
             <a:avLst/>
           </a:prstGeom>
           <a:solidFill xmlns:a="http://schemas.openxmlformats.org/drawingml/2006/main">
-            <a:srgbClr val="C77B35"/>
+            <a:srgbClr val="A32020"/>
           </a:solidFill>
           <a:ln xmlns:a="http://schemas.openxmlformats.org/drawingml/2006/main" w="0">
             <a:solidFill>
-              <a:srgbClr val="C77B35"/>
+              <a:srgbClr val="A32020"/>
             </a:solidFill>
             <a:prstDash val="solid"/>
           </a:ln>
@@ -7835,7 +7985,7 @@
           <p:cNvPr id="30" name="">
             <a:extLst xmlns:a="http://schemas.openxmlformats.org/drawingml/2006/main">
               <a:ext uri="{FF2B5EF4-FFF2-40B4-BE49-F238E27FC236}">
-                <a16:creationId xmlns:a16="http://schemas.microsoft.com/office/drawing/2014/main" id="{70FFDAB0-51CA-4878-9648-248E1805B109}"/>
+                <a16:creationId xmlns:a16="http://schemas.microsoft.com/office/drawing/2014/main" id="{28316039-6DAF-44D3-A829-7FA5CB249FFB}"/>
               </a:ext>
             </a:extLst>
           </p:cNvPr>
@@ -7865,17 +8015,17 @@
             <a:pPr>
               <a:defRPr sz="1200" b="1">
                 <a:solidFill>
-                  <a:srgbClr val="C77B35"/>
+                  <a:srgbClr val="A32020"/>
                 </a:solidFill>
               </a:defRPr>
             </a:pPr>
             <a:r>
               <a:rPr sz="1200" b="1">
                 <a:solidFill>
-                  <a:srgbClr val="C77B35"/>
-                </a:solidFill>
-              </a:rPr>
-              <a:t>High</a:t>
+                  <a:srgbClr val="A32020"/>
+                </a:solidFill>
+              </a:rPr>
+              <a:t>Critical</a:t>
             </a:r>
           </a:p>
         </p:txBody>
@@ -7885,7 +8035,7 @@
           <p:cNvPr id="31" name="">
             <a:extLst xmlns:a="http://schemas.openxmlformats.org/drawingml/2006/main">
               <a:ext uri="{FF2B5EF4-FFF2-40B4-BE49-F238E27FC236}">
-                <a16:creationId xmlns:a16="http://schemas.microsoft.com/office/drawing/2014/main" id="{65C320DD-4BE1-473C-8AB5-F05ED75C21CB}"/>
+                <a16:creationId xmlns:a16="http://schemas.microsoft.com/office/drawing/2014/main" id="{BE380459-74F4-41D2-B2E3-AD2C99F90981}"/>
               </a:ext>
             </a:extLst>
           </p:cNvPr>
@@ -7915,17 +8065,17 @@
             <a:pPr>
               <a:defRPr sz="1050">
                 <a:solidFill>
-                  <a:srgbClr val="5E7080"/>
+                  <a:srgbClr val="5A6B7C"/>
                 </a:solidFill>
               </a:defRPr>
             </a:pPr>
             <a:r>
               <a:rPr sz="1050">
                 <a:solidFill>
-                  <a:srgbClr val="5E7080"/>
-                </a:solidFill>
-              </a:rPr>
-              <a:t>Implement a complete role-based access review.</a:t>
+                  <a:srgbClr val="5A6B7C"/>
+                </a:solidFill>
+              </a:rPr>
+              <a:t>The process owner must define the risk points requiring verification — customer or beneficiary enrolment, employee onboarding, supplier activation and counterparty contracting — and apply proportionate checks against independent sources such as identity documents validated for authenticity, company registration records, and confirmation of contact details through independently obtained channels; results and evidence are retained under applicable data-protection obligations, exceptions require documented approval, and sensitive profile or banking changes trigger re-verification.</a:t>
             </a:r>
           </a:p>
         </p:txBody>
@@ -7933,7 +8083,7 @@
     </p:spTree>
     <p:extLst>
       <p:ext uri="{BB962C8B-B14F-4D97-AF65-F5344CB8AC3E}">
-        <p14:creationId xmlns:p14="http://schemas.microsoft.com/office/powerpoint/2010/main" val="1453008328"/>
+        <p14:creationId xmlns:p14="http://schemas.microsoft.com/office/powerpoint/2010/main" val="870987989"/>
       </p:ext>
     </p:extLst>
   </p:cSld>
@@ -7946,7 +8096,7 @@
     <p:bg>
       <p:bgPr>
         <a:solidFill xmlns:a="http://schemas.openxmlformats.org/drawingml/2006/main">
-          <a:srgbClr val="F7F4EE"/>
+          <a:srgbClr val="FBF9F5"/>
         </a:solidFill>
       </p:bgPr>
     </p:bg>
@@ -7964,7 +8114,7 @@
           <p:cNvPr id="22" name="">
             <a:extLst xmlns:a="http://schemas.openxmlformats.org/drawingml/2006/main">
               <a:ext uri="{FF2B5EF4-FFF2-40B4-BE49-F238E27FC236}">
-                <a16:creationId xmlns:a16="http://schemas.microsoft.com/office/drawing/2014/main" id="{57A1B15A-622A-469E-98C2-277EDCE2645E}"/>
+                <a16:creationId xmlns:a16="http://schemas.microsoft.com/office/drawing/2014/main" id="{5DF7EEB3-D65F-48DA-BBCD-B53616897FE1}"/>
               </a:ext>
             </a:extLst>
           </p:cNvPr>
@@ -7994,14 +8144,14 @@
             <a:pPr>
               <a:defRPr sz="1050" b="1">
                 <a:solidFill>
-                  <a:srgbClr val="C77B35"/>
+                  <a:srgbClr val="C9A227"/>
                 </a:solidFill>
               </a:defRPr>
             </a:pPr>
             <a:r>
               <a:rPr sz="1050" b="1">
                 <a:solidFill>
-                  <a:srgbClr val="C77B35"/>
+                  <a:srgbClr val="C9A227"/>
                 </a:solidFill>
               </a:rPr>
               <a:t>COMPREHENSIVE REVIEW · 06</a:t>
@@ -8014,7 +8164,7 @@
           <p:cNvPr id="2" name="">
             <a:extLst xmlns:a="http://schemas.openxmlformats.org/drawingml/2006/main">
               <a:ext uri="{FF2B5EF4-FFF2-40B4-BE49-F238E27FC236}">
-                <a16:creationId xmlns:a16="http://schemas.microsoft.com/office/drawing/2014/main" id="{41E9E5D3-835A-414C-8FB6-9AE444488736}"/>
+                <a16:creationId xmlns:a16="http://schemas.microsoft.com/office/drawing/2014/main" id="{AC71417E-F11E-406D-A3F6-D4B1102E0177}"/>
               </a:ext>
             </a:extLst>
           </p:cNvPr>
@@ -8064,7 +8214,7 @@
           <p:cNvPr id="3" name="">
             <a:extLst xmlns:a="http://schemas.openxmlformats.org/drawingml/2006/main">
               <a:ext uri="{FF2B5EF4-FFF2-40B4-BE49-F238E27FC236}">
-                <a16:creationId xmlns:a16="http://schemas.microsoft.com/office/drawing/2014/main" id="{5FB01A46-6E46-46AA-A839-87A857CED607}"/>
+                <a16:creationId xmlns:a16="http://schemas.microsoft.com/office/drawing/2014/main" id="{BC363386-8F85-4C64-9AC3-056AC0E3813A}"/>
               </a:ext>
             </a:extLst>
           </p:cNvPr>
@@ -8094,17 +8244,17 @@
             <a:pPr>
               <a:defRPr sz="1350">
                 <a:solidFill>
-                  <a:srgbClr val="5E7080"/>
+                  <a:srgbClr val="5A6B7C"/>
                 </a:solidFill>
               </a:defRPr>
             </a:pPr>
             <a:r>
               <a:rPr sz="1350">
                 <a:solidFill>
-                  <a:srgbClr val="5E7080"/>
-                </a:solidFill>
-              </a:rPr>
-              <a:t>Scenario logic helps management validate prevention, detection and containment together.</a:t>
+                  <a:srgbClr val="5A6B7C"/>
+                </a:solidFill>
+              </a:rPr>
+              <a:t>Scenario logic helps management test prevention, detection and containment together.</a:t>
             </a:r>
           </a:p>
         </p:txBody>
@@ -8114,7 +8264,7 @@
           <p:cNvPr id="4" name="">
             <a:extLst xmlns:a="http://schemas.openxmlformats.org/drawingml/2006/main">
               <a:ext uri="{FF2B5EF4-FFF2-40B4-BE49-F238E27FC236}">
-                <a16:creationId xmlns:a16="http://schemas.microsoft.com/office/drawing/2014/main" id="{C66C986D-F77D-4510-B325-44BB82B23878}"/>
+                <a16:creationId xmlns:a16="http://schemas.microsoft.com/office/drawing/2014/main" id="{DB943D7A-E9E5-4154-B61F-A45F3DC4C0B5}"/>
               </a:ext>
             </a:extLst>
           </p:cNvPr>
@@ -8134,7 +8284,7 @@
           <a:noFill xmlns:a="http://schemas.openxmlformats.org/drawingml/2006/main"/>
           <a:ln xmlns:a="http://schemas.openxmlformats.org/drawingml/2006/main" w="9525">
             <a:solidFill>
-              <a:srgbClr val="D8E0E5"/>
+              <a:srgbClr val="D9E1E7"/>
             </a:solidFill>
             <a:prstDash val="solid"/>
           </a:ln>
@@ -8145,7 +8295,7 @@
           <p:cNvPr id="5" name="">
             <a:extLst xmlns:a="http://schemas.openxmlformats.org/drawingml/2006/main">
               <a:ext uri="{FF2B5EF4-FFF2-40B4-BE49-F238E27FC236}">
-                <a16:creationId xmlns:a16="http://schemas.microsoft.com/office/drawing/2014/main" id="{781E440D-DF43-487A-8373-8CA65A551725}"/>
+                <a16:creationId xmlns:a16="http://schemas.microsoft.com/office/drawing/2014/main" id="{BF068449-8EDC-492E-9714-52752A563A5B}"/>
               </a:ext>
             </a:extLst>
           </p:cNvPr>
@@ -8175,14 +8325,14 @@
             <a:pPr>
               <a:defRPr sz="975">
                 <a:solidFill>
-                  <a:srgbClr val="5E7080"/>
+                  <a:srgbClr val="5A6B7C"/>
                 </a:solidFill>
               </a:defRPr>
             </a:pPr>
             <a:r>
               <a:rPr sz="975">
                 <a:solidFill>
-                  <a:srgbClr val="5E7080"/>
+                  <a:srgbClr val="5A6B7C"/>
                 </a:solidFill>
               </a:rPr>
               <a:t>MK Fraud Readiness · Comprehensive</a:t>
@@ -8195,7 +8345,7 @@
           <p:cNvPr id="6" name="">
             <a:extLst xmlns:a="http://schemas.openxmlformats.org/drawingml/2006/main">
               <a:ext uri="{FF2B5EF4-FFF2-40B4-BE49-F238E27FC236}">
-                <a16:creationId xmlns:a16="http://schemas.microsoft.com/office/drawing/2014/main" id="{8D7E4CDB-8405-401E-8255-84C630915690}"/>
+                <a16:creationId xmlns:a16="http://schemas.microsoft.com/office/drawing/2014/main" id="{707BB9FB-DE56-4606-9AC4-EBE055C318CD}"/>
               </a:ext>
             </a:extLst>
           </p:cNvPr>
@@ -8225,14 +8375,14 @@
             <a:pPr algn="r">
               <a:defRPr sz="975">
                 <a:solidFill>
-                  <a:srgbClr val="5E7080"/>
+                  <a:srgbClr val="5A6B7C"/>
                 </a:solidFill>
               </a:defRPr>
             </a:pPr>
             <a:r>
               <a:rPr sz="975">
                 <a:solidFill>
-                  <a:srgbClr val="5E7080"/>
+                  <a:srgbClr val="5A6B7C"/>
                 </a:solidFill>
               </a:rPr>
               <a:t>06 / 10</a:t>
@@ -8245,7 +8395,7 @@
           <p:cNvPr id="7" name="">
             <a:extLst xmlns:a="http://schemas.openxmlformats.org/drawingml/2006/main">
               <a:ext uri="{FF2B5EF4-FFF2-40B4-BE49-F238E27FC236}">
-                <a16:creationId xmlns:a16="http://schemas.microsoft.com/office/drawing/2014/main" id="{E0DF6CC6-7570-4437-AC93-440E5AB01D45}"/>
+                <a16:creationId xmlns:a16="http://schemas.microsoft.com/office/drawing/2014/main" id="{239D00F1-8C0C-4D6D-90F1-41F5EBBAF2E4}"/>
               </a:ext>
             </a:extLst>
           </p:cNvPr>
@@ -8265,11 +8415,11 @@
             </a:avLst>
           </a:prstGeom>
           <a:solidFill xmlns:a="http://schemas.openxmlformats.org/drawingml/2006/main">
-            <a:srgbClr val="EEF3F6"/>
+            <a:srgbClr val="FBF9F5"/>
           </a:solidFill>
           <a:ln xmlns:a="http://schemas.openxmlformats.org/drawingml/2006/main" w="9525">
             <a:solidFill>
-              <a:srgbClr val="D8E0E5"/>
+              <a:srgbClr val="D9E1E7"/>
             </a:solidFill>
             <a:prstDash val="solid"/>
           </a:ln>
@@ -8280,7 +8430,7 @@
           <p:cNvPr id="8" name="">
             <a:extLst xmlns:a="http://schemas.openxmlformats.org/drawingml/2006/main">
               <a:ext uri="{FF2B5EF4-FFF2-40B4-BE49-F238E27FC236}">
-                <a16:creationId xmlns:a16="http://schemas.microsoft.com/office/drawing/2014/main" id="{CA460E0B-D4B4-4366-A1B6-DB7710C531DB}"/>
+                <a16:creationId xmlns:a16="http://schemas.microsoft.com/office/drawing/2014/main" id="{569776DA-A87C-411E-BAFF-E226EAA3352E}"/>
               </a:ext>
             </a:extLst>
           </p:cNvPr>
@@ -8310,14 +8460,14 @@
             <a:pPr>
               <a:defRPr sz="1950" b="1">
                 <a:solidFill>
-                  <a:srgbClr val="C77B35"/>
+                  <a:srgbClr val="C9A227"/>
                 </a:solidFill>
               </a:defRPr>
             </a:pPr>
             <a:r>
               <a:rPr sz="1950" b="1">
                 <a:solidFill>
-                  <a:srgbClr val="C77B35"/>
+                  <a:srgbClr val="C9A227"/>
                 </a:solidFill>
               </a:rPr>
               <a:t>01</a:t>
@@ -8330,7 +8480,7 @@
           <p:cNvPr id="9" name="">
             <a:extLst xmlns:a="http://schemas.openxmlformats.org/drawingml/2006/main">
               <a:ext uri="{FF2B5EF4-FFF2-40B4-BE49-F238E27FC236}">
-                <a16:creationId xmlns:a16="http://schemas.microsoft.com/office/drawing/2014/main" id="{692B9CA2-83AE-44A5-9FCA-BBD5C94B1D5C}"/>
+                <a16:creationId xmlns:a16="http://schemas.microsoft.com/office/drawing/2014/main" id="{69FEEBA1-B39D-4DD9-8D6C-35D74973F295}"/>
               </a:ext>
             </a:extLst>
           </p:cNvPr>
@@ -8370,7 +8520,7 @@
                   <a:srgbClr val="142F4C"/>
                 </a:solidFill>
               </a:rPr>
-              <a:t>Supplier bank-detail redirection</a:t>
+              <a:t>Without deliberate monitoring, fraud is found only by accident, complaint or external notification, typically long after the loss has compounded</a:t>
             </a:r>
           </a:p>
         </p:txBody>
@@ -8380,7 +8530,7 @@
           <p:cNvPr id="10" name="">
             <a:extLst xmlns:a="http://schemas.openxmlformats.org/drawingml/2006/main">
               <a:ext uri="{FF2B5EF4-FFF2-40B4-BE49-F238E27FC236}">
-                <a16:creationId xmlns:a16="http://schemas.microsoft.com/office/drawing/2014/main" id="{5406D2E7-833E-49DA-92E4-878A90243402}"/>
+                <a16:creationId xmlns:a16="http://schemas.microsoft.com/office/drawing/2014/main" id="{45F59008-244F-4663-9762-4B53D79B9495}"/>
               </a:ext>
             </a:extLst>
           </p:cNvPr>
@@ -8410,17 +8560,17 @@
             <a:pPr>
               <a:defRPr sz="1200">
                 <a:solidFill>
-                  <a:srgbClr val="5E7080"/>
+                  <a:srgbClr val="5A6B7C"/>
                 </a:solidFill>
               </a:defRPr>
             </a:pPr>
             <a:r>
               <a:rPr sz="1200">
                 <a:solidFill>
-                  <a:srgbClr val="5E7080"/>
-                </a:solidFill>
-              </a:rPr>
-              <a:t>A stale or excessive account remains active.</a:t>
+                  <a:srgbClr val="5A6B7C"/>
+                </a:solidFill>
+              </a:rPr>
+              <a:t>An interaction covered by the recorded control condition: Fraud Detection Capability: The organisation monitors transactions or operational activity for unusual patterns, anomalies or red flags.</a:t>
             </a:r>
           </a:p>
         </p:txBody>
@@ -8430,7 +8580,7 @@
           <p:cNvPr id="11" name="">
             <a:extLst xmlns:a="http://schemas.openxmlformats.org/drawingml/2006/main">
               <a:ext uri="{FF2B5EF4-FFF2-40B4-BE49-F238E27FC236}">
-                <a16:creationId xmlns:a16="http://schemas.microsoft.com/office/drawing/2014/main" id="{A88A2789-4685-4414-9289-0148C4105496}"/>
+                <a16:creationId xmlns:a16="http://schemas.microsoft.com/office/drawing/2014/main" id="{16614365-A37C-44FD-AF3B-506456DE9950}"/>
               </a:ext>
             </a:extLst>
           </p:cNvPr>
@@ -8460,17 +8610,17 @@
             <a:pPr>
               <a:defRPr sz="1200">
                 <a:solidFill>
-                  <a:srgbClr val="172232"/>
+                  <a:srgbClr val="1A2634"/>
                 </a:solidFill>
               </a:defRPr>
             </a:pPr>
             <a:r>
               <a:rPr sz="1200">
                 <a:solidFill>
-                  <a:srgbClr val="172232"/>
-                </a:solidFill>
-              </a:rPr>
-              <a:t>An unauthorised change is made and the audit trail is obscured or discovered late.</a:t>
+                  <a:srgbClr val="1A2634"/>
+                </a:solidFill>
+              </a:rPr>
+              <a:t>An actor exploits the recorded control condition so that without deliberate monitoring, fraud is found only by accident, complaint or external notification, typically long after the loss has compounded.</a:t>
             </a:r>
           </a:p>
         </p:txBody>
@@ -8480,7 +8630,7 @@
           <p:cNvPr id="12" name="">
             <a:extLst xmlns:a="http://schemas.openxmlformats.org/drawingml/2006/main">
               <a:ext uri="{FF2B5EF4-FFF2-40B4-BE49-F238E27FC236}">
-                <a16:creationId xmlns:a16="http://schemas.microsoft.com/office/drawing/2014/main" id="{77DE3407-1AC5-4BE4-BD2B-CA759E52FF9E}"/>
+                <a16:creationId xmlns:a16="http://schemas.microsoft.com/office/drawing/2014/main" id="{D352FAA7-9E47-4DEC-B615-0C54D33EA4C9}"/>
               </a:ext>
             </a:extLst>
           </p:cNvPr>
@@ -8500,11 +8650,11 @@
             </a:avLst>
           </a:prstGeom>
           <a:solidFill xmlns:a="http://schemas.openxmlformats.org/drawingml/2006/main">
-            <a:srgbClr val="FFF6E8"/>
+            <a:srgbClr val="FDF4E7"/>
           </a:solidFill>
           <a:ln xmlns:a="http://schemas.openxmlformats.org/drawingml/2006/main" w="9525">
             <a:solidFill>
-              <a:srgbClr val="D8E0E5"/>
+              <a:srgbClr val="D9E1E7"/>
             </a:solidFill>
             <a:prstDash val="solid"/>
           </a:ln>
@@ -8515,7 +8665,7 @@
           <p:cNvPr id="13" name="">
             <a:extLst xmlns:a="http://schemas.openxmlformats.org/drawingml/2006/main">
               <a:ext uri="{FF2B5EF4-FFF2-40B4-BE49-F238E27FC236}">
-                <a16:creationId xmlns:a16="http://schemas.microsoft.com/office/drawing/2014/main" id="{75FBCCED-470C-4608-9810-0E7B114CA486}"/>
+                <a16:creationId xmlns:a16="http://schemas.microsoft.com/office/drawing/2014/main" id="{655F90A3-0684-45D6-A41B-07CBB36E8701}"/>
               </a:ext>
             </a:extLst>
           </p:cNvPr>
@@ -8545,14 +8695,14 @@
             <a:pPr>
               <a:defRPr sz="1950" b="1">
                 <a:solidFill>
-                  <a:srgbClr val="C77B35"/>
+                  <a:srgbClr val="C9A227"/>
                 </a:solidFill>
               </a:defRPr>
             </a:pPr>
             <a:r>
               <a:rPr sz="1950" b="1">
                 <a:solidFill>
-                  <a:srgbClr val="C77B35"/>
+                  <a:srgbClr val="C9A227"/>
                 </a:solidFill>
               </a:rPr>
               <a:t>02</a:t>
@@ -8565,7 +8715,7 @@
           <p:cNvPr id="14" name="">
             <a:extLst xmlns:a="http://schemas.openxmlformats.org/drawingml/2006/main">
               <a:ext uri="{FF2B5EF4-FFF2-40B4-BE49-F238E27FC236}">
-                <a16:creationId xmlns:a16="http://schemas.microsoft.com/office/drawing/2014/main" id="{6ECDCA2B-E84B-4E66-82D9-D86FBB3A2849}"/>
+                <a16:creationId xmlns:a16="http://schemas.microsoft.com/office/drawing/2014/main" id="{66F757CC-C9E5-41A5-927F-4496D4E35EF6}"/>
               </a:ext>
             </a:extLst>
           </p:cNvPr>
@@ -8605,7 +8755,7 @@
                   <a:srgbClr val="142F4C"/>
                 </a:solidFill>
               </a:rPr>
-              <a:t>Incident escalation delay</a:t>
+              <a:t>Controls decay quietly through staff turnover, system change and workload pressure, so a control believed to be operating may have lapsed months earlier</a:t>
             </a:r>
           </a:p>
         </p:txBody>
@@ -8615,7 +8765,7 @@
           <p:cNvPr id="15" name="">
             <a:extLst xmlns:a="http://schemas.openxmlformats.org/drawingml/2006/main">
               <a:ext uri="{FF2B5EF4-FFF2-40B4-BE49-F238E27FC236}">
-                <a16:creationId xmlns:a16="http://schemas.microsoft.com/office/drawing/2014/main" id="{2B03A694-966C-4BB8-A4A4-5F2F2C876D0E}"/>
+                <a16:creationId xmlns:a16="http://schemas.microsoft.com/office/drawing/2014/main" id="{15045D8D-74C8-40C6-B787-BC178E5D0A8E}"/>
               </a:ext>
             </a:extLst>
           </p:cNvPr>
@@ -8645,17 +8795,17 @@
             <a:pPr>
               <a:defRPr sz="1200">
                 <a:solidFill>
-                  <a:srgbClr val="5E7080"/>
+                  <a:srgbClr val="5A6B7C"/>
                 </a:solidFill>
               </a:defRPr>
             </a:pPr>
             <a:r>
               <a:rPr sz="1200">
                 <a:solidFill>
-                  <a:srgbClr val="5E7080"/>
-                </a:solidFill>
-              </a:rPr>
-              <a:t>A stale or excessive account remains active.</a:t>
+                  <a:srgbClr val="5A6B7C"/>
+                </a:solidFill>
+              </a:rPr>
+              <a:t>An interaction covered by the recorded control condition: Continuous Improvement and Fraud Risk Monitoring: The organisation periodically reviews its fraud risks and control environment.</a:t>
             </a:r>
           </a:p>
         </p:txBody>
@@ -8665,7 +8815,7 @@
           <p:cNvPr id="16" name="">
             <a:extLst xmlns:a="http://schemas.openxmlformats.org/drawingml/2006/main">
               <a:ext uri="{FF2B5EF4-FFF2-40B4-BE49-F238E27FC236}">
-                <a16:creationId xmlns:a16="http://schemas.microsoft.com/office/drawing/2014/main" id="{61D30647-EA7A-4642-9C1D-7304E4D6C7A9}"/>
+                <a16:creationId xmlns:a16="http://schemas.microsoft.com/office/drawing/2014/main" id="{F1ADE9AA-09F4-492E-93F8-0AA2E0EFE8AF}"/>
               </a:ext>
             </a:extLst>
           </p:cNvPr>
@@ -8695,17 +8845,17 @@
             <a:pPr>
               <a:defRPr sz="1200">
                 <a:solidFill>
-                  <a:srgbClr val="172232"/>
+                  <a:srgbClr val="1A2634"/>
                 </a:solidFill>
               </a:defRPr>
             </a:pPr>
             <a:r>
               <a:rPr sz="1200">
                 <a:solidFill>
-                  <a:srgbClr val="172232"/>
-                </a:solidFill>
-              </a:rPr>
-              <a:t>An unauthorised change is made and the audit trail is obscured or discovered late.</a:t>
+                  <a:srgbClr val="1A2634"/>
+                </a:solidFill>
+              </a:rPr>
+              <a:t>An actor exploits the recorded control condition so that controls decay quietly through staff turnover, system change and workload pressure, so a control believed to be operating may have lapsed months earlier.</a:t>
             </a:r>
           </a:p>
         </p:txBody>
@@ -8715,7 +8865,7 @@
           <p:cNvPr id="17" name="">
             <a:extLst xmlns:a="http://schemas.openxmlformats.org/drawingml/2006/main">
               <a:ext uri="{FF2B5EF4-FFF2-40B4-BE49-F238E27FC236}">
-                <a16:creationId xmlns:a16="http://schemas.microsoft.com/office/drawing/2014/main" id="{BE3B23D4-8A9B-4554-B83D-CA70ADC4D13D}"/>
+                <a16:creationId xmlns:a16="http://schemas.microsoft.com/office/drawing/2014/main" id="{E62ABA01-749A-4B4A-A945-9C978D05FF83}"/>
               </a:ext>
             </a:extLst>
           </p:cNvPr>
@@ -8735,11 +8885,11 @@
             </a:avLst>
           </a:prstGeom>
           <a:solidFill xmlns:a="http://schemas.openxmlformats.org/drawingml/2006/main">
-            <a:srgbClr val="FFF0EE"/>
+            <a:srgbClr val="FBEDED"/>
           </a:solidFill>
           <a:ln xmlns:a="http://schemas.openxmlformats.org/drawingml/2006/main" w="9525">
             <a:solidFill>
-              <a:srgbClr val="D8E0E5"/>
+              <a:srgbClr val="D9E1E7"/>
             </a:solidFill>
             <a:prstDash val="solid"/>
           </a:ln>
@@ -8750,7 +8900,7 @@
           <p:cNvPr id="18" name="">
             <a:extLst xmlns:a="http://schemas.openxmlformats.org/drawingml/2006/main">
               <a:ext uri="{FF2B5EF4-FFF2-40B4-BE49-F238E27FC236}">
-                <a16:creationId xmlns:a16="http://schemas.microsoft.com/office/drawing/2014/main" id="{E7F19491-D21B-44EF-AE1E-196093739110}"/>
+                <a16:creationId xmlns:a16="http://schemas.microsoft.com/office/drawing/2014/main" id="{945D02BD-E082-44A8-9256-4C0C32E0B4A9}"/>
               </a:ext>
             </a:extLst>
           </p:cNvPr>
@@ -8780,14 +8930,14 @@
             <a:pPr>
               <a:defRPr sz="1950" b="1">
                 <a:solidFill>
-                  <a:srgbClr val="A93E38"/>
+                  <a:srgbClr val="A32020"/>
                 </a:solidFill>
               </a:defRPr>
             </a:pPr>
             <a:r>
               <a:rPr sz="1950" b="1">
                 <a:solidFill>
-                  <a:srgbClr val="A93E38"/>
+                  <a:srgbClr val="A32020"/>
                 </a:solidFill>
               </a:rPr>
               <a:t>03</a:t>
@@ -8800,7 +8950,7 @@
           <p:cNvPr id="19" name="">
             <a:extLst xmlns:a="http://schemas.openxmlformats.org/drawingml/2006/main">
               <a:ext uri="{FF2B5EF4-FFF2-40B4-BE49-F238E27FC236}">
-                <a16:creationId xmlns:a16="http://schemas.microsoft.com/office/drawing/2014/main" id="{185A2CD1-816D-4F5D-A612-A36FB9168816}"/>
+                <a16:creationId xmlns:a16="http://schemas.microsoft.com/office/drawing/2014/main" id="{AC4E0432-47D6-48EB-8ABF-A6EA6F1896B0}"/>
               </a:ext>
             </a:extLst>
           </p:cNvPr>
@@ -8840,7 +8990,7 @@
                   <a:srgbClr val="142F4C"/>
                 </a:solidFill>
               </a:rPr>
-              <a:t>Privileged access misuse</a:t>
+              <a:t>Without a current structured assessment, control investment follows intuition and recent events, leaving whole exposure areas unexamined and unfunded</a:t>
             </a:r>
           </a:p>
         </p:txBody>
@@ -8850,7 +9000,7 @@
           <p:cNvPr id="20" name="">
             <a:extLst xmlns:a="http://schemas.openxmlformats.org/drawingml/2006/main">
               <a:ext uri="{FF2B5EF4-FFF2-40B4-BE49-F238E27FC236}">
-                <a16:creationId xmlns:a16="http://schemas.microsoft.com/office/drawing/2014/main" id="{AD7091A3-1543-478C-B793-80CFD1AEC3CF}"/>
+                <a16:creationId xmlns:a16="http://schemas.microsoft.com/office/drawing/2014/main" id="{C383EE82-D1DF-4A8B-B50F-5166CA7B42A4}"/>
               </a:ext>
             </a:extLst>
           </p:cNvPr>
@@ -8880,17 +9030,17 @@
             <a:pPr>
               <a:defRPr sz="1200">
                 <a:solidFill>
-                  <a:srgbClr val="5E7080"/>
+                  <a:srgbClr val="5A6B7C"/>
                 </a:solidFill>
               </a:defRPr>
             </a:pPr>
             <a:r>
               <a:rPr sz="1200">
                 <a:solidFill>
-                  <a:srgbClr val="5E7080"/>
-                </a:solidFill>
-              </a:rPr>
-              <a:t>A pattern changes after the last rule review.</a:t>
+                  <a:srgbClr val="5A6B7C"/>
+                </a:solidFill>
+              </a:rPr>
+              <a:t>An interaction covered by the recorded control condition: Fraud Risk Identification: The organisation has completed a structured fraud risk assessment within the past two years.</a:t>
             </a:r>
           </a:p>
         </p:txBody>
@@ -8900,7 +9050,7 @@
           <p:cNvPr id="21" name="">
             <a:extLst xmlns:a="http://schemas.openxmlformats.org/drawingml/2006/main">
               <a:ext uri="{FF2B5EF4-FFF2-40B4-BE49-F238E27FC236}">
-                <a16:creationId xmlns:a16="http://schemas.microsoft.com/office/drawing/2014/main" id="{E7826910-F183-492A-8264-788AEC544A86}"/>
+                <a16:creationId xmlns:a16="http://schemas.microsoft.com/office/drawing/2014/main" id="{00713B78-36E7-4DE5-ACB9-BF6F9CE7745D}"/>
               </a:ext>
             </a:extLst>
           </p:cNvPr>
@@ -8930,17 +9080,17 @@
             <a:pPr>
               <a:defRPr sz="1200">
                 <a:solidFill>
-                  <a:srgbClr val="172232"/>
+                  <a:srgbClr val="1A2634"/>
                 </a:solidFill>
               </a:defRPr>
             </a:pPr>
             <a:r>
               <a:rPr sz="1200">
                 <a:solidFill>
-                  <a:srgbClr val="172232"/>
-                </a:solidFill>
-              </a:rPr>
-              <a:t>Activity continues below or outside stale thresholds until a manual review identifies it.</a:t>
+                  <a:srgbClr val="1A2634"/>
+                </a:solidFill>
+              </a:rPr>
+              <a:t>An actor exploits the recorded control condition so that without a current structured assessment, control investment follows intuition and recent events, leaving whole exposure areas unexamined and unfunded.</a:t>
             </a:r>
           </a:p>
         </p:txBody>
@@ -8948,7 +9098,7 @@
     </p:spTree>
     <p:extLst>
       <p:ext uri="{BB962C8B-B14F-4D97-AF65-F5344CB8AC3E}">
-        <p14:creationId xmlns:p14="http://schemas.microsoft.com/office/powerpoint/2010/main" val="2079374388"/>
+        <p14:creationId xmlns:p14="http://schemas.microsoft.com/office/powerpoint/2010/main" val="1723682602"/>
       </p:ext>
     </p:extLst>
   </p:cSld>
@@ -8961,7 +9111,7 @@
     <p:bg>
       <p:bgPr>
         <a:solidFill xmlns:a="http://schemas.openxmlformats.org/drawingml/2006/main">
-          <a:srgbClr val="F7F4EE"/>
+          <a:srgbClr val="FBF9F5"/>
         </a:solidFill>
       </p:bgPr>
     </p:bg>
@@ -8976,10 +9126,10 @@
       </p:grpSpPr>
       <p:sp>
         <p:nvSpPr>
-          <p:cNvPr id="19" name="">
-            <a:extLst xmlns:a="http://schemas.openxmlformats.org/drawingml/2006/main">
-              <a:ext uri="{FF2B5EF4-FFF2-40B4-BE49-F238E27FC236}">
-                <a16:creationId xmlns:a16="http://schemas.microsoft.com/office/drawing/2014/main" id="{27407482-47BA-436B-A678-E93E74CEAF4E}"/>
+          <p:cNvPr id="16" name="">
+            <a:extLst xmlns:a="http://schemas.openxmlformats.org/drawingml/2006/main">
+              <a:ext uri="{FF2B5EF4-FFF2-40B4-BE49-F238E27FC236}">
+                <a16:creationId xmlns:a16="http://schemas.microsoft.com/office/drawing/2014/main" id="{7C375A53-7EA3-462C-8F38-F914B267E540}"/>
               </a:ext>
             </a:extLst>
           </p:cNvPr>
@@ -9009,14 +9159,14 @@
             <a:pPr>
               <a:defRPr sz="1050" b="1">
                 <a:solidFill>
-                  <a:srgbClr val="C77B35"/>
+                  <a:srgbClr val="C9A227"/>
                 </a:solidFill>
               </a:defRPr>
             </a:pPr>
             <a:r>
               <a:rPr sz="1050" b="1">
                 <a:solidFill>
-                  <a:srgbClr val="C77B35"/>
+                  <a:srgbClr val="C9A227"/>
                 </a:solidFill>
               </a:rPr>
               <a:t>COMPREHENSIVE REVIEW · 07</a:t>
@@ -9029,7 +9179,7 @@
           <p:cNvPr id="2" name="">
             <a:extLst xmlns:a="http://schemas.openxmlformats.org/drawingml/2006/main">
               <a:ext uri="{FF2B5EF4-FFF2-40B4-BE49-F238E27FC236}">
-                <a16:creationId xmlns:a16="http://schemas.microsoft.com/office/drawing/2014/main" id="{EA77F7ED-08C8-415C-A589-2DF50A110816}"/>
+                <a16:creationId xmlns:a16="http://schemas.microsoft.com/office/drawing/2014/main" id="{B7F14808-F95A-4381-B00A-DA5F42ABF4DE}"/>
               </a:ext>
             </a:extLst>
           </p:cNvPr>
@@ -9079,7 +9229,7 @@
           <p:cNvPr id="3" name="">
             <a:extLst xmlns:a="http://schemas.openxmlformats.org/drawingml/2006/main">
               <a:ext uri="{FF2B5EF4-FFF2-40B4-BE49-F238E27FC236}">
-                <a16:creationId xmlns:a16="http://schemas.microsoft.com/office/drawing/2014/main" id="{916A3749-EEC1-489C-B9BC-D5BA0172E840}"/>
+                <a16:creationId xmlns:a16="http://schemas.microsoft.com/office/drawing/2014/main" id="{AF305EEB-A1A2-41AB-9622-78E3579485FE}"/>
               </a:ext>
             </a:extLst>
           </p:cNvPr>
@@ -9109,14 +9259,14 @@
             <a:pPr>
               <a:defRPr sz="1350">
                 <a:solidFill>
-                  <a:srgbClr val="5E7080"/>
+                  <a:srgbClr val="5A6B7C"/>
                 </a:solidFill>
               </a:defRPr>
             </a:pPr>
             <a:r>
               <a:rPr sz="1350">
                 <a:solidFill>
-                  <a:srgbClr val="5E7080"/>
+                  <a:srgbClr val="5A6B7C"/>
                 </a:solidFill>
               </a:rPr>
               <a:t>Options and trade-offs make the decision explicit before the action plan is agreed.</a:t>
@@ -9129,7 +9279,7 @@
           <p:cNvPr id="4" name="">
             <a:extLst xmlns:a="http://schemas.openxmlformats.org/drawingml/2006/main">
               <a:ext uri="{FF2B5EF4-FFF2-40B4-BE49-F238E27FC236}">
-                <a16:creationId xmlns:a16="http://schemas.microsoft.com/office/drawing/2014/main" id="{C67B4F36-51EE-4069-874A-624FB0A41EB1}"/>
+                <a16:creationId xmlns:a16="http://schemas.microsoft.com/office/drawing/2014/main" id="{C0A26F38-F4BD-48B9-A38F-6CE7DC41BE46}"/>
               </a:ext>
             </a:extLst>
           </p:cNvPr>
@@ -9149,7 +9299,7 @@
           <a:noFill xmlns:a="http://schemas.openxmlformats.org/drawingml/2006/main"/>
           <a:ln xmlns:a="http://schemas.openxmlformats.org/drawingml/2006/main" w="9525">
             <a:solidFill>
-              <a:srgbClr val="D8E0E5"/>
+              <a:srgbClr val="D9E1E7"/>
             </a:solidFill>
             <a:prstDash val="solid"/>
           </a:ln>
@@ -9160,7 +9310,7 @@
           <p:cNvPr id="5" name="">
             <a:extLst xmlns:a="http://schemas.openxmlformats.org/drawingml/2006/main">
               <a:ext uri="{FF2B5EF4-FFF2-40B4-BE49-F238E27FC236}">
-                <a16:creationId xmlns:a16="http://schemas.microsoft.com/office/drawing/2014/main" id="{2C5A6070-5F43-4C51-A8FB-5503A11903C9}"/>
+                <a16:creationId xmlns:a16="http://schemas.microsoft.com/office/drawing/2014/main" id="{C6CD08C2-D00F-4446-8F9C-A5B7C974A6E1}"/>
               </a:ext>
             </a:extLst>
           </p:cNvPr>
@@ -9190,14 +9340,14 @@
             <a:pPr>
               <a:defRPr sz="975">
                 <a:solidFill>
-                  <a:srgbClr val="5E7080"/>
+                  <a:srgbClr val="5A6B7C"/>
                 </a:solidFill>
               </a:defRPr>
             </a:pPr>
             <a:r>
               <a:rPr sz="975">
                 <a:solidFill>
-                  <a:srgbClr val="5E7080"/>
+                  <a:srgbClr val="5A6B7C"/>
                 </a:solidFill>
               </a:rPr>
               <a:t>MK Fraud Readiness · Comprehensive</a:t>
@@ -9210,7 +9360,7 @@
           <p:cNvPr id="6" name="">
             <a:extLst xmlns:a="http://schemas.openxmlformats.org/drawingml/2006/main">
               <a:ext uri="{FF2B5EF4-FFF2-40B4-BE49-F238E27FC236}">
-                <a16:creationId xmlns:a16="http://schemas.microsoft.com/office/drawing/2014/main" id="{6FF0ECF4-49D6-43A0-9498-E71F364364CD}"/>
+                <a16:creationId xmlns:a16="http://schemas.microsoft.com/office/drawing/2014/main" id="{689C6847-6730-4AAB-AF04-EF801C6AA52F}"/>
               </a:ext>
             </a:extLst>
           </p:cNvPr>
@@ -9240,14 +9390,14 @@
             <a:pPr algn="r">
               <a:defRPr sz="975">
                 <a:solidFill>
-                  <a:srgbClr val="5E7080"/>
+                  <a:srgbClr val="5A6B7C"/>
                 </a:solidFill>
               </a:defRPr>
             </a:pPr>
             <a:r>
               <a:rPr sz="975">
                 <a:solidFill>
-                  <a:srgbClr val="5E7080"/>
+                  <a:srgbClr val="5A6B7C"/>
                 </a:solidFill>
               </a:rPr>
               <a:t>07 / 10</a:t>
@@ -9260,7 +9410,7 @@
           <p:cNvPr id="7" name="">
             <a:extLst xmlns:a="http://schemas.openxmlformats.org/drawingml/2006/main">
               <a:ext uri="{FF2B5EF4-FFF2-40B4-BE49-F238E27FC236}">
-                <a16:creationId xmlns:a16="http://schemas.microsoft.com/office/drawing/2014/main" id="{4678665A-484B-43EC-8918-7A6AB60893B0}"/>
+                <a16:creationId xmlns:a16="http://schemas.microsoft.com/office/drawing/2014/main" id="{42EF7A66-1E5B-4B6F-8C81-68BEF4661FD6}"/>
               </a:ext>
             </a:extLst>
           </p:cNvPr>
@@ -9300,7 +9450,7 @@
                   <a:srgbClr val="142F4C"/>
                 </a:solidFill>
               </a:rPr>
-              <a:t>Approve the Financial Controller mandate for detection ownership and evidence-led oversight.</a:t>
+              <a:t>Action accepted by management and scheduled: define and implement red-flag monitoring for vendor master data changes, depot stock adjustments and payroll master changes, with a first coverage report to the Audit and Risk Committee.</a:t>
             </a:r>
           </a:p>
         </p:txBody>
@@ -9310,7 +9460,7 @@
           <p:cNvPr id="8" name="">
             <a:extLst xmlns:a="http://schemas.openxmlformats.org/drawingml/2006/main">
               <a:ext uri="{FF2B5EF4-FFF2-40B4-BE49-F238E27FC236}">
-                <a16:creationId xmlns:a16="http://schemas.microsoft.com/office/drawing/2014/main" id="{45EFFC90-A214-4D62-99CE-40ECA4E3FC4E}"/>
+                <a16:creationId xmlns:a16="http://schemas.microsoft.com/office/drawing/2014/main" id="{9A51EEEE-3879-45D5-B4F8-A38A935AF3B1}"/>
               </a:ext>
             </a:extLst>
           </p:cNvPr>
@@ -9334,7 +9484,7 @@
           </a:solidFill>
           <a:ln xmlns:a="http://schemas.openxmlformats.org/drawingml/2006/main" w="9525">
             <a:solidFill>
-              <a:srgbClr val="D8E0E5"/>
+              <a:srgbClr val="D9E1E7"/>
             </a:solidFill>
             <a:prstDash val="solid"/>
           </a:ln>
@@ -9345,7 +9495,7 @@
           <p:cNvPr id="9" name="">
             <a:extLst xmlns:a="http://schemas.openxmlformats.org/drawingml/2006/main">
               <a:ext uri="{FF2B5EF4-FFF2-40B4-BE49-F238E27FC236}">
-                <a16:creationId xmlns:a16="http://schemas.microsoft.com/office/drawing/2014/main" id="{19308494-DD69-48C8-A3EE-274D2D230707}"/>
+                <a16:creationId xmlns:a16="http://schemas.microsoft.com/office/drawing/2014/main" id="{5102EDE3-274D-492D-A899-7D5BB592C090}"/>
               </a:ext>
             </a:extLst>
           </p:cNvPr>
@@ -9375,14 +9525,14 @@
             <a:pPr>
               <a:defRPr sz="1050" b="1">
                 <a:solidFill>
-                  <a:srgbClr val="C77B35"/>
+                  <a:srgbClr val="C9A227"/>
                 </a:solidFill>
               </a:defRPr>
             </a:pPr>
             <a:r>
               <a:rPr sz="1050" b="1">
                 <a:solidFill>
-                  <a:srgbClr val="C77B35"/>
+                  <a:srgbClr val="C9A227"/>
                 </a:solidFill>
               </a:rPr>
               <a:t>OPTION A</a:t>
@@ -9395,7 +9545,7 @@
           <p:cNvPr id="10" name="">
             <a:extLst xmlns:a="http://schemas.openxmlformats.org/drawingml/2006/main">
               <a:ext uri="{FF2B5EF4-FFF2-40B4-BE49-F238E27FC236}">
-                <a16:creationId xmlns:a16="http://schemas.microsoft.com/office/drawing/2014/main" id="{A7FAB4B1-0A22-426F-ACCD-E8502439BF62}"/>
+                <a16:creationId xmlns:a16="http://schemas.microsoft.com/office/drawing/2014/main" id="{0F5B2ED4-CD24-4A98-B2C7-22774958D632}"/>
               </a:ext>
             </a:extLst>
           </p:cNvPr>
@@ -9435,7 +9585,7 @@
                   <a:srgbClr val="142F4C"/>
                 </a:solidFill>
               </a:rPr>
-              <a:t>Option A: assign ownership internally</a:t>
+              <a:t>Build internal capability</a:t>
             </a:r>
           </a:p>
         </p:txBody>
@@ -9445,7 +9595,7 @@
           <p:cNvPr id="11" name="">
             <a:extLst xmlns:a="http://schemas.openxmlformats.org/drawingml/2006/main">
               <a:ext uri="{FF2B5EF4-FFF2-40B4-BE49-F238E27FC236}">
-                <a16:creationId xmlns:a16="http://schemas.microsoft.com/office/drawing/2014/main" id="{96557184-1DD5-493B-849D-685FEFBDB2DE}"/>
+                <a16:creationId xmlns:a16="http://schemas.microsoft.com/office/drawing/2014/main" id="{7EDC4441-2026-4C21-8393-732E120F2671}"/>
               </a:ext>
             </a:extLst>
           </p:cNvPr>
@@ -9469,7 +9619,7 @@
           </a:solidFill>
           <a:ln xmlns:a="http://schemas.openxmlformats.org/drawingml/2006/main" w="9525">
             <a:solidFill>
-              <a:srgbClr val="D8E0E5"/>
+              <a:srgbClr val="D9E1E7"/>
             </a:solidFill>
             <a:prstDash val="solid"/>
           </a:ln>
@@ -9480,7 +9630,7 @@
           <p:cNvPr id="12" name="">
             <a:extLst xmlns:a="http://schemas.openxmlformats.org/drawingml/2006/main">
               <a:ext uri="{FF2B5EF4-FFF2-40B4-BE49-F238E27FC236}">
-                <a16:creationId xmlns:a16="http://schemas.microsoft.com/office/drawing/2014/main" id="{2D42B465-F59A-4EA9-8CE3-7D2460706D3B}"/>
+                <a16:creationId xmlns:a16="http://schemas.microsoft.com/office/drawing/2014/main" id="{DBEBD936-6FBE-4F36-BE6E-C1B71DD652A2}"/>
               </a:ext>
             </a:extLst>
           </p:cNvPr>
@@ -9510,14 +9660,14 @@
             <a:pPr>
               <a:defRPr sz="1050" b="1">
                 <a:solidFill>
-                  <a:srgbClr val="C77B35"/>
+                  <a:srgbClr val="C9A227"/>
                 </a:solidFill>
               </a:defRPr>
             </a:pPr>
             <a:r>
               <a:rPr sz="1050" b="1">
                 <a:solidFill>
-                  <a:srgbClr val="C77B35"/>
+                  <a:srgbClr val="C9A227"/>
                 </a:solidFill>
               </a:rPr>
               <a:t>OPTION B</a:t>
@@ -9530,7 +9680,7 @@
           <p:cNvPr id="13" name="">
             <a:extLst xmlns:a="http://schemas.openxmlformats.org/drawingml/2006/main">
               <a:ext uri="{FF2B5EF4-FFF2-40B4-BE49-F238E27FC236}">
-                <a16:creationId xmlns:a16="http://schemas.microsoft.com/office/drawing/2014/main" id="{4E2BE748-878E-4328-B7DB-85C94B30853F}"/>
+                <a16:creationId xmlns:a16="http://schemas.microsoft.com/office/drawing/2014/main" id="{DC515B28-4806-4C2C-87C4-71DAB9E158A8}"/>
               </a:ext>
             </a:extLst>
           </p:cNvPr>
@@ -9570,7 +9720,7 @@
                   <a:srgbClr val="142F4C"/>
                 </a:solidFill>
               </a:rPr>
-              <a:t>Option B: appoint a specialist partner for the first cycle</a:t>
+              <a:t>Use a bounded specialist workstream</a:t>
             </a:r>
           </a:p>
         </p:txBody>
@@ -9580,142 +9730,7 @@
           <p:cNvPr id="14" name="">
             <a:extLst xmlns:a="http://schemas.openxmlformats.org/drawingml/2006/main">
               <a:ext uri="{FF2B5EF4-FFF2-40B4-BE49-F238E27FC236}">
-                <a16:creationId xmlns:a16="http://schemas.microsoft.com/office/drawing/2014/main" id="{31C007B1-B791-4F59-8D9B-A5A6A1E0E6EB}"/>
-              </a:ext>
-            </a:extLst>
-          </p:cNvPr>
-          <p:cNvSpPr>
-            <a:spLocks xmlns:a="http://schemas.openxmlformats.org/drawingml/2006/main" noGrp="1"/>
-          </p:cNvSpPr>
-          <p:nvPr/>
-        </p:nvSpPr>
-        <p:spPr>
-          <a:xfrm xmlns:a="http://schemas.openxmlformats.org/drawingml/2006/main">
-            <a:off x="7219950" y="2971800"/>
-            <a:ext cx="2809875" cy="1524000"/>
-          </a:xfrm>
-          <a:prstGeom xmlns:a="http://schemas.openxmlformats.org/drawingml/2006/main" prst="roundRect">
-            <a:avLst>
-              <a:gd name="adj" fmla="val 7500"/>
-            </a:avLst>
-          </a:prstGeom>
-          <a:solidFill xmlns:a="http://schemas.openxmlformats.org/drawingml/2006/main">
-            <a:srgbClr val="FFFFFF"/>
-          </a:solidFill>
-          <a:ln xmlns:a="http://schemas.openxmlformats.org/drawingml/2006/main" w="9525">
-            <a:solidFill>
-              <a:srgbClr val="D8E0E5"/>
-            </a:solidFill>
-            <a:prstDash val="solid"/>
-          </a:ln>
-        </p:spPr>
-      </p:sp>
-      <p:sp>
-        <p:nvSpPr>
-          <p:cNvPr id="15" name="">
-            <a:extLst xmlns:a="http://schemas.openxmlformats.org/drawingml/2006/main">
-              <a:ext uri="{FF2B5EF4-FFF2-40B4-BE49-F238E27FC236}">
-                <a16:creationId xmlns:a16="http://schemas.microsoft.com/office/drawing/2014/main" id="{C320A214-9DCD-41B4-91B1-5544CE4FE152}"/>
-              </a:ext>
-            </a:extLst>
-          </p:cNvPr>
-          <p:cNvSpPr>
-            <a:spLocks xmlns:a="http://schemas.openxmlformats.org/drawingml/2006/main" noGrp="1"/>
-          </p:cNvSpPr>
-          <p:nvPr/>
-        </p:nvSpPr>
-        <p:spPr>
-          <a:xfrm xmlns:a="http://schemas.openxmlformats.org/drawingml/2006/main">
-            <a:off x="7410450" y="3162300"/>
-            <a:ext cx="1428750" cy="209550"/>
-          </a:xfrm>
-          <a:prstGeom xmlns:a="http://schemas.openxmlformats.org/drawingml/2006/main" prst="rect">
-            <a:avLst/>
-          </a:prstGeom>
-          <a:noFill xmlns:a="http://schemas.openxmlformats.org/drawingml/2006/main"/>
-          <a:ln xmlns:a="http://schemas.openxmlformats.org/drawingml/2006/main" w="0">
-            <a:noFill/>
-            <a:prstDash val="solid"/>
-          </a:ln>
-        </p:spPr>
-        <p:txBody>
-          <a:bodyPr xmlns:a="http://schemas.openxmlformats.org/drawingml/2006/main"/>
-          <a:lstStyle xmlns:a="http://schemas.openxmlformats.org/drawingml/2006/main"/>
-          <a:p xmlns:a="http://schemas.openxmlformats.org/drawingml/2006/main">
-            <a:pPr>
-              <a:defRPr sz="1050" b="1">
-                <a:solidFill>
-                  <a:srgbClr val="C77B35"/>
-                </a:solidFill>
-              </a:defRPr>
-            </a:pPr>
-            <a:r>
-              <a:rPr sz="1050" b="1">
-                <a:solidFill>
-                  <a:srgbClr val="C77B35"/>
-                </a:solidFill>
-              </a:rPr>
-              <a:t>OPTION C</a:t>
-            </a:r>
-          </a:p>
-        </p:txBody>
-      </p:sp>
-      <p:sp>
-        <p:nvSpPr>
-          <p:cNvPr id="16" name="">
-            <a:extLst xmlns:a="http://schemas.openxmlformats.org/drawingml/2006/main">
-              <a:ext uri="{FF2B5EF4-FFF2-40B4-BE49-F238E27FC236}">
-                <a16:creationId xmlns:a16="http://schemas.microsoft.com/office/drawing/2014/main" id="{651218EC-8F1E-428C-95E3-52A6A33199E7}"/>
-              </a:ext>
-            </a:extLst>
-          </p:cNvPr>
-          <p:cNvSpPr>
-            <a:spLocks xmlns:a="http://schemas.openxmlformats.org/drawingml/2006/main" noGrp="1"/>
-          </p:cNvSpPr>
-          <p:nvPr/>
-        </p:nvSpPr>
-        <p:spPr>
-          <a:xfrm xmlns:a="http://schemas.openxmlformats.org/drawingml/2006/main">
-            <a:off x="7410450" y="3543300"/>
-            <a:ext cx="2381250" cy="666750"/>
-          </a:xfrm>
-          <a:prstGeom xmlns:a="http://schemas.openxmlformats.org/drawingml/2006/main" prst="rect">
-            <a:avLst/>
-          </a:prstGeom>
-          <a:noFill xmlns:a="http://schemas.openxmlformats.org/drawingml/2006/main"/>
-          <a:ln xmlns:a="http://schemas.openxmlformats.org/drawingml/2006/main" w="0">
-            <a:noFill/>
-            <a:prstDash val="solid"/>
-          </a:ln>
-        </p:spPr>
-        <p:txBody>
-          <a:bodyPr xmlns:a="http://schemas.openxmlformats.org/drawingml/2006/main"/>
-          <a:lstStyle xmlns:a="http://schemas.openxmlformats.org/drawingml/2006/main"/>
-          <a:p xmlns:a="http://schemas.openxmlformats.org/drawingml/2006/main">
-            <a:pPr>
-              <a:defRPr sz="1500" b="1">
-                <a:solidFill>
-                  <a:srgbClr val="142F4C"/>
-                </a:solidFill>
-              </a:defRPr>
-            </a:pPr>
-            <a:r>
-              <a:rPr sz="1500" b="1">
-                <a:solidFill>
-                  <a:srgbClr val="142F4C"/>
-                </a:solidFill>
-              </a:rPr>
-              <a:t>Option C: combine internal ownership with targeted specialist validation.</a:t>
-            </a:r>
-          </a:p>
-        </p:txBody>
-      </p:sp>
-      <p:sp>
-        <p:nvSpPr>
-          <p:cNvPr id="17" name="">
-            <a:extLst xmlns:a="http://schemas.openxmlformats.org/drawingml/2006/main">
-              <a:ext uri="{FF2B5EF4-FFF2-40B4-BE49-F238E27FC236}">
-                <a16:creationId xmlns:a16="http://schemas.microsoft.com/office/drawing/2014/main" id="{1A0C24E1-3990-4009-A5B2-F0ED0B1E82C3}"/>
+                <a16:creationId xmlns:a16="http://schemas.microsoft.com/office/drawing/2014/main" id="{11A91D1C-405E-4C0F-88F7-D48D23A4BF1D}"/>
               </a:ext>
             </a:extLst>
           </p:cNvPr>
@@ -9735,11 +9750,11 @@
             </a:avLst>
           </a:prstGeom>
           <a:solidFill xmlns:a="http://schemas.openxmlformats.org/drawingml/2006/main">
-            <a:srgbClr val="FFF6E8"/>
+            <a:srgbClr val="FDF4E7"/>
           </a:solidFill>
           <a:ln xmlns:a="http://schemas.openxmlformats.org/drawingml/2006/main" w="9525">
             <a:solidFill>
-              <a:srgbClr val="E8D1B2"/>
+              <a:srgbClr val="F0E6C8"/>
             </a:solidFill>
             <a:prstDash val="solid"/>
           </a:ln>
@@ -9747,10 +9762,10 @@
       </p:sp>
       <p:sp>
         <p:nvSpPr>
-          <p:cNvPr id="18" name="">
-            <a:extLst xmlns:a="http://schemas.openxmlformats.org/drawingml/2006/main">
-              <a:ext uri="{FF2B5EF4-FFF2-40B4-BE49-F238E27FC236}">
-                <a16:creationId xmlns:a16="http://schemas.microsoft.com/office/drawing/2014/main" id="{CD0AC121-57D1-40C8-B8A4-4D7A9DDD1F95}"/>
+          <p:cNvPr id="15" name="">
+            <a:extLst xmlns:a="http://schemas.openxmlformats.org/drawingml/2006/main">
+              <a:ext uri="{FF2B5EF4-FFF2-40B4-BE49-F238E27FC236}">
+                <a16:creationId xmlns:a16="http://schemas.microsoft.com/office/drawing/2014/main" id="{2E401B61-BAE7-45E7-9EFA-F0B0332F09B6}"/>
               </a:ext>
             </a:extLst>
           </p:cNvPr>
@@ -9790,7 +9805,7 @@
                   <a:srgbClr val="142F4C"/>
                 </a:solidFill>
               </a:rPr>
-              <a:t>Trade-off to record: Option B provides the fastest independent capability uplift but creates recurring cost and a handover dependency.</a:t>
+              <a:t>Trade-off to record: speed and specialist assurance versus internal ownership and recurring cost.</a:t>
             </a:r>
           </a:p>
         </p:txBody>
@@ -9798,7 +9813,7 @@
     </p:spTree>
     <p:extLst>
       <p:ext uri="{BB962C8B-B14F-4D97-AF65-F5344CB8AC3E}">
-        <p14:creationId xmlns:p14="http://schemas.microsoft.com/office/powerpoint/2010/main" val="1344896761"/>
+        <p14:creationId xmlns:p14="http://schemas.microsoft.com/office/powerpoint/2010/main" val="932404165"/>
       </p:ext>
     </p:extLst>
   </p:cSld>
@@ -9811,7 +9826,7 @@
     <p:bg>
       <p:bgPr>
         <a:solidFill xmlns:a="http://schemas.openxmlformats.org/drawingml/2006/main">
-          <a:srgbClr val="F7F4EE"/>
+          <a:srgbClr val="FBF9F5"/>
         </a:solidFill>
       </p:bgPr>
     </p:bg>
@@ -9829,7 +9844,7 @@
           <p:cNvPr id="30" name="">
             <a:extLst xmlns:a="http://schemas.openxmlformats.org/drawingml/2006/main">
               <a:ext uri="{FF2B5EF4-FFF2-40B4-BE49-F238E27FC236}">
-                <a16:creationId xmlns:a16="http://schemas.microsoft.com/office/drawing/2014/main" id="{DFEEE0D8-0628-4A64-9BBA-CC3EEE1A92E2}"/>
+                <a16:creationId xmlns:a16="http://schemas.microsoft.com/office/drawing/2014/main" id="{8388D8E6-9133-4964-BE6C-D32E47A962B4}"/>
               </a:ext>
             </a:extLst>
           </p:cNvPr>
@@ -9859,14 +9874,14 @@
             <a:pPr>
               <a:defRPr sz="1050" b="1">
                 <a:solidFill>
-                  <a:srgbClr val="C77B35"/>
+                  <a:srgbClr val="C9A227"/>
                 </a:solidFill>
               </a:defRPr>
             </a:pPr>
             <a:r>
               <a:rPr sz="1050" b="1">
                 <a:solidFill>
-                  <a:srgbClr val="C77B35"/>
+                  <a:srgbClr val="C9A227"/>
                 </a:solidFill>
               </a:rPr>
               <a:t>COMPREHENSIVE REVIEW · 08</a:t>
@@ -9879,7 +9894,7 @@
           <p:cNvPr id="2" name="">
             <a:extLst xmlns:a="http://schemas.openxmlformats.org/drawingml/2006/main">
               <a:ext uri="{FF2B5EF4-FFF2-40B4-BE49-F238E27FC236}">
-                <a16:creationId xmlns:a16="http://schemas.microsoft.com/office/drawing/2014/main" id="{6658BCD4-8B1C-44A8-BF10-DBA3360B3382}"/>
+                <a16:creationId xmlns:a16="http://schemas.microsoft.com/office/drawing/2014/main" id="{1B8F37B9-B527-4E05-B888-45013F4C798F}"/>
               </a:ext>
             </a:extLst>
           </p:cNvPr>
@@ -9919,7 +9934,7 @@
                   <a:srgbClr val="142F4C"/>
                 </a:solidFill>
               </a:rPr>
-              <a:t>The first 90 days should establish population, ownership and validate evidence.</a:t>
+              <a:t>The first 90 days should establish population, ownership and proof.</a:t>
             </a:r>
           </a:p>
         </p:txBody>
@@ -9929,7 +9944,7 @@
           <p:cNvPr id="3" name="">
             <a:extLst xmlns:a="http://schemas.openxmlformats.org/drawingml/2006/main">
               <a:ext uri="{FF2B5EF4-FFF2-40B4-BE49-F238E27FC236}">
-                <a16:creationId xmlns:a16="http://schemas.microsoft.com/office/drawing/2014/main" id="{2C79A460-C3B5-4708-AF5C-67F69D640008}"/>
+                <a16:creationId xmlns:a16="http://schemas.microsoft.com/office/drawing/2014/main" id="{51FB8B2F-D257-40A7-A8C2-29C71A7FB8F4}"/>
               </a:ext>
             </a:extLst>
           </p:cNvPr>
@@ -9959,14 +9974,14 @@
             <a:pPr>
               <a:defRPr sz="1350">
                 <a:solidFill>
-                  <a:srgbClr val="5E7080"/>
+                  <a:srgbClr val="5A6B7C"/>
                 </a:solidFill>
               </a:defRPr>
             </a:pPr>
             <a:r>
               <a:rPr sz="1350">
                 <a:solidFill>
-                  <a:srgbClr val="5E7080"/>
+                  <a:srgbClr val="5A6B7C"/>
                 </a:solidFill>
               </a:rPr>
               <a:t>Sequence the work so early progress creates a reliable control baseline.</a:t>
@@ -9979,7 +9994,7 @@
           <p:cNvPr id="4" name="">
             <a:extLst xmlns:a="http://schemas.openxmlformats.org/drawingml/2006/main">
               <a:ext uri="{FF2B5EF4-FFF2-40B4-BE49-F238E27FC236}">
-                <a16:creationId xmlns:a16="http://schemas.microsoft.com/office/drawing/2014/main" id="{50740E8D-C801-4448-AB04-D6617E259BA4}"/>
+                <a16:creationId xmlns:a16="http://schemas.microsoft.com/office/drawing/2014/main" id="{E5422FDD-64F7-4039-B987-46F39EB03020}"/>
               </a:ext>
             </a:extLst>
           </p:cNvPr>
@@ -9999,7 +10014,7 @@
           <a:noFill xmlns:a="http://schemas.openxmlformats.org/drawingml/2006/main"/>
           <a:ln xmlns:a="http://schemas.openxmlformats.org/drawingml/2006/main" w="9525">
             <a:solidFill>
-              <a:srgbClr val="D8E0E5"/>
+              <a:srgbClr val="D9E1E7"/>
             </a:solidFill>
             <a:prstDash val="solid"/>
           </a:ln>
@@ -10010,7 +10025,7 @@
           <p:cNvPr id="5" name="">
             <a:extLst xmlns:a="http://schemas.openxmlformats.org/drawingml/2006/main">
               <a:ext uri="{FF2B5EF4-FFF2-40B4-BE49-F238E27FC236}">
-                <a16:creationId xmlns:a16="http://schemas.microsoft.com/office/drawing/2014/main" id="{954572F7-B78C-47DC-B7CC-27F91E2FFDBA}"/>
+                <a16:creationId xmlns:a16="http://schemas.microsoft.com/office/drawing/2014/main" id="{2D18402A-C54F-4C5D-B7A6-AF5BB395377D}"/>
               </a:ext>
             </a:extLst>
           </p:cNvPr>
@@ -10040,14 +10055,14 @@
             <a:pPr>
               <a:defRPr sz="975">
                 <a:solidFill>
-                  <a:srgbClr val="5E7080"/>
+                  <a:srgbClr val="5A6B7C"/>
                 </a:solidFill>
               </a:defRPr>
             </a:pPr>
             <a:r>
               <a:rPr sz="975">
                 <a:solidFill>
-                  <a:srgbClr val="5E7080"/>
+                  <a:srgbClr val="5A6B7C"/>
                 </a:solidFill>
               </a:rPr>
               <a:t>MK Fraud Readiness · Comprehensive</a:t>
@@ -10060,7 +10075,7 @@
           <p:cNvPr id="6" name="">
             <a:extLst xmlns:a="http://schemas.openxmlformats.org/drawingml/2006/main">
               <a:ext uri="{FF2B5EF4-FFF2-40B4-BE49-F238E27FC236}">
-                <a16:creationId xmlns:a16="http://schemas.microsoft.com/office/drawing/2014/main" id="{A65D6C95-6774-4419-AE86-988EF5E2C886}"/>
+                <a16:creationId xmlns:a16="http://schemas.microsoft.com/office/drawing/2014/main" id="{C4430E4B-7852-4C82-8F4B-6B0AF3A7DC8B}"/>
               </a:ext>
             </a:extLst>
           </p:cNvPr>
@@ -10090,14 +10105,14 @@
             <a:pPr algn="r">
               <a:defRPr sz="975">
                 <a:solidFill>
-                  <a:srgbClr val="5E7080"/>
+                  <a:srgbClr val="5A6B7C"/>
                 </a:solidFill>
               </a:defRPr>
             </a:pPr>
             <a:r>
               <a:rPr sz="975">
                 <a:solidFill>
-                  <a:srgbClr val="5E7080"/>
+                  <a:srgbClr val="5A6B7C"/>
                 </a:solidFill>
               </a:rPr>
               <a:t>08 / 10</a:t>
@@ -10110,7 +10125,7 @@
           <p:cNvPr id="7" name="">
             <a:extLst xmlns:a="http://schemas.openxmlformats.org/drawingml/2006/main">
               <a:ext uri="{FF2B5EF4-FFF2-40B4-BE49-F238E27FC236}">
-                <a16:creationId xmlns:a16="http://schemas.microsoft.com/office/drawing/2014/main" id="{CA2AF544-8F55-4391-AC92-C50C276CE37C}"/>
+                <a16:creationId xmlns:a16="http://schemas.microsoft.com/office/drawing/2014/main" id="{B710A16F-CEF1-40A6-B3B7-04BAB6C42010}"/>
               </a:ext>
             </a:extLst>
           </p:cNvPr>
@@ -10134,7 +10149,7 @@
           </a:solidFill>
           <a:ln xmlns:a="http://schemas.openxmlformats.org/drawingml/2006/main" w="9525">
             <a:solidFill>
-              <a:srgbClr val="D8E0E5"/>
+              <a:srgbClr val="D9E1E7"/>
             </a:solidFill>
             <a:prstDash val="solid"/>
           </a:ln>
@@ -10145,7 +10160,7 @@
           <p:cNvPr id="8" name="">
             <a:extLst xmlns:a="http://schemas.openxmlformats.org/drawingml/2006/main">
               <a:ext uri="{FF2B5EF4-FFF2-40B4-BE49-F238E27FC236}">
-                <a16:creationId xmlns:a16="http://schemas.microsoft.com/office/drawing/2014/main" id="{B4BBA3C0-810C-4D36-A4EA-56DE46F122A1}"/>
+                <a16:creationId xmlns:a16="http://schemas.microsoft.com/office/drawing/2014/main" id="{352B7E47-F11C-4612-9A36-31B991240743}"/>
               </a:ext>
             </a:extLst>
           </p:cNvPr>
@@ -10163,7 +10178,7 @@
             <a:avLst/>
           </a:prstGeom>
           <a:solidFill xmlns:a="http://schemas.openxmlformats.org/drawingml/2006/main">
-            <a:srgbClr val="C77B35"/>
+            <a:srgbClr val="C9A227"/>
           </a:solidFill>
           <a:ln xmlns:a="http://schemas.openxmlformats.org/drawingml/2006/main" w="0">
             <a:solidFill>
@@ -10178,7 +10193,7 @@
           <p:cNvPr id="9" name="">
             <a:extLst xmlns:a="http://schemas.openxmlformats.org/drawingml/2006/main">
               <a:ext uri="{FF2B5EF4-FFF2-40B4-BE49-F238E27FC236}">
-                <a16:creationId xmlns:a16="http://schemas.microsoft.com/office/drawing/2014/main" id="{93B905FF-77DB-4F5B-98CA-4135EACA4600}"/>
+                <a16:creationId xmlns:a16="http://schemas.microsoft.com/office/drawing/2014/main" id="{9DC598B1-15FE-46DC-9E9C-FABF092147E5}"/>
               </a:ext>
             </a:extLst>
           </p:cNvPr>
@@ -10228,7 +10243,7 @@
           <p:cNvPr id="10" name="">
             <a:extLst xmlns:a="http://schemas.openxmlformats.org/drawingml/2006/main">
               <a:ext uri="{FF2B5EF4-FFF2-40B4-BE49-F238E27FC236}">
-                <a16:creationId xmlns:a16="http://schemas.microsoft.com/office/drawing/2014/main" id="{B9B23953-3509-428F-BE70-9F8A63BBE0EB}"/>
+                <a16:creationId xmlns:a16="http://schemas.microsoft.com/office/drawing/2014/main" id="{7A0C76DA-C8AE-44E9-A7A7-7B72AB0F1A4F}"/>
               </a:ext>
             </a:extLst>
           </p:cNvPr>
@@ -10246,11 +10261,11 @@
             <a:avLst/>
           </a:prstGeom>
           <a:solidFill xmlns:a="http://schemas.openxmlformats.org/drawingml/2006/main">
-            <a:srgbClr val="C77B35"/>
+            <a:srgbClr val="C9A227"/>
           </a:solidFill>
           <a:ln xmlns:a="http://schemas.openxmlformats.org/drawingml/2006/main" w="0">
             <a:solidFill>
-              <a:srgbClr val="C77B35"/>
+              <a:srgbClr val="C9A227"/>
             </a:solidFill>
             <a:prstDash val="solid"/>
           </a:ln>
@@ -10261,7 +10276,7 @@
           <p:cNvPr id="11" name="">
             <a:extLst xmlns:a="http://schemas.openxmlformats.org/drawingml/2006/main">
               <a:ext uri="{FF2B5EF4-FFF2-40B4-BE49-F238E27FC236}">
-                <a16:creationId xmlns:a16="http://schemas.microsoft.com/office/drawing/2014/main" id="{2A75040F-FD6D-479B-A14C-38311A40C55C}"/>
+                <a16:creationId xmlns:a16="http://schemas.microsoft.com/office/drawing/2014/main" id="{5B82229F-048D-4731-9834-0EB6DC8E9C9C}"/>
               </a:ext>
             </a:extLst>
           </p:cNvPr>
@@ -10291,17 +10306,17 @@
             <a:pPr>
               <a:defRPr sz="1125">
                 <a:solidFill>
-                  <a:srgbClr val="172232"/>
+                  <a:srgbClr val="1A2634"/>
                 </a:solidFill>
               </a:defRPr>
             </a:pPr>
             <a:r>
               <a:rPr sz="1125">
                 <a:solidFill>
-                  <a:srgbClr val="172232"/>
-                </a:solidFill>
-              </a:rPr>
-              <a:t>Approve the detection ownership mandate and first evidence cycle.</a:t>
+                  <a:srgbClr val="1A2634"/>
+                </a:solidFill>
+              </a:rPr>
+              <a:t>Apply immediate escalation at "Any assurance reviewer assigned operational ownership of the control under review." and deliver the exact control design: The CEO and audit-committee chair must approve a RACI that assigns control operation to management and risk owners, reserves independent testing and unrestricted reporting for internal audit or equivalent assurance, and requires annual conflict review; the company secretary retains the approved RACI and minutes.</a:t>
             </a:r>
           </a:p>
         </p:txBody>
@@ -10311,7 +10326,7 @@
           <p:cNvPr id="12" name="">
             <a:extLst xmlns:a="http://schemas.openxmlformats.org/drawingml/2006/main">
               <a:ext uri="{FF2B5EF4-FFF2-40B4-BE49-F238E27FC236}">
-                <a16:creationId xmlns:a16="http://schemas.microsoft.com/office/drawing/2014/main" id="{18DA03B5-44DC-422D-AC2B-6BCDFA583953}"/>
+                <a16:creationId xmlns:a16="http://schemas.microsoft.com/office/drawing/2014/main" id="{76929064-50B9-46D4-BF06-154CE6D984A0}"/>
               </a:ext>
             </a:extLst>
           </p:cNvPr>
@@ -10329,11 +10344,11 @@
             <a:avLst/>
           </a:prstGeom>
           <a:solidFill xmlns:a="http://schemas.openxmlformats.org/drawingml/2006/main">
-            <a:srgbClr val="C77B35"/>
+            <a:srgbClr val="C9A227"/>
           </a:solidFill>
           <a:ln xmlns:a="http://schemas.openxmlformats.org/drawingml/2006/main" w="0">
             <a:solidFill>
-              <a:srgbClr val="C77B35"/>
+              <a:srgbClr val="C9A227"/>
             </a:solidFill>
             <a:prstDash val="solid"/>
           </a:ln>
@@ -10344,7 +10359,7 @@
           <p:cNvPr id="13" name="">
             <a:extLst xmlns:a="http://schemas.openxmlformats.org/drawingml/2006/main">
               <a:ext uri="{FF2B5EF4-FFF2-40B4-BE49-F238E27FC236}">
-                <a16:creationId xmlns:a16="http://schemas.microsoft.com/office/drawing/2014/main" id="{43F28805-C9A8-4986-B9B5-CC5476A959AF}"/>
+                <a16:creationId xmlns:a16="http://schemas.microsoft.com/office/drawing/2014/main" id="{41824608-EC96-429A-84FC-569459687FCE}"/>
               </a:ext>
             </a:extLst>
           </p:cNvPr>
@@ -10374,17 +10389,17 @@
             <a:pPr>
               <a:defRPr sz="1125">
                 <a:solidFill>
-                  <a:srgbClr val="172232"/>
+                  <a:srgbClr val="1A2634"/>
                 </a:solidFill>
               </a:defRPr>
             </a:pPr>
             <a:r>
               <a:rPr sz="1125">
                 <a:solidFill>
-                  <a:srgbClr val="172232"/>
-                </a:solidFill>
-              </a:rPr>
-              <a:t>Run the first fixed-cycle detection tuning review.</a:t>
+                  <a:srgbClr val="1A2634"/>
+                </a:solidFill>
+              </a:rPr>
+              <a:t>Apply immediate escalation at "A qualifying matter escalated late, or an escalation routed only through an implicated manager." and deliver the exact control design: The Head of Risk must publish escalation criteria defining what must be escalated, to whom and within what time, grant monitoring staff explicit authority to escalate directly to the fraud-risk executive or audit-committee chair where a manager is implicated, protect escalators from retaliation, train the monitoring team annually, and review escalation timeliness against criteria each quarter.</a:t>
             </a:r>
           </a:p>
         </p:txBody>
@@ -10394,7 +10409,7 @@
           <p:cNvPr id="14" name="">
             <a:extLst xmlns:a="http://schemas.openxmlformats.org/drawingml/2006/main">
               <a:ext uri="{FF2B5EF4-FFF2-40B4-BE49-F238E27FC236}">
-                <a16:creationId xmlns:a16="http://schemas.microsoft.com/office/drawing/2014/main" id="{2D941966-D798-40E3-8A9D-F0A558B43DC7}"/>
+                <a16:creationId xmlns:a16="http://schemas.microsoft.com/office/drawing/2014/main" id="{355F8660-0F2A-4ACA-AB8E-02895BA8EBA6}"/>
               </a:ext>
             </a:extLst>
           </p:cNvPr>
@@ -10412,11 +10427,11 @@
             <a:avLst/>
           </a:prstGeom>
           <a:solidFill xmlns:a="http://schemas.openxmlformats.org/drawingml/2006/main">
-            <a:srgbClr val="C77B35"/>
+            <a:srgbClr val="C9A227"/>
           </a:solidFill>
           <a:ln xmlns:a="http://schemas.openxmlformats.org/drawingml/2006/main" w="0">
             <a:solidFill>
-              <a:srgbClr val="C77B35"/>
+              <a:srgbClr val="C9A227"/>
             </a:solidFill>
             <a:prstDash val="solid"/>
           </a:ln>
@@ -10427,7 +10442,7 @@
           <p:cNvPr id="15" name="">
             <a:extLst xmlns:a="http://schemas.openxmlformats.org/drawingml/2006/main">
               <a:ext uri="{FF2B5EF4-FFF2-40B4-BE49-F238E27FC236}">
-                <a16:creationId xmlns:a16="http://schemas.microsoft.com/office/drawing/2014/main" id="{6DA88164-0A6B-47F3-954F-B3D74DD404A3}"/>
+                <a16:creationId xmlns:a16="http://schemas.microsoft.com/office/drawing/2014/main" id="{417C798B-B557-473D-A2FE-E1366A09B1D5}"/>
               </a:ext>
             </a:extLst>
           </p:cNvPr>
@@ -10457,17 +10472,17 @@
             <a:pPr>
               <a:defRPr sz="1125">
                 <a:solidFill>
-                  <a:srgbClr val="172232"/>
+                  <a:srgbClr val="1A2634"/>
                 </a:solidFill>
               </a:defRPr>
             </a:pPr>
             <a:r>
               <a:rPr sz="1125">
                 <a:solidFill>
-                  <a:srgbClr val="172232"/>
-                </a:solidFill>
-              </a:rPr>
-              <a:t>Review segregation-of-duties overrides and expiry.</a:t>
+                  <a:srgbClr val="1A2634"/>
+                </a:solidFill>
+              </a:rPr>
+              <a:t>Apply immediate escalation at "Any site or worker group below the awareness threshold, or reporting material not reaching non-desk staff." and deliver the exact control design: The ethics owner must publish reporting routes in plain language across the channels the workforce actually uses — induction packs, payslip inserts, notice boards at depots and sites, intranet and supervisor briefings — covering line manager, confidential channel and conflict-free alternate route; awareness is tested periodically by short survey or spot check, and results below threshold trigger a targeted re-communication for the affected sites or teams.</a:t>
             </a:r>
           </a:p>
         </p:txBody>
@@ -10477,7 +10492,7 @@
           <p:cNvPr id="16" name="">
             <a:extLst xmlns:a="http://schemas.openxmlformats.org/drawingml/2006/main">
               <a:ext uri="{FF2B5EF4-FFF2-40B4-BE49-F238E27FC236}">
-                <a16:creationId xmlns:a16="http://schemas.microsoft.com/office/drawing/2014/main" id="{6ADE0FC4-51BE-442B-B752-926CD9601D9E}"/>
+                <a16:creationId xmlns:a16="http://schemas.microsoft.com/office/drawing/2014/main" id="{76F91380-BAF0-4DF7-86B8-B8C344F97AB6}"/>
               </a:ext>
             </a:extLst>
           </p:cNvPr>
@@ -10501,7 +10516,7 @@
           </a:solidFill>
           <a:ln xmlns:a="http://schemas.openxmlformats.org/drawingml/2006/main" w="9525">
             <a:solidFill>
-              <a:srgbClr val="D8E0E5"/>
+              <a:srgbClr val="D9E1E7"/>
             </a:solidFill>
             <a:prstDash val="solid"/>
           </a:ln>
@@ -10512,7 +10527,7 @@
           <p:cNvPr id="17" name="">
             <a:extLst xmlns:a="http://schemas.openxmlformats.org/drawingml/2006/main">
               <a:ext uri="{FF2B5EF4-FFF2-40B4-BE49-F238E27FC236}">
-                <a16:creationId xmlns:a16="http://schemas.microsoft.com/office/drawing/2014/main" id="{9D28EAFC-E19F-4C15-92DC-A422817465CF}"/>
+                <a16:creationId xmlns:a16="http://schemas.microsoft.com/office/drawing/2014/main" id="{8D8A8EE0-3825-48C5-B867-1CDA8A082D05}"/>
               </a:ext>
             </a:extLst>
           </p:cNvPr>
@@ -10545,7 +10560,7 @@
           <p:cNvPr id="18" name="">
             <a:extLst xmlns:a="http://schemas.openxmlformats.org/drawingml/2006/main">
               <a:ext uri="{FF2B5EF4-FFF2-40B4-BE49-F238E27FC236}">
-                <a16:creationId xmlns:a16="http://schemas.microsoft.com/office/drawing/2014/main" id="{46BCEDDE-B5C0-4DD0-9ABA-502EAA5B17CE}"/>
+                <a16:creationId xmlns:a16="http://schemas.microsoft.com/office/drawing/2014/main" id="{A93FA607-54CD-43BD-B382-16E202AACC45}"/>
               </a:ext>
             </a:extLst>
           </p:cNvPr>
@@ -10595,7 +10610,7 @@
           <p:cNvPr id="19" name="">
             <a:extLst xmlns:a="http://schemas.openxmlformats.org/drawingml/2006/main">
               <a:ext uri="{FF2B5EF4-FFF2-40B4-BE49-F238E27FC236}">
-                <a16:creationId xmlns:a16="http://schemas.microsoft.com/office/drawing/2014/main" id="{6F3B1EEC-53DD-4804-A2A5-F61DA296662B}"/>
+                <a16:creationId xmlns:a16="http://schemas.microsoft.com/office/drawing/2014/main" id="{86A6BDD0-C926-45B2-B76B-B4D19D76DACE}"/>
               </a:ext>
             </a:extLst>
           </p:cNvPr>
@@ -10613,11 +10628,11 @@
             <a:avLst/>
           </a:prstGeom>
           <a:solidFill xmlns:a="http://schemas.openxmlformats.org/drawingml/2006/main">
-            <a:srgbClr val="C77B35"/>
+            <a:srgbClr val="C9A227"/>
           </a:solidFill>
           <a:ln xmlns:a="http://schemas.openxmlformats.org/drawingml/2006/main" w="0">
             <a:solidFill>
-              <a:srgbClr val="C77B35"/>
+              <a:srgbClr val="C9A227"/>
             </a:solidFill>
             <a:prstDash val="solid"/>
           </a:ln>
@@ -10628,7 +10643,7 @@
           <p:cNvPr id="20" name="">
             <a:extLst xmlns:a="http://schemas.openxmlformats.org/drawingml/2006/main">
               <a:ext uri="{FF2B5EF4-FFF2-40B4-BE49-F238E27FC236}">
-                <a16:creationId xmlns:a16="http://schemas.microsoft.com/office/drawing/2014/main" id="{E2262FDE-1FB6-42CC-A1B9-5AE9F6B077D6}"/>
+                <a16:creationId xmlns:a16="http://schemas.microsoft.com/office/drawing/2014/main" id="{DA35D03A-0D5E-4C0D-81EF-E6031302DDD6}"/>
               </a:ext>
             </a:extLst>
           </p:cNvPr>
@@ -10658,17 +10673,17 @@
             <a:pPr>
               <a:defRPr sz="1125">
                 <a:solidFill>
-                  <a:srgbClr val="172232"/>
+                  <a:srgbClr val="1A2634"/>
                 </a:solidFill>
               </a:defRPr>
             </a:pPr>
             <a:r>
               <a:rPr sz="1125">
                 <a:solidFill>
-                  <a:srgbClr val="172232"/>
-                </a:solidFill>
-              </a:rPr>
-              <a:t>Reconcile supplier bank-detail changes and add independent verification.</a:t>
+                  <a:srgbClr val="1A2634"/>
+                </a:solidFill>
+              </a:rPr>
+              <a:t>Apply immediate escalation at "Any unknown or unjustified privileged account, missed recertification or leaver access beyond 24 hours." and deliver the exact control design: IT Security maintains a complete privileged-account register, links each human and service account to an owner and approved justification, enforces separate named admin identities and MFA, records privileged sessions, and sends the full population quarterly to system owners and Risk for independent keep/remove certification; removals close within 24 hours for leavers and five business days otherwise.</a:t>
             </a:r>
           </a:p>
         </p:txBody>
@@ -10678,7 +10693,7 @@
           <p:cNvPr id="21" name="">
             <a:extLst xmlns:a="http://schemas.openxmlformats.org/drawingml/2006/main">
               <a:ext uri="{FF2B5EF4-FFF2-40B4-BE49-F238E27FC236}">
-                <a16:creationId xmlns:a16="http://schemas.microsoft.com/office/drawing/2014/main" id="{63664F76-A3C5-4DB9-AFEA-12431CEEFCE2}"/>
+                <a16:creationId xmlns:a16="http://schemas.microsoft.com/office/drawing/2014/main" id="{714BE13F-7F7E-49ED-BF44-2411C909FBAA}"/>
               </a:ext>
             </a:extLst>
           </p:cNvPr>
@@ -10696,11 +10711,11 @@
             <a:avLst/>
           </a:prstGeom>
           <a:solidFill xmlns:a="http://schemas.openxmlformats.org/drawingml/2006/main">
-            <a:srgbClr val="C77B35"/>
+            <a:srgbClr val="C9A227"/>
           </a:solidFill>
           <a:ln xmlns:a="http://schemas.openxmlformats.org/drawingml/2006/main" w="0">
             <a:solidFill>
-              <a:srgbClr val="C77B35"/>
+              <a:srgbClr val="C9A227"/>
             </a:solidFill>
             <a:prstDash val="solid"/>
           </a:ln>
@@ -10711,7 +10726,7 @@
           <p:cNvPr id="22" name="">
             <a:extLst xmlns:a="http://schemas.openxmlformats.org/drawingml/2006/main">
               <a:ext uri="{FF2B5EF4-FFF2-40B4-BE49-F238E27FC236}">
-                <a16:creationId xmlns:a16="http://schemas.microsoft.com/office/drawing/2014/main" id="{E289DD65-C1EA-4527-9BEC-E55D63CA9E0B}"/>
+                <a16:creationId xmlns:a16="http://schemas.microsoft.com/office/drawing/2014/main" id="{D2887FB6-5399-4679-8EF1-8A8803F39143}"/>
               </a:ext>
             </a:extLst>
           </p:cNvPr>
@@ -10741,17 +10756,17 @@
             <a:pPr>
               <a:defRPr sz="1125">
                 <a:solidFill>
-                  <a:srgbClr val="172232"/>
+                  <a:srgbClr val="1A2634"/>
                 </a:solidFill>
               </a:defRPr>
             </a:pPr>
             <a:r>
               <a:rPr sz="1125">
                 <a:solidFill>
-                  <a:srgbClr val="172232"/>
-                </a:solidFill>
-              </a:rPr>
-              <a:t>Reconcile role-based awareness coverage.</a:t>
+                  <a:srgbClr val="1A2634"/>
+                </a:solidFill>
+              </a:rPr>
+              <a:t>Apply immediate escalation at "Activation before verification, an unapproved exception, or a sensitive change without re-verification." and deliver the exact control design: The process owner must define the risk points requiring verification — customer or beneficiary enrolment, employee onboarding, supplier activation and counterparty contracting — and apply proportionate checks against independent sources such as identity documents validated for authenticity, company registration records, and confirmation of contact details through independently obtained channels; results and evidence are retained under applicable data-protection obligations, exceptions require documented approval, and sensitive profile or banking changes trigger re-verification.</a:t>
             </a:r>
           </a:p>
         </p:txBody>
@@ -10761,7 +10776,7 @@
           <p:cNvPr id="23" name="">
             <a:extLst xmlns:a="http://schemas.openxmlformats.org/drawingml/2006/main">
               <a:ext uri="{FF2B5EF4-FFF2-40B4-BE49-F238E27FC236}">
-                <a16:creationId xmlns:a16="http://schemas.microsoft.com/office/drawing/2014/main" id="{70644F31-F2BB-49D9-8452-CC61DDBE2A79}"/>
+                <a16:creationId xmlns:a16="http://schemas.microsoft.com/office/drawing/2014/main" id="{F0542B61-0ED0-43AF-9284-5DAE5DCCC1B4}"/>
               </a:ext>
             </a:extLst>
           </p:cNvPr>
@@ -10779,11 +10794,11 @@
             <a:avLst/>
           </a:prstGeom>
           <a:solidFill xmlns:a="http://schemas.openxmlformats.org/drawingml/2006/main">
-            <a:srgbClr val="C77B35"/>
+            <a:srgbClr val="C9A227"/>
           </a:solidFill>
           <a:ln xmlns:a="http://schemas.openxmlformats.org/drawingml/2006/main" w="0">
             <a:solidFill>
-              <a:srgbClr val="C77B35"/>
+              <a:srgbClr val="C9A227"/>
             </a:solidFill>
             <a:prstDash val="solid"/>
           </a:ln>
@@ -10794,7 +10809,7 @@
           <p:cNvPr id="24" name="">
             <a:extLst xmlns:a="http://schemas.openxmlformats.org/drawingml/2006/main">
               <a:ext uri="{FF2B5EF4-FFF2-40B4-BE49-F238E27FC236}">
-                <a16:creationId xmlns:a16="http://schemas.microsoft.com/office/drawing/2014/main" id="{F4E9E7F1-0928-4D40-912F-831605668E2D}"/>
+                <a16:creationId xmlns:a16="http://schemas.microsoft.com/office/drawing/2014/main" id="{E7E00D07-B1CC-42CF-880D-526F86BABB38}"/>
               </a:ext>
             </a:extLst>
           </p:cNvPr>
@@ -10824,17 +10839,17 @@
             <a:pPr>
               <a:defRPr sz="1125">
                 <a:solidFill>
-                  <a:srgbClr val="172232"/>
+                  <a:srgbClr val="1A2634"/>
                 </a:solidFill>
               </a:defRPr>
             </a:pPr>
             <a:r>
               <a:rPr sz="1125">
                 <a:solidFill>
-                  <a:srgbClr val="172232"/>
-                </a:solidFill>
-              </a:rPr>
-              <a:t>Link incident closure to root cause and control improvement.</a:t>
+                  <a:srgbClr val="1A2634"/>
+                </a:solidFill>
+              </a:rPr>
+              <a:t>Apply immediate escalation at "Any unexplained custody gap, integrity mismatch or unauthorised repository access." and deliver the exact control design: The investigation lead opens an evidence register for every material case; trained custodians identify sources, create forensic copies or sealed originals, record hashes/seal numbers, collector/time/location and every transfer, store evidence in access-controlled repositories, and escalate any custody break immediately to Legal.</a:t>
             </a:r>
           </a:p>
         </p:txBody>
@@ -10844,7 +10859,7 @@
           <p:cNvPr id="25" name="">
             <a:extLst xmlns:a="http://schemas.openxmlformats.org/drawingml/2006/main">
               <a:ext uri="{FF2B5EF4-FFF2-40B4-BE49-F238E27FC236}">
-                <a16:creationId xmlns:a16="http://schemas.microsoft.com/office/drawing/2014/main" id="{5C6C516D-7CE3-41D4-AA5A-3D65B6FD07CD}"/>
+                <a16:creationId xmlns:a16="http://schemas.microsoft.com/office/drawing/2014/main" id="{1641B858-7F67-43FA-A106-31167B4744C9}"/>
               </a:ext>
             </a:extLst>
           </p:cNvPr>
@@ -10868,7 +10883,7 @@
           </a:solidFill>
           <a:ln xmlns:a="http://schemas.openxmlformats.org/drawingml/2006/main" w="9525">
             <a:solidFill>
-              <a:srgbClr val="D8E0E5"/>
+              <a:srgbClr val="D9E1E7"/>
             </a:solidFill>
             <a:prstDash val="solid"/>
           </a:ln>
@@ -10879,7 +10894,7 @@
           <p:cNvPr id="26" name="">
             <a:extLst xmlns:a="http://schemas.openxmlformats.org/drawingml/2006/main">
               <a:ext uri="{FF2B5EF4-FFF2-40B4-BE49-F238E27FC236}">
-                <a16:creationId xmlns:a16="http://schemas.microsoft.com/office/drawing/2014/main" id="{52369FB7-2FFB-4BF3-9BB4-373786720B05}"/>
+                <a16:creationId xmlns:a16="http://schemas.microsoft.com/office/drawing/2014/main" id="{44DBF087-D7F2-42E2-BA94-C24F2EB23CD9}"/>
               </a:ext>
             </a:extLst>
           </p:cNvPr>
@@ -10897,7 +10912,7 @@
             <a:avLst/>
           </a:prstGeom>
           <a:solidFill xmlns:a="http://schemas.openxmlformats.org/drawingml/2006/main">
-            <a:srgbClr val="2D7C57"/>
+            <a:srgbClr val="1F6B4A"/>
           </a:solidFill>
           <a:ln xmlns:a="http://schemas.openxmlformats.org/drawingml/2006/main" w="0">
             <a:solidFill>
@@ -10912,7 +10927,7 @@
           <p:cNvPr id="27" name="">
             <a:extLst xmlns:a="http://schemas.openxmlformats.org/drawingml/2006/main">
               <a:ext uri="{FF2B5EF4-FFF2-40B4-BE49-F238E27FC236}">
-                <a16:creationId xmlns:a16="http://schemas.microsoft.com/office/drawing/2014/main" id="{CCE0B0D3-F859-4CB6-AAC3-C6DBF034ECBE}"/>
+                <a16:creationId xmlns:a16="http://schemas.microsoft.com/office/drawing/2014/main" id="{6FAE0803-EF7C-448D-9D17-C02B9325B388}"/>
               </a:ext>
             </a:extLst>
           </p:cNvPr>
@@ -10962,7 +10977,7 @@
           <p:cNvPr id="28" name="">
             <a:extLst xmlns:a="http://schemas.openxmlformats.org/drawingml/2006/main">
               <a:ext uri="{FF2B5EF4-FFF2-40B4-BE49-F238E27FC236}">
-                <a16:creationId xmlns:a16="http://schemas.microsoft.com/office/drawing/2014/main" id="{2E223064-4F57-474F-9A42-202C7703718F}"/>
+                <a16:creationId xmlns:a16="http://schemas.microsoft.com/office/drawing/2014/main" id="{EC64CFBD-C284-4B29-8356-3FDB5F8A73D3}"/>
               </a:ext>
             </a:extLst>
           </p:cNvPr>
@@ -10980,11 +10995,11 @@
             <a:avLst/>
           </a:prstGeom>
           <a:solidFill xmlns:a="http://schemas.openxmlformats.org/drawingml/2006/main">
-            <a:srgbClr val="C77B35"/>
+            <a:srgbClr val="C9A227"/>
           </a:solidFill>
           <a:ln xmlns:a="http://schemas.openxmlformats.org/drawingml/2006/main" w="0">
             <a:solidFill>
-              <a:srgbClr val="C77B35"/>
+              <a:srgbClr val="C9A227"/>
             </a:solidFill>
             <a:prstDash val="solid"/>
           </a:ln>
@@ -10995,7 +11010,7 @@
           <p:cNvPr id="29" name="">
             <a:extLst xmlns:a="http://schemas.openxmlformats.org/drawingml/2006/main">
               <a:ext uri="{FF2B5EF4-FFF2-40B4-BE49-F238E27FC236}">
-                <a16:creationId xmlns:a16="http://schemas.microsoft.com/office/drawing/2014/main" id="{292EFCBA-55EB-4EA9-BE21-F75C9CB346B0}"/>
+                <a16:creationId xmlns:a16="http://schemas.microsoft.com/office/drawing/2014/main" id="{D5FDAE56-9C07-45D1-99CC-387903282823}"/>
               </a:ext>
             </a:extLst>
           </p:cNvPr>
@@ -11025,17 +11040,17 @@
             <a:pPr>
               <a:defRPr sz="1125">
                 <a:solidFill>
-                  <a:srgbClr val="172232"/>
+                  <a:srgbClr val="1A2634"/>
                 </a:solidFill>
               </a:defRPr>
             </a:pPr>
             <a:r>
               <a:rPr sz="1125">
                 <a:solidFill>
-                  <a:srgbClr val="172232"/>
-                </a:solidFill>
-              </a:rPr>
-              <a:t>Approve the detection ownership mandate and first evidence cycle.</a:t>
+                  <a:srgbClr val="1A2634"/>
+                </a:solidFill>
+              </a:rPr>
+              <a:t>No committed actions recorded for this period.</a:t>
             </a:r>
           </a:p>
         </p:txBody>
@@ -11043,7 +11058,7 @@
     </p:spTree>
     <p:extLst>
       <p:ext uri="{BB962C8B-B14F-4D97-AF65-F5344CB8AC3E}">
-        <p14:creationId xmlns:p14="http://schemas.microsoft.com/office/powerpoint/2010/main" val="897711932"/>
+        <p14:creationId xmlns:p14="http://schemas.microsoft.com/office/powerpoint/2010/main" val="1780521077"/>
       </p:ext>
     </p:extLst>
   </p:cSld>
@@ -11056,7 +11071,7 @@
     <p:bg>
       <p:bgPr>
         <a:solidFill xmlns:a="http://schemas.openxmlformats.org/drawingml/2006/main">
-          <a:srgbClr val="F7F4EE"/>
+          <a:srgbClr val="FBF9F5"/>
         </a:solidFill>
       </p:bgPr>
     </p:bg>
@@ -11074,7 +11089,7 @@
           <p:cNvPr id="35" name="">
             <a:extLst xmlns:a="http://schemas.openxmlformats.org/drawingml/2006/main">
               <a:ext uri="{FF2B5EF4-FFF2-40B4-BE49-F238E27FC236}">
-                <a16:creationId xmlns:a16="http://schemas.microsoft.com/office/drawing/2014/main" id="{710897A6-A405-4A68-8C4E-EDD3309E2164}"/>
+                <a16:creationId xmlns:a16="http://schemas.microsoft.com/office/drawing/2014/main" id="{135C064E-F344-4289-A495-3C13368BE05C}"/>
               </a:ext>
             </a:extLst>
           </p:cNvPr>
@@ -11104,14 +11119,14 @@
             <a:pPr>
               <a:defRPr sz="1050" b="1">
                 <a:solidFill>
-                  <a:srgbClr val="C77B35"/>
+                  <a:srgbClr val="C9A227"/>
                 </a:solidFill>
               </a:defRPr>
             </a:pPr>
             <a:r>
               <a:rPr sz="1050" b="1">
                 <a:solidFill>
-                  <a:srgbClr val="C77B35"/>
+                  <a:srgbClr val="C9A227"/>
                 </a:solidFill>
               </a:rPr>
               <a:t>COMPREHENSIVE REVIEW · 09</a:t>
@@ -11124,7 +11139,7 @@
           <p:cNvPr id="2" name="">
             <a:extLst xmlns:a="http://schemas.openxmlformats.org/drawingml/2006/main">
               <a:ext uri="{FF2B5EF4-FFF2-40B4-BE49-F238E27FC236}">
-                <a16:creationId xmlns:a16="http://schemas.microsoft.com/office/drawing/2014/main" id="{0F541675-5D7F-4D96-BA41-8C4AD23172EE}"/>
+                <a16:creationId xmlns:a16="http://schemas.microsoft.com/office/drawing/2014/main" id="{6B7C6EB7-DFE1-4D15-A74A-D9EB48BA3119}"/>
               </a:ext>
             </a:extLst>
           </p:cNvPr>
@@ -11174,7 +11189,7 @@
           <p:cNvPr id="3" name="">
             <a:extLst xmlns:a="http://schemas.openxmlformats.org/drawingml/2006/main">
               <a:ext uri="{FF2B5EF4-FFF2-40B4-BE49-F238E27FC236}">
-                <a16:creationId xmlns:a16="http://schemas.microsoft.com/office/drawing/2014/main" id="{597A45E7-E8EA-4A93-915B-4295D5E74AE7}"/>
+                <a16:creationId xmlns:a16="http://schemas.microsoft.com/office/drawing/2014/main" id="{15D0DC06-4B6D-4DD9-9D7D-4DE2D8C0C812}"/>
               </a:ext>
             </a:extLst>
           </p:cNvPr>
@@ -11204,14 +11219,14 @@
             <a:pPr>
               <a:defRPr sz="1350">
                 <a:solidFill>
-                  <a:srgbClr val="5E7080"/>
+                  <a:srgbClr val="5A6B7C"/>
                 </a:solidFill>
               </a:defRPr>
             </a:pPr>
             <a:r>
               <a:rPr sz="1350">
                 <a:solidFill>
-                  <a:srgbClr val="5E7080"/>
+                  <a:srgbClr val="5A6B7C"/>
                 </a:solidFill>
               </a:rPr>
               <a:t>Accountability is the mechanism that turns advisory judgement into operating change.</a:t>
@@ -11224,7 +11239,7 @@
           <p:cNvPr id="4" name="">
             <a:extLst xmlns:a="http://schemas.openxmlformats.org/drawingml/2006/main">
               <a:ext uri="{FF2B5EF4-FFF2-40B4-BE49-F238E27FC236}">
-                <a16:creationId xmlns:a16="http://schemas.microsoft.com/office/drawing/2014/main" id="{5ABF9C91-7DFE-493D-BD79-A2D1443CBE73}"/>
+                <a16:creationId xmlns:a16="http://schemas.microsoft.com/office/drawing/2014/main" id="{216F0493-9619-4F30-982E-E46BD75B778B}"/>
               </a:ext>
             </a:extLst>
           </p:cNvPr>
@@ -11244,7 +11259,7 @@
           <a:noFill xmlns:a="http://schemas.openxmlformats.org/drawingml/2006/main"/>
           <a:ln xmlns:a="http://schemas.openxmlformats.org/drawingml/2006/main" w="9525">
             <a:solidFill>
-              <a:srgbClr val="D8E0E5"/>
+              <a:srgbClr val="D9E1E7"/>
             </a:solidFill>
             <a:prstDash val="solid"/>
           </a:ln>
@@ -11255,7 +11270,7 @@
           <p:cNvPr id="5" name="">
             <a:extLst xmlns:a="http://schemas.openxmlformats.org/drawingml/2006/main">
               <a:ext uri="{FF2B5EF4-FFF2-40B4-BE49-F238E27FC236}">
-                <a16:creationId xmlns:a16="http://schemas.microsoft.com/office/drawing/2014/main" id="{213FAD61-999A-43D0-9F3F-A59FC1200BBD}"/>
+                <a16:creationId xmlns:a16="http://schemas.microsoft.com/office/drawing/2014/main" id="{D3679ED3-91F6-4D4E-9106-DA41726977CC}"/>
               </a:ext>
             </a:extLst>
           </p:cNvPr>
@@ -11285,14 +11300,14 @@
             <a:pPr>
               <a:defRPr sz="975">
                 <a:solidFill>
-                  <a:srgbClr val="5E7080"/>
+                  <a:srgbClr val="5A6B7C"/>
                 </a:solidFill>
               </a:defRPr>
             </a:pPr>
             <a:r>
               <a:rPr sz="975">
                 <a:solidFill>
-                  <a:srgbClr val="5E7080"/>
+                  <a:srgbClr val="5A6B7C"/>
                 </a:solidFill>
               </a:rPr>
               <a:t>MK Fraud Readiness · Comprehensive</a:t>
@@ -11305,7 +11320,7 @@
           <p:cNvPr id="6" name="">
             <a:extLst xmlns:a="http://schemas.openxmlformats.org/drawingml/2006/main">
               <a:ext uri="{FF2B5EF4-FFF2-40B4-BE49-F238E27FC236}">
-                <a16:creationId xmlns:a16="http://schemas.microsoft.com/office/drawing/2014/main" id="{42C337A1-D72F-45C0-A0B9-3AF1E1493C79}"/>
+                <a16:creationId xmlns:a16="http://schemas.microsoft.com/office/drawing/2014/main" id="{A7C9EF2D-4F47-46C8-9FC2-AE6F57D248A2}"/>
               </a:ext>
             </a:extLst>
           </p:cNvPr>
@@ -11335,14 +11350,14 @@
             <a:pPr algn="r">
               <a:defRPr sz="975">
                 <a:solidFill>
-                  <a:srgbClr val="5E7080"/>
+                  <a:srgbClr val="5A6B7C"/>
                 </a:solidFill>
               </a:defRPr>
             </a:pPr>
             <a:r>
               <a:rPr sz="975">
                 <a:solidFill>
-                  <a:srgbClr val="5E7080"/>
+                  <a:srgbClr val="5A6B7C"/>
                 </a:solidFill>
               </a:rPr>
               <a:t>09 / 10</a:t>
@@ -11355,7 +11370,7 @@
           <p:cNvPr id="7" name="">
             <a:extLst xmlns:a="http://schemas.openxmlformats.org/drawingml/2006/main">
               <a:ext uri="{FF2B5EF4-FFF2-40B4-BE49-F238E27FC236}">
-                <a16:creationId xmlns:a16="http://schemas.microsoft.com/office/drawing/2014/main" id="{FEB7F918-9B5C-4305-8276-C93EF35315CF}"/>
+                <a16:creationId xmlns:a16="http://schemas.microsoft.com/office/drawing/2014/main" id="{5AB725B1-8FD9-4929-9D69-AB17AE1DB767}"/>
               </a:ext>
             </a:extLst>
           </p:cNvPr>
@@ -11375,7 +11390,7 @@
           <a:noFill xmlns:a="http://schemas.openxmlformats.org/drawingml/2006/main"/>
           <a:ln xmlns:a="http://schemas.openxmlformats.org/drawingml/2006/main" w="9525">
             <a:solidFill>
-              <a:srgbClr val="D8E0E5"/>
+              <a:srgbClr val="D9E1E7"/>
             </a:solidFill>
             <a:prstDash val="solid"/>
           </a:ln>
@@ -11386,7 +11401,7 @@
           <p:cNvPr id="8" name="">
             <a:extLst xmlns:a="http://schemas.openxmlformats.org/drawingml/2006/main">
               <a:ext uri="{FF2B5EF4-FFF2-40B4-BE49-F238E27FC236}">
-                <a16:creationId xmlns:a16="http://schemas.microsoft.com/office/drawing/2014/main" id="{0267CB09-7473-4306-B856-F0CAC41BF875}"/>
+                <a16:creationId xmlns:a16="http://schemas.microsoft.com/office/drawing/2014/main" id="{B1BB4998-8320-4B12-B493-F15F7D94EC13}"/>
               </a:ext>
             </a:extLst>
           </p:cNvPr>
@@ -11426,7 +11441,7 @@
                   <a:srgbClr val="142F4C"/>
                 </a:solidFill>
               </a:rPr>
-              <a:t>Approve the detection ownership mandate and first evidence cycle.</a:t>
+              <a:t>Apply immediate escalation at "Any assurance reviewer assigned operational ownership of the control under review." and deliver the exact control design: The CEO and audit-committee chair must approve a RACI that assigns control operation to management and risk owners, reserves independent testing and unrestricted reporting for internal audit or equivalent assurance, and requires annual conflict review; the company secretary retains the approved RACI and minutes.</a:t>
             </a:r>
           </a:p>
         </p:txBody>
@@ -11436,7 +11451,7 @@
           <p:cNvPr id="9" name="">
             <a:extLst xmlns:a="http://schemas.openxmlformats.org/drawingml/2006/main">
               <a:ext uri="{FF2B5EF4-FFF2-40B4-BE49-F238E27FC236}">
-                <a16:creationId xmlns:a16="http://schemas.microsoft.com/office/drawing/2014/main" id="{A7A94379-648A-4B0C-BBA4-78E38BA75189}"/>
+                <a16:creationId xmlns:a16="http://schemas.microsoft.com/office/drawing/2014/main" id="{242B3E60-16BA-4FC8-984D-D8CF3ED66BBF}"/>
               </a:ext>
             </a:extLst>
           </p:cNvPr>
@@ -11466,17 +11481,17 @@
             <a:pPr>
               <a:defRPr sz="1200">
                 <a:solidFill>
-                  <a:srgbClr val="172232"/>
+                  <a:srgbClr val="1A2634"/>
                 </a:solidFill>
               </a:defRPr>
             </a:pPr>
             <a:r>
               <a:rPr sz="1200">
                 <a:solidFill>
-                  <a:srgbClr val="172232"/>
-                </a:solidFill>
-              </a:rPr>
-              <a:t>Financial Controller</a:t>
+                  <a:srgbClr val="1A2634"/>
+                </a:solidFill>
+              </a:rPr>
+              <a:t>CEO / Managing Director</a:t>
             </a:r>
           </a:p>
         </p:txBody>
@@ -11486,7 +11501,7 @@
           <p:cNvPr id="10" name="">
             <a:extLst xmlns:a="http://schemas.openxmlformats.org/drawingml/2006/main">
               <a:ext uri="{FF2B5EF4-FFF2-40B4-BE49-F238E27FC236}">
-                <a16:creationId xmlns:a16="http://schemas.microsoft.com/office/drawing/2014/main" id="{854F8B33-A804-4AA5-8D18-F84D4A7534DB}"/>
+                <a16:creationId xmlns:a16="http://schemas.microsoft.com/office/drawing/2014/main" id="{8B54C04E-2715-4A7A-AEDA-3AFAE7FB7C1E}"/>
               </a:ext>
             </a:extLst>
           </p:cNvPr>
@@ -11516,14 +11531,14 @@
             <a:pPr>
               <a:defRPr sz="1200" b="1">
                 <a:solidFill>
-                  <a:srgbClr val="C77B35"/>
+                  <a:srgbClr val="C9A227"/>
                 </a:solidFill>
               </a:defRPr>
             </a:pPr>
             <a:r>
               <a:rPr sz="1200" b="1">
                 <a:solidFill>
-                  <a:srgbClr val="C77B35"/>
+                  <a:srgbClr val="C9A227"/>
                 </a:solidFill>
               </a:rPr>
               <a:t>30 days</a:t>
@@ -11536,7 +11551,7 @@
           <p:cNvPr id="11" name="">
             <a:extLst xmlns:a="http://schemas.openxmlformats.org/drawingml/2006/main">
               <a:ext uri="{FF2B5EF4-FFF2-40B4-BE49-F238E27FC236}">
-                <a16:creationId xmlns:a16="http://schemas.microsoft.com/office/drawing/2014/main" id="{9DCE19A1-89A4-4270-B306-35E9931938A3}"/>
+                <a16:creationId xmlns:a16="http://schemas.microsoft.com/office/drawing/2014/main" id="{251BDA47-5416-4637-8608-6E081B27A81C}"/>
               </a:ext>
             </a:extLst>
           </p:cNvPr>
@@ -11566,17 +11581,17 @@
             <a:pPr>
               <a:defRPr sz="1125">
                 <a:solidFill>
-                  <a:srgbClr val="5E7080"/>
+                  <a:srgbClr val="5A6B7C"/>
                 </a:solidFill>
               </a:defRPr>
             </a:pPr>
             <a:r>
               <a:rPr sz="1125">
                 <a:solidFill>
-                  <a:srgbClr val="5E7080"/>
-                </a:solidFill>
-              </a:rPr>
-              <a:t>100% of in-scope access reviewed.</a:t>
+                  <a:srgbClr val="5A6B7C"/>
+                </a:solidFill>
+              </a:rPr>
+              <a:t>No key fraud control is both operated and independently certified by the same accountable function.</a:t>
             </a:r>
           </a:p>
         </p:txBody>
@@ -11586,7 +11601,7 @@
           <p:cNvPr id="12" name="">
             <a:extLst xmlns:a="http://schemas.openxmlformats.org/drawingml/2006/main">
               <a:ext uri="{FF2B5EF4-FFF2-40B4-BE49-F238E27FC236}">
-                <a16:creationId xmlns:a16="http://schemas.microsoft.com/office/drawing/2014/main" id="{237FFC82-5E05-46DB-B3C8-F02D02C0B0C5}"/>
+                <a16:creationId xmlns:a16="http://schemas.microsoft.com/office/drawing/2014/main" id="{2C483A7D-7617-4540-86A3-630E6FD6E61A}"/>
               </a:ext>
             </a:extLst>
           </p:cNvPr>
@@ -11606,7 +11621,7 @@
           <a:noFill xmlns:a="http://schemas.openxmlformats.org/drawingml/2006/main"/>
           <a:ln xmlns:a="http://schemas.openxmlformats.org/drawingml/2006/main" w="9525">
             <a:solidFill>
-              <a:srgbClr val="D8E0E5"/>
+              <a:srgbClr val="D9E1E7"/>
             </a:solidFill>
             <a:prstDash val="solid"/>
           </a:ln>
@@ -11617,7 +11632,7 @@
           <p:cNvPr id="13" name="">
             <a:extLst xmlns:a="http://schemas.openxmlformats.org/drawingml/2006/main">
               <a:ext uri="{FF2B5EF4-FFF2-40B4-BE49-F238E27FC236}">
-                <a16:creationId xmlns:a16="http://schemas.microsoft.com/office/drawing/2014/main" id="{0509762B-CE87-4931-B99F-F085F848615E}"/>
+                <a16:creationId xmlns:a16="http://schemas.microsoft.com/office/drawing/2014/main" id="{A573C3C8-CA22-4FFA-97DD-11B4510649CA}"/>
               </a:ext>
             </a:extLst>
           </p:cNvPr>
@@ -11657,7 +11672,7 @@
                   <a:srgbClr val="142F4C"/>
                 </a:solidFill>
               </a:rPr>
-              <a:t>Run the first fixed-cycle detection tuning review.</a:t>
+              <a:t>Apply immediate escalation at "A qualifying matter escalated late, or an escalation routed only through an implicated manager." and deliver the exact control design: The Head of Risk must publish escalation criteria defining what must be escalated, to whom and within what time, grant monitoring staff explicit authority to escalate directly to the fraud-risk executive or audit-committee chair where a manager is implicated, protect escalators from retaliation, train the monitoring team annually, and review escalation timeliness against criteria each quarter.</a:t>
             </a:r>
           </a:p>
         </p:txBody>
@@ -11667,7 +11682,7 @@
           <p:cNvPr id="14" name="">
             <a:extLst xmlns:a="http://schemas.openxmlformats.org/drawingml/2006/main">
               <a:ext uri="{FF2B5EF4-FFF2-40B4-BE49-F238E27FC236}">
-                <a16:creationId xmlns:a16="http://schemas.microsoft.com/office/drawing/2014/main" id="{F6E4D2B4-574B-400E-B52E-9859E54C03B1}"/>
+                <a16:creationId xmlns:a16="http://schemas.microsoft.com/office/drawing/2014/main" id="{60243C32-ABF9-4C06-A425-C62FBEE85CF8}"/>
               </a:ext>
             </a:extLst>
           </p:cNvPr>
@@ -11697,17 +11712,17 @@
             <a:pPr>
               <a:defRPr sz="1200">
                 <a:solidFill>
-                  <a:srgbClr val="172232"/>
+                  <a:srgbClr val="1A2634"/>
                 </a:solidFill>
               </a:defRPr>
             </a:pPr>
             <a:r>
               <a:rPr sz="1200">
                 <a:solidFill>
-                  <a:srgbClr val="172232"/>
-                </a:solidFill>
-              </a:rPr>
-              <a:t>Chief Information Officer</a:t>
+                  <a:srgbClr val="1A2634"/>
+                </a:solidFill>
+              </a:rPr>
+              <a:t>Head of Risk</a:t>
             </a:r>
           </a:p>
         </p:txBody>
@@ -11717,7 +11732,7 @@
           <p:cNvPr id="15" name="">
             <a:extLst xmlns:a="http://schemas.openxmlformats.org/drawingml/2006/main">
               <a:ext uri="{FF2B5EF4-FFF2-40B4-BE49-F238E27FC236}">
-                <a16:creationId xmlns:a16="http://schemas.microsoft.com/office/drawing/2014/main" id="{F2AF0BDD-374F-4B58-8D02-EC12B96EFBFB}"/>
+                <a16:creationId xmlns:a16="http://schemas.microsoft.com/office/drawing/2014/main" id="{73649EB1-1565-4CA5-AAF1-8C2BC13D043C}"/>
               </a:ext>
             </a:extLst>
           </p:cNvPr>
@@ -11747,14 +11762,14 @@
             <a:pPr>
               <a:defRPr sz="1200" b="1">
                 <a:solidFill>
-                  <a:srgbClr val="C77B35"/>
+                  <a:srgbClr val="C9A227"/>
                 </a:solidFill>
               </a:defRPr>
             </a:pPr>
             <a:r>
               <a:rPr sz="1200" b="1">
                 <a:solidFill>
-                  <a:srgbClr val="C77B35"/>
+                  <a:srgbClr val="C9A227"/>
                 </a:solidFill>
               </a:rPr>
               <a:t>30 days</a:t>
@@ -11767,7 +11782,7 @@
           <p:cNvPr id="16" name="">
             <a:extLst xmlns:a="http://schemas.openxmlformats.org/drawingml/2006/main">
               <a:ext uri="{FF2B5EF4-FFF2-40B4-BE49-F238E27FC236}">
-                <a16:creationId xmlns:a16="http://schemas.microsoft.com/office/drawing/2014/main" id="{D115D7D9-FC54-4AEB-8D77-1C2875E3FD12}"/>
+                <a16:creationId xmlns:a16="http://schemas.microsoft.com/office/drawing/2014/main" id="{E68B8FE0-DBE9-47AF-BCC9-2359C377F2B3}"/>
               </a:ext>
             </a:extLst>
           </p:cNvPr>
@@ -11797,17 +11812,17 @@
             <a:pPr>
               <a:defRPr sz="1125">
                 <a:solidFill>
-                  <a:srgbClr val="5E7080"/>
+                  <a:srgbClr val="5A6B7C"/>
                 </a:solidFill>
               </a:defRPr>
             </a:pPr>
             <a:r>
               <a:rPr sz="1125">
                 <a:solidFill>
-                  <a:srgbClr val="5E7080"/>
-                </a:solidFill>
-              </a:rPr>
-              <a:t>100% of in-scope access reviewed.</a:t>
+                  <a:srgbClr val="5A6B7C"/>
+                </a:solidFill>
+              </a:rPr>
+              <a:t>100% of qualifying matters escalated within the stated timeframe, with an available conflict-free route.</a:t>
             </a:r>
           </a:p>
         </p:txBody>
@@ -11817,7 +11832,7 @@
           <p:cNvPr id="17" name="">
             <a:extLst xmlns:a="http://schemas.openxmlformats.org/drawingml/2006/main">
               <a:ext uri="{FF2B5EF4-FFF2-40B4-BE49-F238E27FC236}">
-                <a16:creationId xmlns:a16="http://schemas.microsoft.com/office/drawing/2014/main" id="{7C6B6F26-50A0-48AA-8280-207AA761B437}"/>
+                <a16:creationId xmlns:a16="http://schemas.microsoft.com/office/drawing/2014/main" id="{BDA2875C-9373-4B45-A2B8-0E44F86847D2}"/>
               </a:ext>
             </a:extLst>
           </p:cNvPr>
@@ -11837,7 +11852,7 @@
           <a:noFill xmlns:a="http://schemas.openxmlformats.org/drawingml/2006/main"/>
           <a:ln xmlns:a="http://schemas.openxmlformats.org/drawingml/2006/main" w="9525">
             <a:solidFill>
-              <a:srgbClr val="D8E0E5"/>
+              <a:srgbClr val="D9E1E7"/>
             </a:solidFill>
             <a:prstDash val="solid"/>
           </a:ln>
@@ -11848,7 +11863,7 @@
           <p:cNvPr id="18" name="">
             <a:extLst xmlns:a="http://schemas.openxmlformats.org/drawingml/2006/main">
               <a:ext uri="{FF2B5EF4-FFF2-40B4-BE49-F238E27FC236}">
-                <a16:creationId xmlns:a16="http://schemas.microsoft.com/office/drawing/2014/main" id="{40BF9817-6149-420B-AAD4-A0074AACDD85}"/>
+                <a16:creationId xmlns:a16="http://schemas.microsoft.com/office/drawing/2014/main" id="{9CC0CEB2-1E98-4549-A9DC-9CD221F36E68}"/>
               </a:ext>
             </a:extLst>
           </p:cNvPr>
@@ -11888,7 +11903,7 @@
                   <a:srgbClr val="142F4C"/>
                 </a:solidFill>
               </a:rPr>
-              <a:t>Review segregation-of-duties overrides and expiry.</a:t>
+              <a:t>Apply immediate escalation at "Any site or worker group below the awareness threshold, or reporting material not reaching non-desk staff." and deliver the exact control design: The ethics owner must publish reporting routes in plain language across the channels the workforce actually uses — induction packs, payslip inserts, notice boards at depots and sites, intranet and supervisor briefings — covering line manager, confidential channel and conflict-free alternate route; awareness is tested periodically by short survey or spot check, and results below threshold trigger a targeted re-communication for the affected sites or teams.</a:t>
             </a:r>
           </a:p>
         </p:txBody>
@@ -11898,7 +11913,7 @@
           <p:cNvPr id="19" name="">
             <a:extLst xmlns:a="http://schemas.openxmlformats.org/drawingml/2006/main">
               <a:ext uri="{FF2B5EF4-FFF2-40B4-BE49-F238E27FC236}">
-                <a16:creationId xmlns:a16="http://schemas.microsoft.com/office/drawing/2014/main" id="{8AD1364C-94C3-433E-847C-07D1CAAE6AD3}"/>
+                <a16:creationId xmlns:a16="http://schemas.microsoft.com/office/drawing/2014/main" id="{F0DBFF6A-7209-40C9-BF0B-FCA2E1DDA55F}"/>
               </a:ext>
             </a:extLst>
           </p:cNvPr>
@@ -11928,17 +11943,17 @@
             <a:pPr>
               <a:defRPr sz="1200">
                 <a:solidFill>
-                  <a:srgbClr val="172232"/>
+                  <a:srgbClr val="1A2634"/>
                 </a:solidFill>
               </a:defRPr>
             </a:pPr>
             <a:r>
               <a:rPr sz="1200">
                 <a:solidFill>
-                  <a:srgbClr val="172232"/>
-                </a:solidFill>
-              </a:rPr>
-              <a:t>Financial Controller</a:t>
+                  <a:srgbClr val="1A2634"/>
+                </a:solidFill>
+              </a:rPr>
+              <a:t>Chief People Officer / COO</a:t>
             </a:r>
           </a:p>
         </p:txBody>
@@ -11948,7 +11963,7 @@
           <p:cNvPr id="20" name="">
             <a:extLst xmlns:a="http://schemas.openxmlformats.org/drawingml/2006/main">
               <a:ext uri="{FF2B5EF4-FFF2-40B4-BE49-F238E27FC236}">
-                <a16:creationId xmlns:a16="http://schemas.microsoft.com/office/drawing/2014/main" id="{3E7F5ADD-B80B-46BF-95A3-2CD977E86C5E}"/>
+                <a16:creationId xmlns:a16="http://schemas.microsoft.com/office/drawing/2014/main" id="{EDC908C6-4732-4E4E-87B6-11D72CB77B04}"/>
               </a:ext>
             </a:extLst>
           </p:cNvPr>
@@ -11978,14 +11993,14 @@
             <a:pPr>
               <a:defRPr sz="1200" b="1">
                 <a:solidFill>
-                  <a:srgbClr val="C77B35"/>
+                  <a:srgbClr val="C9A227"/>
                 </a:solidFill>
               </a:defRPr>
             </a:pPr>
             <a:r>
               <a:rPr sz="1200" b="1">
                 <a:solidFill>
-                  <a:srgbClr val="C77B35"/>
+                  <a:srgbClr val="C9A227"/>
                 </a:solidFill>
               </a:rPr>
               <a:t>30 days</a:t>
@@ -11998,7 +12013,7 @@
           <p:cNvPr id="21" name="">
             <a:extLst xmlns:a="http://schemas.openxmlformats.org/drawingml/2006/main">
               <a:ext uri="{FF2B5EF4-FFF2-40B4-BE49-F238E27FC236}">
-                <a16:creationId xmlns:a16="http://schemas.microsoft.com/office/drawing/2014/main" id="{4E11AA12-AA4A-458C-9BD9-13E934726054}"/>
+                <a16:creationId xmlns:a16="http://schemas.microsoft.com/office/drawing/2014/main" id="{1AB66553-FD10-4458-8FD7-57EF54108E64}"/>
               </a:ext>
             </a:extLst>
           </p:cNvPr>
@@ -12028,17 +12043,17 @@
             <a:pPr>
               <a:defRPr sz="1125">
                 <a:solidFill>
-                  <a:srgbClr val="5E7080"/>
+                  <a:srgbClr val="5A6B7C"/>
                 </a:solidFill>
               </a:defRPr>
             </a:pPr>
             <a:r>
               <a:rPr sz="1125">
                 <a:solidFill>
-                  <a:srgbClr val="5E7080"/>
-                </a:solidFill>
-              </a:rPr>
-              <a:t>100% of in-scope access reviewed.</a:t>
+                  <a:srgbClr val="5A6B7C"/>
+                </a:solidFill>
+              </a:rPr>
+              <a:t>At least 90% of surveyed staff can correctly identify a fraud reporting route, across all sites and worker types.</a:t>
             </a:r>
           </a:p>
         </p:txBody>
@@ -12048,7 +12063,7 @@
           <p:cNvPr id="22" name="">
             <a:extLst xmlns:a="http://schemas.openxmlformats.org/drawingml/2006/main">
               <a:ext uri="{FF2B5EF4-FFF2-40B4-BE49-F238E27FC236}">
-                <a16:creationId xmlns:a16="http://schemas.microsoft.com/office/drawing/2014/main" id="{85301E41-C3DE-4792-B3EB-EC29D12A617E}"/>
+                <a16:creationId xmlns:a16="http://schemas.microsoft.com/office/drawing/2014/main" id="{02DD1571-6492-4EE9-A25F-B4549E89619E}"/>
               </a:ext>
             </a:extLst>
           </p:cNvPr>
@@ -12068,7 +12083,7 @@
           <a:noFill xmlns:a="http://schemas.openxmlformats.org/drawingml/2006/main"/>
           <a:ln xmlns:a="http://schemas.openxmlformats.org/drawingml/2006/main" w="9525">
             <a:solidFill>
-              <a:srgbClr val="D8E0E5"/>
+              <a:srgbClr val="D9E1E7"/>
             </a:solidFill>
             <a:prstDash val="solid"/>
           </a:ln>
@@ -12079,7 +12094,7 @@
           <p:cNvPr id="23" name="">
             <a:extLst xmlns:a="http://schemas.openxmlformats.org/drawingml/2006/main">
               <a:ext uri="{FF2B5EF4-FFF2-40B4-BE49-F238E27FC236}">
-                <a16:creationId xmlns:a16="http://schemas.microsoft.com/office/drawing/2014/main" id="{6B1569D4-9BC1-4C78-A5F4-6471EB191667}"/>
+                <a16:creationId xmlns:a16="http://schemas.microsoft.com/office/drawing/2014/main" id="{B5FE2902-A16B-4966-BB95-F11FB2874FFB}"/>
               </a:ext>
             </a:extLst>
           </p:cNvPr>
@@ -12119,7 +12134,7 @@
                   <a:srgbClr val="142F4C"/>
                 </a:solidFill>
               </a:rPr>
-              <a:t>Reconcile supplier bank-detail changes and add independent verification.</a:t>
+              <a:t>Apply immediate escalation at "Any unknown or unjustified privileged account, missed recertification or leaver access beyond 24 hours." and deliver the exact control design: IT Security maintains a complete privileged-account register, links each human and service account to an owner and approved justification, enforces separate named admin identities and MFA, records privileged sessions, and sends the full population quarterly to system owners and Risk for independent keep/remove certification; removals close within 24 hours for leavers and five business days otherwise.</a:t>
             </a:r>
           </a:p>
         </p:txBody>
@@ -12129,7 +12144,7 @@
           <p:cNvPr id="24" name="">
             <a:extLst xmlns:a="http://schemas.openxmlformats.org/drawingml/2006/main">
               <a:ext uri="{FF2B5EF4-FFF2-40B4-BE49-F238E27FC236}">
-                <a16:creationId xmlns:a16="http://schemas.microsoft.com/office/drawing/2014/main" id="{BCA8E41D-5836-4354-B552-7BD9DE1DE8B2}"/>
+                <a16:creationId xmlns:a16="http://schemas.microsoft.com/office/drawing/2014/main" id="{3F63745D-1458-4623-ADD4-F87CC6A4DE9A}"/>
               </a:ext>
             </a:extLst>
           </p:cNvPr>
@@ -12159,17 +12174,17 @@
             <a:pPr>
               <a:defRPr sz="1200">
                 <a:solidFill>
-                  <a:srgbClr val="172232"/>
+                  <a:srgbClr val="1A2634"/>
                 </a:solidFill>
               </a:defRPr>
             </a:pPr>
             <a:r>
               <a:rPr sz="1200">
                 <a:solidFill>
-                  <a:srgbClr val="172232"/>
-                </a:solidFill>
-              </a:rPr>
-              <a:t>Chief Information Officer</a:t>
+                  <a:srgbClr val="1A2634"/>
+                </a:solidFill>
+              </a:rPr>
+              <a:t>Chief Technology Officer</a:t>
             </a:r>
           </a:p>
         </p:txBody>
@@ -12179,7 +12194,7 @@
           <p:cNvPr id="25" name="">
             <a:extLst xmlns:a="http://schemas.openxmlformats.org/drawingml/2006/main">
               <a:ext uri="{FF2B5EF4-FFF2-40B4-BE49-F238E27FC236}">
-                <a16:creationId xmlns:a16="http://schemas.microsoft.com/office/drawing/2014/main" id="{251C57DB-F888-4BBA-9A0F-06DB4D2A6B46}"/>
+                <a16:creationId xmlns:a16="http://schemas.microsoft.com/office/drawing/2014/main" id="{9F6512A1-F1B0-4151-B883-B446A9DFB1E6}"/>
               </a:ext>
             </a:extLst>
           </p:cNvPr>
@@ -12209,17 +12224,17 @@
             <a:pPr>
               <a:defRPr sz="1200" b="1">
                 <a:solidFill>
-                  <a:srgbClr val="C77B35"/>
+                  <a:srgbClr val="C9A227"/>
                 </a:solidFill>
               </a:defRPr>
             </a:pPr>
             <a:r>
               <a:rPr sz="1200" b="1">
                 <a:solidFill>
-                  <a:srgbClr val="C77B35"/>
-                </a:solidFill>
-              </a:rPr>
-              <a:t>30 days</a:t>
+                  <a:srgbClr val="C9A227"/>
+                </a:solidFill>
+              </a:rPr>
+              <a:t>60 days</a:t>
             </a:r>
           </a:p>
         </p:txBody>
@@ -12229,7 +12244,7 @@
           <p:cNvPr id="26" name="">
             <a:extLst xmlns:a="http://schemas.openxmlformats.org/drawingml/2006/main">
               <a:ext uri="{FF2B5EF4-FFF2-40B4-BE49-F238E27FC236}">
-                <a16:creationId xmlns:a16="http://schemas.microsoft.com/office/drawing/2014/main" id="{82981F16-2704-485D-A4C9-B24F1D6AFA37}"/>
+                <a16:creationId xmlns:a16="http://schemas.microsoft.com/office/drawing/2014/main" id="{93820A22-2EAC-4773-9705-8CD72E3782B9}"/>
               </a:ext>
             </a:extLst>
           </p:cNvPr>
@@ -12259,17 +12274,17 @@
             <a:pPr>
               <a:defRPr sz="1125">
                 <a:solidFill>
-                  <a:srgbClr val="5E7080"/>
+                  <a:srgbClr val="5A6B7C"/>
                 </a:solidFill>
               </a:defRPr>
             </a:pPr>
             <a:r>
               <a:rPr sz="1125">
                 <a:solidFill>
-                  <a:srgbClr val="5E7080"/>
-                </a:solidFill>
-              </a:rPr>
-              <a:t>100% of in-scope access reviewed.</a:t>
+                  <a:srgbClr val="5A6B7C"/>
+                </a:solidFill>
+              </a:rPr>
+              <a:t>100% privileged accounts recertified quarterly; leaver access removed within 24 hours; zero unjustified shared admin accounts.</a:t>
             </a:r>
           </a:p>
         </p:txBody>
@@ -12279,7 +12294,7 @@
           <p:cNvPr id="27" name="">
             <a:extLst xmlns:a="http://schemas.openxmlformats.org/drawingml/2006/main">
               <a:ext uri="{FF2B5EF4-FFF2-40B4-BE49-F238E27FC236}">
-                <a16:creationId xmlns:a16="http://schemas.microsoft.com/office/drawing/2014/main" id="{82E54413-F235-459B-91A5-90524253879E}"/>
+                <a16:creationId xmlns:a16="http://schemas.microsoft.com/office/drawing/2014/main" id="{E50E61F9-3DEE-4FE1-8D42-3422697B4A7C}"/>
               </a:ext>
             </a:extLst>
           </p:cNvPr>
@@ -12299,7 +12314,7 @@
           <a:noFill xmlns:a="http://schemas.openxmlformats.org/drawingml/2006/main"/>
           <a:ln xmlns:a="http://schemas.openxmlformats.org/drawingml/2006/main" w="9525">
             <a:solidFill>
-              <a:srgbClr val="D8E0E5"/>
+              <a:srgbClr val="D9E1E7"/>
             </a:solidFill>
             <a:prstDash val="solid"/>
           </a:ln>
@@ -12310,7 +12325,7 @@
           <p:cNvPr id="28" name="">
             <a:extLst xmlns:a="http://schemas.openxmlformats.org/drawingml/2006/main">
               <a:ext uri="{FF2B5EF4-FFF2-40B4-BE49-F238E27FC236}">
-                <a16:creationId xmlns:a16="http://schemas.microsoft.com/office/drawing/2014/main" id="{CA5FB748-2567-48F5-BC12-6F47F2F9EA1C}"/>
+                <a16:creationId xmlns:a16="http://schemas.microsoft.com/office/drawing/2014/main" id="{2CBBD8CB-5E8F-4D65-B01D-750EC3F8DAFE}"/>
               </a:ext>
             </a:extLst>
           </p:cNvPr>
@@ -12350,7 +12365,7 @@
                   <a:srgbClr val="142F4C"/>
                 </a:solidFill>
               </a:rPr>
-              <a:t>Reconcile supplier bank-detail changes and add independent verification.</a:t>
+              <a:t>Apply immediate escalation at "Activation before verification, an unapproved exception, or a sensitive change without re-verification." and deliver the exact control design: The process owner must define the risk points requiring verification — customer or beneficiary enrolment, employee onboarding, supplier activation and counterparty contracting — and apply proportionate checks against independent sources such as identity documents validated for authenticity, company registration records, and confirmation of contact details through independently obtained channels; results and evidence are retained under applicable data-protection obligations, exceptions require documented approval, and sensitive profile or banking changes trigger re-verification.</a:t>
             </a:r>
           </a:p>
         </p:txBody>
@@ -12360,7 +12375,7 @@
           <p:cNvPr id="29" name="">
             <a:extLst xmlns:a="http://schemas.openxmlformats.org/drawingml/2006/main">
               <a:ext uri="{FF2B5EF4-FFF2-40B4-BE49-F238E27FC236}">
-                <a16:creationId xmlns:a16="http://schemas.microsoft.com/office/drawing/2014/main" id="{555ABFE9-70B0-4791-8A71-227414E9CD0C}"/>
+                <a16:creationId xmlns:a16="http://schemas.microsoft.com/office/drawing/2014/main" id="{1C2DF64B-9FFA-4340-B25D-DF065D49F446}"/>
               </a:ext>
             </a:extLst>
           </p:cNvPr>
@@ -12390,17 +12405,17 @@
             <a:pPr>
               <a:defRPr sz="1200">
                 <a:solidFill>
-                  <a:srgbClr val="172232"/>
+                  <a:srgbClr val="1A2634"/>
                 </a:solidFill>
               </a:defRPr>
             </a:pPr>
             <a:r>
               <a:rPr sz="1200">
                 <a:solidFill>
-                  <a:srgbClr val="172232"/>
-                </a:solidFill>
-              </a:rPr>
-              <a:t>Chief Information Officer</a:t>
+                  <a:srgbClr val="1A2634"/>
+                </a:solidFill>
+              </a:rPr>
+              <a:t>COO / CFO</a:t>
             </a:r>
           </a:p>
         </p:txBody>
@@ -12410,7 +12425,7 @@
           <p:cNvPr id="30" name="">
             <a:extLst xmlns:a="http://schemas.openxmlformats.org/drawingml/2006/main">
               <a:ext uri="{FF2B5EF4-FFF2-40B4-BE49-F238E27FC236}">
-                <a16:creationId xmlns:a16="http://schemas.microsoft.com/office/drawing/2014/main" id="{52A3266C-F443-4D4E-986F-AA4DA4914A8A}"/>
+                <a16:creationId xmlns:a16="http://schemas.microsoft.com/office/drawing/2014/main" id="{A7FC2E35-86FA-4DDB-B5CF-6843F25CCE6E}"/>
               </a:ext>
             </a:extLst>
           </p:cNvPr>
@@ -12440,14 +12455,14 @@
             <a:pPr>
               <a:defRPr sz="1200" b="1">
                 <a:solidFill>
-                  <a:srgbClr val="C77B35"/>
+                  <a:srgbClr val="C9A227"/>
                 </a:solidFill>
               </a:defRPr>
             </a:pPr>
             <a:r>
               <a:rPr sz="1200" b="1">
                 <a:solidFill>
-                  <a:srgbClr val="C77B35"/>
+                  <a:srgbClr val="C9A227"/>
                 </a:solidFill>
               </a:rPr>
               <a:t>60 days</a:t>
@@ -12460,7 +12475,7 @@
           <p:cNvPr id="31" name="">
             <a:extLst xmlns:a="http://schemas.openxmlformats.org/drawingml/2006/main">
               <a:ext uri="{FF2B5EF4-FFF2-40B4-BE49-F238E27FC236}">
-                <a16:creationId xmlns:a16="http://schemas.microsoft.com/office/drawing/2014/main" id="{64ED4B57-4A4E-4047-B0AB-69D807155247}"/>
+                <a16:creationId xmlns:a16="http://schemas.microsoft.com/office/drawing/2014/main" id="{69A7FB38-F15A-410E-8056-7FA442211B1D}"/>
               </a:ext>
             </a:extLst>
           </p:cNvPr>
@@ -12490,17 +12505,17 @@
             <a:pPr>
               <a:defRPr sz="1125">
                 <a:solidFill>
-                  <a:srgbClr val="5E7080"/>
+                  <a:srgbClr val="5A6B7C"/>
                 </a:solidFill>
               </a:defRPr>
             </a:pPr>
             <a:r>
               <a:rPr sz="1125">
                 <a:solidFill>
-                  <a:srgbClr val="5E7080"/>
-                </a:solidFill>
-              </a:rPr>
-              <a:t>All active rules reviewed monthly.</a:t>
+                  <a:srgbClr val="5A6B7C"/>
+                </a:solidFill>
+              </a:rPr>
+              <a:t>100% of in-scope enrolments and activations carry completed verification before activation, with all exceptions approved.</a:t>
             </a:r>
           </a:p>
         </p:txBody>
@@ -12510,7 +12525,7 @@
           <p:cNvPr id="32" name="">
             <a:extLst xmlns:a="http://schemas.openxmlformats.org/drawingml/2006/main">
               <a:ext uri="{FF2B5EF4-FFF2-40B4-BE49-F238E27FC236}">
-                <a16:creationId xmlns:a16="http://schemas.microsoft.com/office/drawing/2014/main" id="{35FDDBAD-386C-4D26-81F0-A2EE0336A464}"/>
+                <a16:creationId xmlns:a16="http://schemas.microsoft.com/office/drawing/2014/main" id="{F8878E1A-8991-476A-8568-21E81E8D8DB0}"/>
               </a:ext>
             </a:extLst>
           </p:cNvPr>
@@ -12540,14 +12555,14 @@
             <a:pPr>
               <a:defRPr sz="1050" b="1">
                 <a:solidFill>
-                  <a:srgbClr val="5E7080"/>
+                  <a:srgbClr val="5A6B7C"/>
                 </a:solidFill>
               </a:defRPr>
             </a:pPr>
             <a:r>
               <a:rPr sz="1050" b="1">
                 <a:solidFill>
-                  <a:srgbClr val="5E7080"/>
+                  <a:srgbClr val="5A6B7C"/>
                 </a:solidFill>
               </a:rPr>
               <a:t>Owner</a:t>
@@ -12560,7 +12575,7 @@
           <p:cNvPr id="33" name="">
             <a:extLst xmlns:a="http://schemas.openxmlformats.org/drawingml/2006/main">
               <a:ext uri="{FF2B5EF4-FFF2-40B4-BE49-F238E27FC236}">
-                <a16:creationId xmlns:a16="http://schemas.microsoft.com/office/drawing/2014/main" id="{EFCBF7D3-EE7F-4A89-85F8-E4E2BDEF7E5B}"/>
+                <a16:creationId xmlns:a16="http://schemas.microsoft.com/office/drawing/2014/main" id="{35D286EB-D350-4FE6-92B3-6C4B474723F4}"/>
               </a:ext>
             </a:extLst>
           </p:cNvPr>
@@ -12590,14 +12605,14 @@
             <a:pPr>
               <a:defRPr sz="1050" b="1">
                 <a:solidFill>
-                  <a:srgbClr val="5E7080"/>
+                  <a:srgbClr val="5A6B7C"/>
                 </a:solidFill>
               </a:defRPr>
             </a:pPr>
             <a:r>
               <a:rPr sz="1050" b="1">
                 <a:solidFill>
-                  <a:srgbClr val="5E7080"/>
+                  <a:srgbClr val="5A6B7C"/>
                 </a:solidFill>
               </a:rPr>
               <a:t>Timing</a:t>
@@ -12610,7 +12625,7 @@
           <p:cNvPr id="34" name="">
             <a:extLst xmlns:a="http://schemas.openxmlformats.org/drawingml/2006/main">
               <a:ext uri="{FF2B5EF4-FFF2-40B4-BE49-F238E27FC236}">
-                <a16:creationId xmlns:a16="http://schemas.microsoft.com/office/drawing/2014/main" id="{8D854AB7-E331-459A-BB00-3ACB77AF3245}"/>
+                <a16:creationId xmlns:a16="http://schemas.microsoft.com/office/drawing/2014/main" id="{4E13429B-2954-4A50-A30F-F83B56AA5F92}"/>
               </a:ext>
             </a:extLst>
           </p:cNvPr>
@@ -12640,14 +12655,14 @@
             <a:pPr>
               <a:defRPr sz="1050" b="1">
                 <a:solidFill>
-                  <a:srgbClr val="5E7080"/>
+                  <a:srgbClr val="5A6B7C"/>
                 </a:solidFill>
               </a:defRPr>
             </a:pPr>
             <a:r>
               <a:rPr sz="1050" b="1">
                 <a:solidFill>
-                  <a:srgbClr val="5E7080"/>
+                  <a:srgbClr val="5A6B7C"/>
                 </a:solidFill>
               </a:rPr>
               <a:t>Effectiveness measure</a:t>
@@ -12658,7 +12673,7 @@
     </p:spTree>
     <p:extLst>
       <p:ext uri="{BB962C8B-B14F-4D97-AF65-F5344CB8AC3E}">
-        <p14:creationId xmlns:p14="http://schemas.microsoft.com/office/powerpoint/2010/main" val="733999771"/>
+        <p14:creationId xmlns:p14="http://schemas.microsoft.com/office/powerpoint/2010/main" val="979697871"/>
       </p:ext>
     </p:extLst>
   </p:cSld>
